--- a/就職作品制作アピール.pptx
+++ b/就職作品制作アピール.pptx
@@ -5,21 +5,21 @@
     <p:sldMasterId id="2147483648" r:id="rId1"/>
   </p:sldMasterIdLst>
   <p:sldIdLst>
-    <p:sldId id="256" r:id="rId6"/>
-    <p:sldId id="257" r:id="rId7"/>
-    <p:sldId id="258" r:id="rId8"/>
-    <p:sldId id="259" r:id="rId9"/>
-    <p:sldId id="260" r:id="rId10"/>
-    <p:sldId id="261" r:id="rId11"/>
-    <p:sldId id="262" r:id="rId12"/>
-    <p:sldId id="263" r:id="rId13"/>
-    <p:sldId id="264" r:id="rId14"/>
-    <p:sldId id="265" r:id="rId15"/>
-    <p:sldId id="266" r:id="rId16"/>
-    <p:sldId id="267" r:id="rId17"/>
-    <p:sldId id="268" r:id="rId18"/>
-    <p:sldId id="269" r:id="rId19"/>
-    <p:sldId id="270" r:id="rId20"/>
+    <p:sldId id="256" r:id="rId2"/>
+    <p:sldId id="257" r:id="rId3"/>
+    <p:sldId id="258" r:id="rId4"/>
+    <p:sldId id="259" r:id="rId5"/>
+    <p:sldId id="260" r:id="rId6"/>
+    <p:sldId id="261" r:id="rId7"/>
+    <p:sldId id="262" r:id="rId8"/>
+    <p:sldId id="263" r:id="rId9"/>
+    <p:sldId id="264" r:id="rId10"/>
+    <p:sldId id="265" r:id="rId11"/>
+    <p:sldId id="266" r:id="rId12"/>
+    <p:sldId id="267" r:id="rId13"/>
+    <p:sldId id="268" r:id="rId14"/>
+    <p:sldId id="269" r:id="rId15"/>
+    <p:sldId id="270" r:id="rId16"/>
   </p:sldIdLst>
   <p:sldSz cx="12192000" cy="6858000"/>
   <p:notesSz cx="12192000" cy="6858000"/>
@@ -28,11 +28,27 @@
       <a:defRPr kern="0"/>
     </a:defPPr>
   </p:defaultTextStyle>
+  <p:extLst>
+    <p:ext uri="{EFAFB233-063F-42B5-8137-9DF3F51BA10A}">
+      <p15:sldGuideLst xmlns:p15="http://schemas.microsoft.com/office/powerpoint/2012/main">
+        <p15:guide id="1" orient="horz" pos="2880">
+          <p15:clr>
+            <a:srgbClr val="A4A3A4"/>
+          </p15:clr>
+        </p15:guide>
+        <p15:guide id="2" pos="2160">
+          <p15:clr>
+            <a:srgbClr val="A4A3A4"/>
+          </p15:clr>
+        </p15:guide>
+      </p15:sldGuideLst>
+    </p:ext>
+  </p:extLst>
 </p:presentation>
 </file>
 
 <file path=ppt/slideLayouts/slideLayout1.xml><?xml version="1.0" encoding="utf-8"?>
-<p:sldLayout xmlns:a="http://schemas.openxmlformats.org/drawingml/2006/main" xmlns:r="http://schemas.openxmlformats.org/officeDocument/2006/relationships" xmlns:p="http://schemas.openxmlformats.org/presentationml/2006/main" preserve="1" type="obj">
+<p:sldLayout xmlns:a="http://schemas.openxmlformats.org/drawingml/2006/main" xmlns:r="http://schemas.openxmlformats.org/officeDocument/2006/relationships" xmlns:p="http://schemas.openxmlformats.org/presentationml/2006/main" type="obj" preserve="1">
   <p:cSld name="Title Slide">
     <p:spTree>
       <p:nvGrpSpPr>
@@ -82,7 +98,9 @@
               </a:defRPr>
             </a:lvl1pPr>
           </a:lstStyle>
-          <a:p/>
+          <a:p>
+            <a:endParaRPr/>
+          </a:p>
         </p:txBody>
       </p:sp>
       <p:sp>
@@ -119,7 +137,9 @@
               </a:defRPr>
             </a:lvl1pPr>
           </a:lstStyle>
-          <a:p/>
+          <a:p>
+            <a:endParaRPr/>
+          </a:p>
         </p:txBody>
       </p:sp>
       <p:sp>
@@ -129,7 +149,7 @@
             <a:spLocks noGrp="1"/>
           </p:cNvSpPr>
           <p:nvPr>
-            <p:ph type="ftr" idx="5" sz="quarter"/>
+            <p:ph type="ftr" sz="quarter" idx="5"/>
           </p:nvPr>
         </p:nvSpPr>
         <p:spPr/>
@@ -146,7 +166,9 @@
               </a:defRPr>
             </a:lvl1pPr>
           </a:lstStyle>
-          <a:p/>
+          <a:p>
+            <a:endParaRPr/>
+          </a:p>
         </p:txBody>
       </p:sp>
       <p:sp>
@@ -156,7 +178,7 @@
             <a:spLocks noGrp="1"/>
           </p:cNvSpPr>
           <p:nvPr>
-            <p:ph type="dt" idx="6" sz="half"/>
+            <p:ph type="dt" sz="half" idx="6"/>
           </p:nvPr>
         </p:nvSpPr>
         <p:spPr/>
@@ -176,7 +198,9 @@
           <a:p>
             <a:fld id="{1D8BD707-D9CF-40AE-B4C6-C98DA3205C09}" type="datetimeFigureOut">
               <a:rPr lang="en-US"/>
+              <a:t>12/13/2025</a:t>
             </a:fld>
+            <a:endParaRPr lang="en-US"/>
           </a:p>
         </p:txBody>
       </p:sp>
@@ -187,7 +211,7 @@
             <a:spLocks noGrp="1"/>
           </p:cNvSpPr>
           <p:nvPr>
-            <p:ph type="sldNum" idx="7" sz="quarter"/>
+            <p:ph type="sldNum" sz="quarter" idx="7"/>
           </p:nvPr>
         </p:nvSpPr>
         <p:spPr/>
@@ -206,8 +230,9 @@
           </a:lstStyle>
           <a:p>
             <a:fld id="{B6F15528-21DE-4FAA-801E-634DDDAF4B2B}" type="slidenum">
-              <a:t>#</a:t>
+              <a:t>‹#›</a:t>
             </a:fld>
+            <a:endParaRPr/>
           </a:p>
         </p:txBody>
       </p:sp>
@@ -220,7 +245,7 @@
 </file>
 
 <file path=ppt/slideLayouts/slideLayout2.xml><?xml version="1.0" encoding="utf-8"?>
-<p:sldLayout xmlns:a="http://schemas.openxmlformats.org/drawingml/2006/main" xmlns:r="http://schemas.openxmlformats.org/officeDocument/2006/relationships" xmlns:p="http://schemas.openxmlformats.org/presentationml/2006/main" preserve="1" type="obj">
+<p:sldLayout xmlns:a="http://schemas.openxmlformats.org/drawingml/2006/main" xmlns:r="http://schemas.openxmlformats.org/officeDocument/2006/relationships" xmlns:p="http://schemas.openxmlformats.org/presentationml/2006/main" type="obj" preserve="1">
   <p:cSld name="Title and Content">
     <p:spTree>
       <p:nvGrpSpPr>
@@ -260,7 +285,9 @@
               </a:defRPr>
             </a:lvl1pPr>
           </a:lstStyle>
-          <a:p/>
+          <a:p>
+            <a:endParaRPr/>
+          </a:p>
         </p:txBody>
       </p:sp>
       <p:sp>
@@ -287,7 +314,9 @@
               </a:defRPr>
             </a:lvl1pPr>
           </a:lstStyle>
-          <a:p/>
+          <a:p>
+            <a:endParaRPr/>
+          </a:p>
         </p:txBody>
       </p:sp>
       <p:sp>
@@ -297,7 +326,7 @@
             <a:spLocks noGrp="1"/>
           </p:cNvSpPr>
           <p:nvPr>
-            <p:ph type="ftr" idx="5" sz="quarter"/>
+            <p:ph type="ftr" sz="quarter" idx="5"/>
           </p:nvPr>
         </p:nvSpPr>
         <p:spPr/>
@@ -314,7 +343,9 @@
               </a:defRPr>
             </a:lvl1pPr>
           </a:lstStyle>
-          <a:p/>
+          <a:p>
+            <a:endParaRPr/>
+          </a:p>
         </p:txBody>
       </p:sp>
       <p:sp>
@@ -324,7 +355,7 @@
             <a:spLocks noGrp="1"/>
           </p:cNvSpPr>
           <p:nvPr>
-            <p:ph type="dt" idx="6" sz="half"/>
+            <p:ph type="dt" sz="half" idx="6"/>
           </p:nvPr>
         </p:nvSpPr>
         <p:spPr/>
@@ -344,7 +375,9 @@
           <a:p>
             <a:fld id="{1D8BD707-D9CF-40AE-B4C6-C98DA3205C09}" type="datetimeFigureOut">
               <a:rPr lang="en-US"/>
+              <a:t>12/13/2025</a:t>
             </a:fld>
+            <a:endParaRPr lang="en-US"/>
           </a:p>
         </p:txBody>
       </p:sp>
@@ -355,7 +388,7 @@
             <a:spLocks noGrp="1"/>
           </p:cNvSpPr>
           <p:nvPr>
-            <p:ph type="sldNum" idx="7" sz="quarter"/>
+            <p:ph type="sldNum" sz="quarter" idx="7"/>
           </p:nvPr>
         </p:nvSpPr>
         <p:spPr/>
@@ -374,8 +407,9 @@
           </a:lstStyle>
           <a:p>
             <a:fld id="{B6F15528-21DE-4FAA-801E-634DDDAF4B2B}" type="slidenum">
-              <a:t>#</a:t>
+              <a:t>‹#›</a:t>
             </a:fld>
+            <a:endParaRPr/>
           </a:p>
         </p:txBody>
       </p:sp>
@@ -388,7 +422,7 @@
 </file>
 
 <file path=ppt/slideLayouts/slideLayout3.xml><?xml version="1.0" encoding="utf-8"?>
-<p:sldLayout xmlns:a="http://schemas.openxmlformats.org/drawingml/2006/main" xmlns:r="http://schemas.openxmlformats.org/officeDocument/2006/relationships" xmlns:p="http://schemas.openxmlformats.org/presentationml/2006/main" preserve="1" type="obj">
+<p:sldLayout xmlns:a="http://schemas.openxmlformats.org/drawingml/2006/main" xmlns:r="http://schemas.openxmlformats.org/officeDocument/2006/relationships" xmlns:p="http://schemas.openxmlformats.org/presentationml/2006/main" type="obj" preserve="1">
   <p:cSld name="Two Content">
     <p:spTree>
       <p:nvGrpSpPr>
@@ -428,7 +462,9 @@
               </a:defRPr>
             </a:lvl1pPr>
           </a:lstStyle>
-          <a:p/>
+          <a:p>
+            <a:endParaRPr/>
+          </a:p>
         </p:txBody>
       </p:sp>
       <p:sp>
@@ -438,7 +474,7 @@
             <a:spLocks noGrp="1"/>
           </p:cNvSpPr>
           <p:nvPr>
-            <p:ph idx="2" sz="half"/>
+            <p:ph sz="half" idx="2"/>
           </p:nvPr>
         </p:nvSpPr>
         <p:spPr>
@@ -459,7 +495,9 @@
               <a:defRPr/>
             </a:lvl1pPr>
           </a:lstStyle>
-          <a:p/>
+          <a:p>
+            <a:endParaRPr/>
+          </a:p>
         </p:txBody>
       </p:sp>
       <p:sp>
@@ -469,7 +507,7 @@
             <a:spLocks noGrp="1"/>
           </p:cNvSpPr>
           <p:nvPr>
-            <p:ph idx="3" sz="half"/>
+            <p:ph sz="half" idx="3"/>
           </p:nvPr>
         </p:nvSpPr>
         <p:spPr>
@@ -490,7 +528,9 @@
               <a:defRPr/>
             </a:lvl1pPr>
           </a:lstStyle>
-          <a:p/>
+          <a:p>
+            <a:endParaRPr/>
+          </a:p>
         </p:txBody>
       </p:sp>
       <p:sp>
@@ -500,7 +540,7 @@
             <a:spLocks noGrp="1"/>
           </p:cNvSpPr>
           <p:nvPr>
-            <p:ph type="ftr" idx="5" sz="quarter"/>
+            <p:ph type="ftr" sz="quarter" idx="5"/>
           </p:nvPr>
         </p:nvSpPr>
         <p:spPr/>
@@ -517,7 +557,9 @@
               </a:defRPr>
             </a:lvl1pPr>
           </a:lstStyle>
-          <a:p/>
+          <a:p>
+            <a:endParaRPr/>
+          </a:p>
         </p:txBody>
       </p:sp>
       <p:sp>
@@ -527,7 +569,7 @@
             <a:spLocks noGrp="1"/>
           </p:cNvSpPr>
           <p:nvPr>
-            <p:ph type="dt" idx="6" sz="half"/>
+            <p:ph type="dt" sz="half" idx="6"/>
           </p:nvPr>
         </p:nvSpPr>
         <p:spPr/>
@@ -547,7 +589,9 @@
           <a:p>
             <a:fld id="{1D8BD707-D9CF-40AE-B4C6-C98DA3205C09}" type="datetimeFigureOut">
               <a:rPr lang="en-US"/>
+              <a:t>12/13/2025</a:t>
             </a:fld>
+            <a:endParaRPr lang="en-US"/>
           </a:p>
         </p:txBody>
       </p:sp>
@@ -558,7 +602,7 @@
             <a:spLocks noGrp="1"/>
           </p:cNvSpPr>
           <p:nvPr>
-            <p:ph type="sldNum" idx="7" sz="quarter"/>
+            <p:ph type="sldNum" sz="quarter" idx="7"/>
           </p:nvPr>
         </p:nvSpPr>
         <p:spPr/>
@@ -577,8 +621,9 @@
           </a:lstStyle>
           <a:p>
             <a:fld id="{B6F15528-21DE-4FAA-801E-634DDDAF4B2B}" type="slidenum">
-              <a:t>#</a:t>
+              <a:t>‹#›</a:t>
             </a:fld>
+            <a:endParaRPr/>
           </a:p>
         </p:txBody>
       </p:sp>
@@ -591,7 +636,7 @@
 </file>
 
 <file path=ppt/slideLayouts/slideLayout4.xml><?xml version="1.0" encoding="utf-8"?>
-<p:sldLayout xmlns:a="http://schemas.openxmlformats.org/drawingml/2006/main" xmlns:r="http://schemas.openxmlformats.org/officeDocument/2006/relationships" xmlns:p="http://schemas.openxmlformats.org/presentationml/2006/main" preserve="1" type="obj">
+<p:sldLayout xmlns:a="http://schemas.openxmlformats.org/drawingml/2006/main" xmlns:r="http://schemas.openxmlformats.org/officeDocument/2006/relationships" xmlns:p="http://schemas.openxmlformats.org/presentationml/2006/main" type="obj" preserve="1">
   <p:cSld name="Title Only">
     <p:spTree>
       <p:nvGrpSpPr>
@@ -631,7 +676,9 @@
               </a:defRPr>
             </a:lvl1pPr>
           </a:lstStyle>
-          <a:p/>
+          <a:p>
+            <a:endParaRPr/>
+          </a:p>
         </p:txBody>
       </p:sp>
       <p:sp>
@@ -641,7 +688,7 @@
             <a:spLocks noGrp="1"/>
           </p:cNvSpPr>
           <p:nvPr>
-            <p:ph type="ftr" idx="5" sz="quarter"/>
+            <p:ph type="ftr" sz="quarter" idx="5"/>
           </p:nvPr>
         </p:nvSpPr>
         <p:spPr/>
@@ -658,7 +705,9 @@
               </a:defRPr>
             </a:lvl1pPr>
           </a:lstStyle>
-          <a:p/>
+          <a:p>
+            <a:endParaRPr/>
+          </a:p>
         </p:txBody>
       </p:sp>
       <p:sp>
@@ -668,7 +717,7 @@
             <a:spLocks noGrp="1"/>
           </p:cNvSpPr>
           <p:nvPr>
-            <p:ph type="dt" idx="6" sz="half"/>
+            <p:ph type="dt" sz="half" idx="6"/>
           </p:nvPr>
         </p:nvSpPr>
         <p:spPr/>
@@ -688,7 +737,9 @@
           <a:p>
             <a:fld id="{1D8BD707-D9CF-40AE-B4C6-C98DA3205C09}" type="datetimeFigureOut">
               <a:rPr lang="en-US"/>
+              <a:t>12/13/2025</a:t>
             </a:fld>
+            <a:endParaRPr lang="en-US"/>
           </a:p>
         </p:txBody>
       </p:sp>
@@ -699,7 +750,7 @@
             <a:spLocks noGrp="1"/>
           </p:cNvSpPr>
           <p:nvPr>
-            <p:ph type="sldNum" idx="7" sz="quarter"/>
+            <p:ph type="sldNum" sz="quarter" idx="7"/>
           </p:nvPr>
         </p:nvSpPr>
         <p:spPr/>
@@ -718,8 +769,9 @@
           </a:lstStyle>
           <a:p>
             <a:fld id="{B6F15528-21DE-4FAA-801E-634DDDAF4B2B}" type="slidenum">
-              <a:t>#</a:t>
+              <a:t>‹#›</a:t>
             </a:fld>
+            <a:endParaRPr/>
           </a:p>
         </p:txBody>
       </p:sp>
@@ -732,7 +784,7 @@
 </file>
 
 <file path=ppt/slideLayouts/slideLayout5.xml><?xml version="1.0" encoding="utf-8"?>
-<p:sldLayout xmlns:a="http://schemas.openxmlformats.org/drawingml/2006/main" xmlns:r="http://schemas.openxmlformats.org/officeDocument/2006/relationships" xmlns:p="http://schemas.openxmlformats.org/presentationml/2006/main" preserve="1" type="obj">
+<p:sldLayout xmlns:a="http://schemas.openxmlformats.org/drawingml/2006/main" xmlns:r="http://schemas.openxmlformats.org/officeDocument/2006/relationships" xmlns:p="http://schemas.openxmlformats.org/presentationml/2006/main" type="obj" preserve="1">
   <p:cSld name="Blank">
     <p:spTree>
       <p:nvGrpSpPr>
@@ -755,7 +807,7 @@
             <a:spLocks noGrp="1"/>
           </p:cNvSpPr>
           <p:nvPr>
-            <p:ph type="ftr" idx="5" sz="quarter"/>
+            <p:ph type="ftr" sz="quarter" idx="5"/>
           </p:nvPr>
         </p:nvSpPr>
         <p:spPr/>
@@ -772,7 +824,9 @@
               </a:defRPr>
             </a:lvl1pPr>
           </a:lstStyle>
-          <a:p/>
+          <a:p>
+            <a:endParaRPr/>
+          </a:p>
         </p:txBody>
       </p:sp>
       <p:sp>
@@ -782,7 +836,7 @@
             <a:spLocks noGrp="1"/>
           </p:cNvSpPr>
           <p:nvPr>
-            <p:ph type="dt" idx="6" sz="half"/>
+            <p:ph type="dt" sz="half" idx="6"/>
           </p:nvPr>
         </p:nvSpPr>
         <p:spPr/>
@@ -802,7 +856,9 @@
           <a:p>
             <a:fld id="{1D8BD707-D9CF-40AE-B4C6-C98DA3205C09}" type="datetimeFigureOut">
               <a:rPr lang="en-US"/>
+              <a:t>12/13/2025</a:t>
             </a:fld>
+            <a:endParaRPr lang="en-US"/>
           </a:p>
         </p:txBody>
       </p:sp>
@@ -813,7 +869,7 @@
             <a:spLocks noGrp="1"/>
           </p:cNvSpPr>
           <p:nvPr>
-            <p:ph type="sldNum" idx="7" sz="quarter"/>
+            <p:ph type="sldNum" sz="quarter" idx="7"/>
           </p:nvPr>
         </p:nvSpPr>
         <p:spPr/>
@@ -832,8 +888,9 @@
           </a:lstStyle>
           <a:p>
             <a:fld id="{B6F15528-21DE-4FAA-801E-634DDDAF4B2B}" type="slidenum">
-              <a:t>#</a:t>
+              <a:t>‹#›</a:t>
             </a:fld>
+            <a:endParaRPr/>
           </a:p>
         </p:txBody>
       </p:sp>
@@ -926,7 +983,9 @@
               </a:defRPr>
             </a:lvl1pPr>
           </a:lstStyle>
-          <a:p/>
+          <a:p>
+            <a:endParaRPr/>
+          </a:p>
         </p:txBody>
       </p:sp>
       <p:sp>
@@ -963,7 +1022,9 @@
               </a:defRPr>
             </a:lvl1pPr>
           </a:lstStyle>
-          <a:p/>
+          <a:p>
+            <a:endParaRPr/>
+          </a:p>
         </p:txBody>
       </p:sp>
       <p:sp>
@@ -973,7 +1034,7 @@
             <a:spLocks noGrp="1"/>
           </p:cNvSpPr>
           <p:nvPr>
-            <p:ph type="ftr" idx="5" sz="quarter"/>
+            <p:ph type="ftr" sz="quarter" idx="5"/>
           </p:nvPr>
         </p:nvSpPr>
         <p:spPr>
@@ -1000,7 +1061,9 @@
               </a:defRPr>
             </a:lvl1pPr>
           </a:lstStyle>
-          <a:p/>
+          <a:p>
+            <a:endParaRPr/>
+          </a:p>
         </p:txBody>
       </p:sp>
       <p:sp>
@@ -1010,7 +1073,7 @@
             <a:spLocks noGrp="1"/>
           </p:cNvSpPr>
           <p:nvPr>
-            <p:ph type="dt" idx="6" sz="half"/>
+            <p:ph type="dt" sz="half" idx="6"/>
           </p:nvPr>
         </p:nvSpPr>
         <p:spPr>
@@ -1040,7 +1103,9 @@
           <a:p>
             <a:fld id="{1D8BD707-D9CF-40AE-B4C6-C98DA3205C09}" type="datetimeFigureOut">
               <a:rPr lang="en-US"/>
+              <a:t>12/13/2025</a:t>
             </a:fld>
+            <a:endParaRPr lang="en-US"/>
           </a:p>
         </p:txBody>
       </p:sp>
@@ -1051,7 +1116,7 @@
             <a:spLocks noGrp="1"/>
           </p:cNvSpPr>
           <p:nvPr>
-            <p:ph type="sldNum" idx="7" sz="quarter"/>
+            <p:ph type="sldNum" sz="quarter" idx="7"/>
           </p:nvPr>
         </p:nvSpPr>
         <p:spPr>
@@ -1080,14 +1145,15 @@
           </a:lstStyle>
           <a:p>
             <a:fld id="{B6F15528-21DE-4FAA-801E-634DDDAF4B2B}" type="slidenum">
-              <a:t>#</a:t>
+              <a:t>‹#›</a:t>
             </a:fld>
+            <a:endParaRPr/>
           </a:p>
         </p:txBody>
       </p:sp>
     </p:spTree>
   </p:cSld>
-  <p:clrMap folHlink="folHlink" hlink="hlink" accent1="accent1" accent2="accent2" accent3="accent3" accent4="accent4" accent5="accent5" accent6="accent6" tx2="dk2" bg2="lt2" tx1="dk1" bg1="lt1"/>
+  <p:clrMap bg1="lt1" tx1="dk1" bg2="lt2" tx2="dk2" accent1="accent1" accent2="accent2" accent3="accent3" accent4="accent4" accent5="accent5" accent6="accent6" hlink="hlink" folHlink="folHlink"/>
   <p:sldLayoutIdLst>
     <p:sldLayoutId id="2147483661" r:id="rId1"/>
     <p:sldLayoutId id="2147483662" r:id="rId2"/>
@@ -1268,13 +1334,15 @@
         </p:nvSpPr>
         <p:spPr>
           <a:xfrm>
-            <a:off x="840130" y="1247597"/>
+            <a:off x="838200" y="1905000"/>
             <a:ext cx="10736580" cy="940435"/>
           </a:xfrm>
-          <a:prstGeom prst="rect"/>
+          <a:prstGeom prst="rect">
+            <a:avLst/>
+          </a:prstGeom>
         </p:spPr>
         <p:txBody>
-          <a:bodyPr wrap="square" lIns="0" tIns="12700" rIns="0" bIns="0" rtlCol="0" vert="horz">
+          <a:bodyPr vert="horz" wrap="square" lIns="0" tIns="12700" rIns="0" bIns="0" rtlCol="0">
             <a:spAutoFit/>
           </a:bodyPr>
           <a:lstStyle/>
@@ -1288,7 +1356,7 @@
               </a:spcBef>
             </a:pPr>
             <a:r>
-              <a:rPr dirty="0" u="none" sz="6000" spc="-5"/>
+              <a:rPr sz="6000" u="none" spc="-5" dirty="0"/>
               <a:t>就職作品制作アピールポイント</a:t>
             </a:r>
             <a:endParaRPr sz="6000"/>
@@ -1297,7 +1365,7 @@
       </p:sp>
       <p:sp>
         <p:nvSpPr>
-          <p:cNvPr id="3" name="object 3" descr=""/>
+          <p:cNvPr id="3" name="object 3"/>
           <p:cNvSpPr txBox="1"/>
           <p:nvPr/>
         </p:nvSpPr>
@@ -1311,7 +1379,7 @@
           </a:prstGeom>
         </p:spPr>
         <p:txBody>
-          <a:bodyPr wrap="square" lIns="0" tIns="104775" rIns="0" bIns="0" rtlCol="0" vert="horz">
+          <a:bodyPr vert="horz" wrap="square" lIns="0" tIns="104775" rIns="0" bIns="0" rtlCol="0">
             <a:spAutoFit/>
           </a:bodyPr>
           <a:lstStyle/>
@@ -1325,7 +1393,7 @@
               </a:spcBef>
             </a:pPr>
             <a:r>
-              <a:rPr dirty="0" sz="2400" spc="-10">
+              <a:rPr sz="2400" spc="-10" dirty="0">
                 <a:solidFill>
                   <a:srgbClr val="FFFFFF"/>
                 </a:solidFill>
@@ -1335,7 +1403,7 @@
               <a:t>AT-</a:t>
             </a:r>
             <a:r>
-              <a:rPr dirty="0" sz="2400" spc="-25">
+              <a:rPr sz="2400" spc="-25" dirty="0">
                 <a:solidFill>
                   <a:srgbClr val="FFFFFF"/>
                 </a:solidFill>
@@ -1345,7 +1413,7 @@
               <a:t>13B-</a:t>
             </a:r>
             <a:r>
-              <a:rPr dirty="0" sz="2400">
+              <a:rPr sz="2400" dirty="0">
                 <a:solidFill>
                   <a:srgbClr val="FFFFFF"/>
                 </a:solidFill>
@@ -1355,7 +1423,7 @@
               <a:t>529</a:t>
             </a:r>
             <a:r>
-              <a:rPr dirty="0" sz="2400" spc="5">
+              <a:rPr sz="2400" spc="5" dirty="0">
                 <a:solidFill>
                   <a:srgbClr val="FFFFFF"/>
                 </a:solidFill>
@@ -1365,7 +1433,7 @@
               <a:t> </a:t>
             </a:r>
             <a:r>
-              <a:rPr dirty="0" sz="2400" spc="-25">
+              <a:rPr sz="2400" spc="-25" dirty="0">
                 <a:solidFill>
                   <a:srgbClr val="FFFFFF"/>
                 </a:solidFill>
@@ -1389,7 +1457,7 @@
               </a:spcBef>
             </a:pPr>
             <a:r>
-              <a:rPr dirty="0" sz="2400" spc="-125">
+              <a:rPr sz="2400" spc="-125" dirty="0">
                 <a:solidFill>
                   <a:srgbClr val="FFFFFF"/>
                 </a:solidFill>
@@ -1407,26 +1475,26 @@
       </p:sp>
       <p:sp>
         <p:nvSpPr>
-          <p:cNvPr id="4" name="object 4" descr=""/>
+          <p:cNvPr id="4" name="object 4"/>
           <p:cNvSpPr txBox="1"/>
           <p:nvPr/>
         </p:nvSpPr>
         <p:spPr>
           <a:xfrm>
-            <a:off x="1996567" y="2818891"/>
-            <a:ext cx="8426450" cy="391160"/>
+            <a:off x="4690173" y="3400603"/>
+            <a:ext cx="3032633" cy="391160"/>
           </a:xfrm>
           <a:prstGeom prst="rect">
             <a:avLst/>
           </a:prstGeom>
         </p:spPr>
         <p:txBody>
-          <a:bodyPr wrap="square" lIns="0" tIns="12700" rIns="0" bIns="0" rtlCol="0" vert="horz">
+          <a:bodyPr vert="horz" wrap="square" lIns="0" tIns="12700" rIns="0" bIns="0" rtlCol="0">
             <a:spAutoFit/>
           </a:bodyPr>
           <a:lstStyle/>
           <a:p>
-            <a:pPr marL="12700">
+            <a:pPr marL="12700" algn="ctr">
               <a:lnSpc>
                 <a:spcPct val="100000"/>
               </a:lnSpc>
@@ -1435,36 +1503,16 @@
               </a:spcBef>
             </a:pPr>
             <a:r>
-              <a:rPr dirty="0" sz="2400" spc="-5">
-                <a:solidFill>
-                  <a:srgbClr val="FFFFFF"/>
-                </a:solidFill>
-                <a:latin typeface="MS Gothic"/>
-                <a:cs typeface="MS Gothic"/>
-              </a:rPr>
-              <a:t>ゲーム基盤</a:t>
-            </a:r>
-            <a:r>
-              <a:rPr dirty="0" sz="2400" spc="-20">
-                <a:solidFill>
-                  <a:srgbClr val="FFFFFF"/>
-                </a:solidFill>
-                <a:latin typeface="Arial MT"/>
-                <a:cs typeface="Arial MT"/>
-              </a:rPr>
-              <a:t>(GameMain)</a:t>
-            </a:r>
-            <a:r>
-              <a:rPr dirty="0" sz="2400" spc="-5">
-                <a:solidFill>
-                  <a:srgbClr val="FFFFFF"/>
-                </a:solidFill>
-                <a:latin typeface="MS Gothic"/>
-                <a:cs typeface="MS Gothic"/>
-              </a:rPr>
-              <a:t>にプラットフォーム依存をなくす設計</a:t>
-            </a:r>
-            <a:endParaRPr sz="2400">
+              <a:rPr lang="ja-JP" altLang="en-US" sz="2400" spc="-5" dirty="0">
+                <a:solidFill>
+                  <a:srgbClr val="FFFFFF"/>
+                </a:solidFill>
+                <a:latin typeface="MS Gothic"/>
+                <a:cs typeface="MS Gothic"/>
+              </a:rPr>
+              <a:t>無双ゲーム制作</a:t>
+            </a:r>
+            <a:endParaRPr lang="ja-JP" altLang="en-US" sz="2400" dirty="0">
               <a:latin typeface="MS Gothic"/>
               <a:cs typeface="MS Gothic"/>
             </a:endParaRPr>
@@ -1511,10 +1559,12 @@
             <a:off x="78739" y="603884"/>
             <a:ext cx="7288530" cy="696595"/>
           </a:xfrm>
-          <a:prstGeom prst="rect"/>
+          <a:prstGeom prst="rect">
+            <a:avLst/>
+          </a:prstGeom>
         </p:spPr>
         <p:txBody>
-          <a:bodyPr wrap="square" lIns="0" tIns="13335" rIns="0" bIns="0" rtlCol="0" vert="horz">
+          <a:bodyPr vert="horz" wrap="square" lIns="0" tIns="13335" rIns="0" bIns="0" rtlCol="0">
             <a:spAutoFit/>
           </a:bodyPr>
           <a:lstStyle/>
@@ -1528,7 +1578,7 @@
               </a:spcBef>
             </a:pPr>
             <a:r>
-              <a:rPr dirty="0" spc="-25"/>
+              <a:rPr spc="-25" dirty="0"/>
               <a:t>プラットフォーム非依存設計</a:t>
             </a:r>
           </a:p>
@@ -1536,7 +1586,7 @@
       </p:sp>
       <p:sp>
         <p:nvSpPr>
-          <p:cNvPr id="3" name="object 3" descr=""/>
+          <p:cNvPr id="3" name="object 3"/>
           <p:cNvSpPr txBox="1"/>
           <p:nvPr/>
         </p:nvSpPr>
@@ -1550,7 +1600,7 @@
           </a:prstGeom>
         </p:spPr>
         <p:txBody>
-          <a:bodyPr wrap="square" lIns="0" tIns="220345" rIns="0" bIns="0" rtlCol="0" vert="horz">
+          <a:bodyPr vert="horz" wrap="square" lIns="0" tIns="220345" rIns="0" bIns="0" rtlCol="0">
             <a:spAutoFit/>
           </a:bodyPr>
           <a:lstStyle/>
@@ -1564,7 +1614,7 @@
               </a:spcBef>
             </a:pPr>
             <a:r>
-              <a:rPr dirty="0" sz="2400" spc="-5">
+              <a:rPr sz="2400" spc="-5" dirty="0">
                 <a:solidFill>
                   <a:srgbClr val="FFFFFF"/>
                 </a:solidFill>
@@ -1588,7 +1638,7 @@
               </a:spcBef>
             </a:pPr>
             <a:r>
-              <a:rPr dirty="0" sz="2400" spc="-20" b="1">
+              <a:rPr sz="2400" b="1" spc="-20" dirty="0">
                 <a:solidFill>
                   <a:srgbClr val="FFFFFF"/>
                 </a:solidFill>
@@ -1598,7 +1648,7 @@
               <a:t>GameMain</a:t>
             </a:r>
             <a:r>
-              <a:rPr dirty="0" sz="2400">
+              <a:rPr sz="2400" dirty="0">
                 <a:solidFill>
                   <a:srgbClr val="FFFFFF"/>
                 </a:solidFill>
@@ -1608,7 +1658,7 @@
               <a:t>が</a:t>
             </a:r>
             <a:r>
-              <a:rPr dirty="0" sz="2400" spc="-20" b="1">
+              <a:rPr sz="2400" b="1" spc="-20" dirty="0">
                 <a:solidFill>
                   <a:srgbClr val="FFFFFF"/>
                 </a:solidFill>
@@ -1618,7 +1668,7 @@
               <a:t>DirectX</a:t>
             </a:r>
             <a:r>
-              <a:rPr dirty="0" sz="2400" spc="-5">
+              <a:rPr sz="2400" spc="-5" dirty="0">
                 <a:solidFill>
                   <a:srgbClr val="FFFFFF"/>
                 </a:solidFill>
@@ -1653,7 +1703,7 @@
               </a:lnSpc>
             </a:pPr>
             <a:r>
-              <a:rPr dirty="0" sz="2400" spc="-5">
+              <a:rPr sz="2400" spc="-5" dirty="0">
                 <a:solidFill>
                   <a:srgbClr val="FFFFFF"/>
                 </a:solidFill>
@@ -1663,7 +1713,7 @@
               <a:t>プラットフォームごとに描画マネージャーを</a:t>
             </a:r>
             <a:r>
-              <a:rPr dirty="0" sz="2400">
+              <a:rPr sz="2400" dirty="0">
                 <a:solidFill>
                   <a:srgbClr val="FFFFFF"/>
                 </a:solidFill>
@@ -1673,7 +1723,7 @@
               <a:t>変更する仕組みにし、新しい</a:t>
             </a:r>
             <a:r>
-              <a:rPr dirty="0" sz="2400" spc="-10">
+              <a:rPr sz="2400" spc="-10" dirty="0">
                 <a:solidFill>
                   <a:srgbClr val="FFFFFF"/>
                 </a:solidFill>
@@ -1683,7 +1733,7 @@
               <a:t>API</a:t>
             </a:r>
             <a:r>
-              <a:rPr dirty="0" sz="2400" spc="-50">
+              <a:rPr sz="2400" spc="-50" dirty="0">
                 <a:solidFill>
                   <a:srgbClr val="FFFFFF"/>
                 </a:solidFill>
@@ -1707,7 +1757,7 @@
               </a:spcBef>
             </a:pPr>
             <a:r>
-              <a:rPr dirty="0" sz="2400" spc="-5">
+              <a:rPr sz="2400" spc="-5" dirty="0">
                 <a:solidFill>
                   <a:srgbClr val="FFFFFF"/>
                 </a:solidFill>
@@ -1731,7 +1781,7 @@
               </a:spcBef>
             </a:pPr>
             <a:r>
-              <a:rPr dirty="0" sz="2400" spc="-5">
+              <a:rPr sz="2400" spc="-5" dirty="0">
                 <a:solidFill>
                   <a:srgbClr val="FFFFFF"/>
                 </a:solidFill>
@@ -1749,7 +1799,7 @@
       </p:sp>
       <p:pic>
         <p:nvPicPr>
-          <p:cNvPr id="4" name="object 4" descr=""/>
+          <p:cNvPr id="4" name="object 4"/>
           <p:cNvPicPr/>
           <p:nvPr/>
         </p:nvPicPr>
@@ -1809,10 +1859,12 @@
             <a:off x="442671" y="482041"/>
             <a:ext cx="8404225" cy="697230"/>
           </a:xfrm>
-          <a:prstGeom prst="rect"/>
+          <a:prstGeom prst="rect">
+            <a:avLst/>
+          </a:prstGeom>
         </p:spPr>
         <p:txBody>
-          <a:bodyPr wrap="square" lIns="0" tIns="13335" rIns="0" bIns="0" rtlCol="0" vert="horz">
+          <a:bodyPr vert="horz" wrap="square" lIns="0" tIns="13335" rIns="0" bIns="0" rtlCol="0">
             <a:spAutoFit/>
           </a:bodyPr>
           <a:lstStyle/>
@@ -1826,7 +1878,7 @@
               </a:spcBef>
             </a:pPr>
             <a:r>
-              <a:rPr dirty="0" spc="-25"/>
+              <a:rPr spc="-25" dirty="0"/>
               <a:t>リソース管理とマネージャー構成</a:t>
             </a:r>
           </a:p>
@@ -1834,7 +1886,7 @@
       </p:sp>
       <p:sp>
         <p:nvSpPr>
-          <p:cNvPr id="3" name="object 3" descr=""/>
+          <p:cNvPr id="3" name="object 3"/>
           <p:cNvSpPr txBox="1"/>
           <p:nvPr/>
         </p:nvSpPr>
@@ -1848,7 +1900,7 @@
           </a:prstGeom>
         </p:spPr>
         <p:txBody>
-          <a:bodyPr wrap="square" lIns="0" tIns="60960" rIns="0" bIns="0" rtlCol="0" vert="horz">
+          <a:bodyPr vert="horz" wrap="square" lIns="0" tIns="60960" rIns="0" bIns="0" rtlCol="0">
             <a:spAutoFit/>
           </a:bodyPr>
           <a:lstStyle/>
@@ -1862,7 +1914,7 @@
               </a:spcBef>
             </a:pPr>
             <a:r>
-              <a:rPr dirty="0" sz="2800" spc="-40">
+              <a:rPr sz="2800" spc="-40" dirty="0">
                 <a:solidFill>
                   <a:srgbClr val="FFFFFF"/>
                 </a:solidFill>
@@ -1872,7 +1924,7 @@
               <a:t>同じリソースを重複して作成しないように</a:t>
             </a:r>
             <a:r>
-              <a:rPr dirty="0" sz="2800" spc="-50">
+              <a:rPr sz="2800" spc="-50" dirty="0">
                 <a:solidFill>
                   <a:srgbClr val="FFFFFF"/>
                 </a:solidFill>
@@ -1882,7 +1934,7 @@
               <a:t> </a:t>
             </a:r>
             <a:r>
-              <a:rPr dirty="0" sz="2800" spc="-40">
+              <a:rPr sz="2800" spc="-40" dirty="0">
                 <a:solidFill>
                   <a:srgbClr val="FFFFFF"/>
                 </a:solidFill>
@@ -1917,7 +1969,7 @@
               </a:lnSpc>
             </a:pPr>
             <a:r>
-              <a:rPr dirty="0" sz="2800" spc="-40">
+              <a:rPr sz="2800" spc="-40" dirty="0">
                 <a:solidFill>
                   <a:srgbClr val="FFFFFF"/>
                 </a:solidFill>
@@ -1952,7 +2004,7 @@
               </a:lnSpc>
             </a:pPr>
             <a:r>
-              <a:rPr dirty="0" sz="2800" spc="-40">
+              <a:rPr sz="2800" spc="-40" dirty="0">
                 <a:solidFill>
                   <a:srgbClr val="FFFFFF"/>
                 </a:solidFill>
@@ -1976,7 +2028,7 @@
               </a:spcBef>
             </a:pPr>
             <a:r>
-              <a:rPr dirty="0" sz="2800" spc="-40">
+              <a:rPr sz="2800" spc="-40" dirty="0">
                 <a:solidFill>
                   <a:srgbClr val="FFFFFF"/>
                 </a:solidFill>
@@ -1994,7 +2046,7 @@
       </p:sp>
       <p:pic>
         <p:nvPicPr>
-          <p:cNvPr id="4" name="object 4" descr=""/>
+          <p:cNvPr id="4" name="object 4"/>
           <p:cNvPicPr/>
           <p:nvPr/>
         </p:nvPicPr>
@@ -2054,10 +2106,12 @@
             <a:off x="442671" y="482041"/>
             <a:ext cx="3936365" cy="697230"/>
           </a:xfrm>
-          <a:prstGeom prst="rect"/>
+          <a:prstGeom prst="rect">
+            <a:avLst/>
+          </a:prstGeom>
         </p:spPr>
         <p:txBody>
-          <a:bodyPr wrap="square" lIns="0" tIns="13335" rIns="0" bIns="0" rtlCol="0" vert="horz">
+          <a:bodyPr vert="horz" wrap="square" lIns="0" tIns="13335" rIns="0" bIns="0" rtlCol="0">
             <a:spAutoFit/>
           </a:bodyPr>
           <a:lstStyle/>
@@ -2071,7 +2125,7 @@
               </a:spcBef>
             </a:pPr>
             <a:r>
-              <a:rPr dirty="0" spc="-25"/>
+              <a:rPr spc="-25" dirty="0"/>
               <a:t>描画処理の流れ</a:t>
             </a:r>
           </a:p>
@@ -2079,7 +2133,7 @@
       </p:sp>
       <p:sp>
         <p:nvSpPr>
-          <p:cNvPr id="3" name="object 3" descr=""/>
+          <p:cNvPr id="3" name="object 3"/>
           <p:cNvSpPr txBox="1"/>
           <p:nvPr/>
         </p:nvSpPr>
@@ -2093,7 +2147,7 @@
           </a:prstGeom>
         </p:spPr>
         <p:txBody>
-          <a:bodyPr wrap="square" lIns="0" tIns="12700" rIns="0" bIns="0" rtlCol="0" vert="horz">
+          <a:bodyPr vert="horz" wrap="square" lIns="0" tIns="12700" rIns="0" bIns="0" rtlCol="0">
             <a:spAutoFit/>
           </a:bodyPr>
           <a:lstStyle/>
@@ -2107,7 +2161,7 @@
               </a:spcBef>
             </a:pPr>
             <a:r>
-              <a:rPr dirty="0" sz="2400" spc="-10">
+              <a:rPr sz="2400" spc="-10" dirty="0">
                 <a:solidFill>
                   <a:srgbClr val="FFFFFF"/>
                 </a:solidFill>
@@ -2125,7 +2179,7 @@
       </p:sp>
       <p:sp>
         <p:nvSpPr>
-          <p:cNvPr id="4" name="object 4" descr=""/>
+          <p:cNvPr id="4" name="object 4"/>
           <p:cNvSpPr txBox="1"/>
           <p:nvPr/>
         </p:nvSpPr>
@@ -2139,7 +2193,7 @@
           </a:prstGeom>
         </p:spPr>
         <p:txBody>
-          <a:bodyPr wrap="square" lIns="0" tIns="31114" rIns="0" bIns="0" rtlCol="0" vert="horz">
+          <a:bodyPr vert="horz" wrap="square" lIns="0" tIns="31114" rIns="0" bIns="0" rtlCol="0">
             <a:spAutoFit/>
           </a:bodyPr>
           <a:lstStyle/>
@@ -2153,7 +2207,7 @@
               </a:spcBef>
             </a:pPr>
             <a:r>
-              <a:rPr dirty="0" sz="2400" spc="-965">
+              <a:rPr sz="2400" spc="-965" dirty="0">
                 <a:solidFill>
                   <a:srgbClr val="FFFFFF"/>
                 </a:solidFill>
@@ -2177,7 +2231,7 @@
               </a:spcBef>
             </a:pPr>
             <a:r>
-              <a:rPr dirty="0" sz="2400" spc="-50">
+              <a:rPr sz="2400" spc="-50" dirty="0">
                 <a:solidFill>
                   <a:srgbClr val="FFFFFF"/>
                 </a:solidFill>
@@ -2195,7 +2249,7 @@
       </p:sp>
       <p:sp>
         <p:nvSpPr>
-          <p:cNvPr id="5" name="object 5" descr=""/>
+          <p:cNvPr id="5" name="object 5"/>
           <p:cNvSpPr txBox="1"/>
           <p:nvPr/>
         </p:nvSpPr>
@@ -2209,7 +2263,7 @@
           </a:prstGeom>
         </p:spPr>
         <p:txBody>
-          <a:bodyPr wrap="square" lIns="0" tIns="12700" rIns="0" bIns="0" rtlCol="0" vert="horz">
+          <a:bodyPr vert="horz" wrap="square" lIns="0" tIns="12700" rIns="0" bIns="0" rtlCol="0">
             <a:spAutoFit/>
           </a:bodyPr>
           <a:lstStyle/>
@@ -2223,7 +2277,7 @@
               </a:spcBef>
             </a:pPr>
             <a:r>
-              <a:rPr dirty="0" sz="2400" spc="-25">
+              <a:rPr sz="2400" spc="-25" dirty="0">
                 <a:solidFill>
                   <a:srgbClr val="FFFFFF"/>
                 </a:solidFill>
@@ -2233,7 +2287,7 @@
               <a:t>BaseDrawManager</a:t>
             </a:r>
             <a:r>
-              <a:rPr dirty="0" sz="2400" spc="-25">
+              <a:rPr sz="2400" spc="-25" dirty="0">
                 <a:solidFill>
                   <a:srgbClr val="FFFFFF"/>
                 </a:solidFill>
@@ -2243,7 +2297,7 @@
               <a:t>（</a:t>
             </a:r>
             <a:r>
-              <a:rPr dirty="0" sz="2400" spc="-10">
+              <a:rPr sz="2400" spc="-10" dirty="0">
                 <a:solidFill>
                   <a:srgbClr val="FFFFFF"/>
                 </a:solidFill>
@@ -2253,7 +2307,7 @@
               <a:t>抽象層</a:t>
             </a:r>
             <a:r>
-              <a:rPr dirty="0" sz="2400" spc="-50">
+              <a:rPr sz="2400" spc="-50" dirty="0">
                 <a:solidFill>
                   <a:srgbClr val="FFFFFF"/>
                 </a:solidFill>
@@ -2277,7 +2331,7 @@
               </a:spcBef>
             </a:pPr>
             <a:r>
-              <a:rPr dirty="0" sz="2400" spc="-965">
+              <a:rPr sz="2400" spc="-965" dirty="0">
                 <a:solidFill>
                   <a:srgbClr val="FFFFFF"/>
                 </a:solidFill>
@@ -2301,7 +2355,7 @@
               </a:spcBef>
             </a:pPr>
             <a:r>
-              <a:rPr dirty="0" sz="2400" spc="-50">
+              <a:rPr sz="2400" spc="-50" dirty="0">
                 <a:solidFill>
                   <a:srgbClr val="FFFFFF"/>
                 </a:solidFill>
@@ -2325,7 +2379,7 @@
               </a:spcBef>
             </a:pPr>
             <a:r>
-              <a:rPr dirty="0" sz="2400" spc="-20">
+              <a:rPr sz="2400" spc="-20" dirty="0">
                 <a:solidFill>
                   <a:srgbClr val="FFFFFF"/>
                 </a:solidFill>
@@ -2335,7 +2389,7 @@
               <a:t>DirectX_DrawManager</a:t>
             </a:r>
             <a:r>
-              <a:rPr dirty="0" sz="2400" spc="-20">
+              <a:rPr sz="2400" spc="-20" dirty="0">
                 <a:solidFill>
                   <a:srgbClr val="FFFFFF"/>
                 </a:solidFill>
@@ -2345,7 +2399,7 @@
               <a:t>（</a:t>
             </a:r>
             <a:r>
-              <a:rPr dirty="0" sz="2400" spc="-10">
+              <a:rPr sz="2400" spc="-10" dirty="0">
                 <a:solidFill>
                   <a:srgbClr val="FFFFFF"/>
                 </a:solidFill>
@@ -2355,7 +2409,7 @@
               <a:t>実装層</a:t>
             </a:r>
             <a:r>
-              <a:rPr dirty="0" sz="2400" spc="-50">
+              <a:rPr sz="2400" spc="-50" dirty="0">
                 <a:solidFill>
                   <a:srgbClr val="FFFFFF"/>
                 </a:solidFill>
@@ -2379,7 +2433,7 @@
               </a:spcBef>
             </a:pPr>
             <a:r>
-              <a:rPr dirty="0" sz="2400" spc="-965">
+              <a:rPr sz="2400" spc="-965" dirty="0">
                 <a:solidFill>
                   <a:srgbClr val="FFFFFF"/>
                 </a:solidFill>
@@ -2397,7 +2451,7 @@
       </p:sp>
       <p:sp>
         <p:nvSpPr>
-          <p:cNvPr id="6" name="object 6" descr=""/>
+          <p:cNvPr id="6" name="object 6"/>
           <p:cNvSpPr txBox="1"/>
           <p:nvPr/>
         </p:nvSpPr>
@@ -2411,7 +2465,7 @@
           </a:prstGeom>
         </p:spPr>
         <p:txBody>
-          <a:bodyPr wrap="square" lIns="0" tIns="12700" rIns="0" bIns="0" rtlCol="0" vert="horz">
+          <a:bodyPr vert="horz" wrap="square" lIns="0" tIns="12700" rIns="0" bIns="0" rtlCol="0">
             <a:spAutoFit/>
           </a:bodyPr>
           <a:lstStyle/>
@@ -2425,7 +2479,7 @@
               </a:spcBef>
             </a:pPr>
             <a:r>
-              <a:rPr dirty="0" sz="2400" spc="-515">
+              <a:rPr sz="2400" spc="-515" dirty="0">
                 <a:solidFill>
                   <a:srgbClr val="FFFFFF"/>
                 </a:solidFill>
@@ -2435,7 +2489,7 @@
               <a:t>├── </a:t>
             </a:r>
             <a:r>
-              <a:rPr dirty="0" sz="2400" spc="-25">
+              <a:rPr sz="2400" spc="-25" dirty="0">
                 <a:solidFill>
                   <a:srgbClr val="FFFFFF"/>
                 </a:solidFill>
@@ -2445,7 +2499,7 @@
               <a:t>ShaderManager(</a:t>
             </a:r>
             <a:r>
-              <a:rPr dirty="0" sz="2400">
+              <a:rPr sz="2400" dirty="0">
                 <a:solidFill>
                   <a:srgbClr val="FFFFFF"/>
                 </a:solidFill>
@@ -2455,7 +2509,7 @@
               <a:t>リフレクション情報を取得</a:t>
             </a:r>
             <a:r>
-              <a:rPr dirty="0" sz="2400" spc="-50">
+              <a:rPr sz="2400" spc="-50" dirty="0">
                 <a:solidFill>
                   <a:srgbClr val="FFFFFF"/>
                 </a:solidFill>
@@ -2479,7 +2533,7 @@
               </a:spcBef>
             </a:pPr>
             <a:r>
-              <a:rPr dirty="0" sz="2400" spc="-480">
+              <a:rPr sz="2400" spc="-480" dirty="0">
                 <a:solidFill>
                   <a:srgbClr val="FFFFFF"/>
                 </a:solidFill>
@@ -2489,7 +2543,7 @@
               <a:t>├── </a:t>
             </a:r>
             <a:r>
-              <a:rPr dirty="0" sz="2400" spc="-20">
+              <a:rPr sz="2400" spc="-20" dirty="0">
                 <a:solidFill>
                   <a:srgbClr val="FFFFFF"/>
                 </a:solidFill>
@@ -2499,7 +2553,7 @@
               <a:t>ConstantBufferManager(Shader</a:t>
             </a:r>
             <a:r>
-              <a:rPr dirty="0" sz="2400">
+              <a:rPr sz="2400" dirty="0">
                 <a:solidFill>
                   <a:srgbClr val="FFFFFF"/>
                 </a:solidFill>
@@ -2509,7 +2563,7 @@
               <a:t>から名前検索</a:t>
             </a:r>
             <a:r>
-              <a:rPr dirty="0" sz="2400" spc="-50">
+              <a:rPr sz="2400" spc="-50" dirty="0">
                 <a:solidFill>
                   <a:srgbClr val="FFFFFF"/>
                 </a:solidFill>
@@ -2533,7 +2587,7 @@
               </a:spcBef>
             </a:pPr>
             <a:r>
-              <a:rPr dirty="0" sz="2400" spc="-490">
+              <a:rPr sz="2400" spc="-490" dirty="0">
                 <a:solidFill>
                   <a:srgbClr val="FFFFFF"/>
                 </a:solidFill>
@@ -2543,7 +2597,7 @@
               <a:t>├── </a:t>
             </a:r>
             <a:r>
-              <a:rPr dirty="0" sz="2400" spc="-20">
+              <a:rPr sz="2400" spc="-20" dirty="0">
                 <a:solidFill>
                   <a:srgbClr val="FFFFFF"/>
                 </a:solidFill>
@@ -2553,7 +2607,7 @@
               <a:t>VertexBufferManager</a:t>
             </a:r>
             <a:r>
-              <a:rPr dirty="0" sz="2400" spc="-20">
+              <a:rPr sz="2400" spc="-20" dirty="0">
                 <a:solidFill>
                   <a:srgbClr val="FFFFFF"/>
                 </a:solidFill>
@@ -2563,7 +2617,7 @@
               <a:t>（</a:t>
             </a:r>
             <a:r>
-              <a:rPr dirty="0" sz="2400" spc="-10">
+              <a:rPr sz="2400" spc="-10" dirty="0">
                 <a:solidFill>
                   <a:srgbClr val="FFFFFF"/>
                 </a:solidFill>
@@ -2573,7 +2627,7 @@
               <a:t>頂点シェーダ名で検索</a:t>
             </a:r>
             <a:r>
-              <a:rPr dirty="0" sz="2400" spc="-50">
+              <a:rPr sz="2400" spc="-50" dirty="0">
                 <a:solidFill>
                   <a:srgbClr val="FFFFFF"/>
                 </a:solidFill>
@@ -2597,7 +2651,7 @@
               </a:spcBef>
             </a:pPr>
             <a:r>
-              <a:rPr dirty="0" sz="2400" spc="-535">
+              <a:rPr sz="2400" spc="-535" dirty="0">
                 <a:solidFill>
                   <a:srgbClr val="FFFFFF"/>
                 </a:solidFill>
@@ -2607,7 +2661,7 @@
               <a:t>└── </a:t>
             </a:r>
             <a:r>
-              <a:rPr dirty="0" sz="2400" spc="-20">
+              <a:rPr sz="2400" spc="-20" dirty="0">
                 <a:solidFill>
                   <a:srgbClr val="FFFFFF"/>
                 </a:solidFill>
@@ -2617,7 +2671,7 @@
               <a:t>ViewManager</a:t>
             </a:r>
             <a:r>
-              <a:rPr dirty="0" sz="2400" spc="-20">
+              <a:rPr sz="2400" spc="-20" dirty="0">
                 <a:solidFill>
                   <a:srgbClr val="FFFFFF"/>
                 </a:solidFill>
@@ -2627,7 +2681,7 @@
               <a:t>（</a:t>
             </a:r>
             <a:r>
-              <a:rPr dirty="0" sz="2400">
+              <a:rPr sz="2400" dirty="0">
                 <a:solidFill>
                   <a:srgbClr val="FFFFFF"/>
                 </a:solidFill>
@@ -2637,7 +2691,7 @@
               <a:t>テクスチャ名から取得</a:t>
             </a:r>
             <a:r>
-              <a:rPr dirty="0" sz="2400" spc="-50">
+              <a:rPr sz="2400" spc="-50" dirty="0">
                 <a:solidFill>
                   <a:srgbClr val="FFFFFF"/>
                 </a:solidFill>
@@ -2661,7 +2715,7 @@
               </a:spcBef>
             </a:pPr>
             <a:r>
-              <a:rPr dirty="0" sz="2400" spc="-720">
+              <a:rPr sz="2400" spc="-720" dirty="0">
                 <a:solidFill>
                   <a:srgbClr val="FFFFFF"/>
                 </a:solidFill>
@@ -2671,7 +2725,7 @@
               <a:t>└──</a:t>
             </a:r>
             <a:r>
-              <a:rPr dirty="0" sz="2400" spc="-20">
+              <a:rPr sz="2400" spc="-20" dirty="0">
                 <a:solidFill>
                   <a:srgbClr val="FFFFFF"/>
                 </a:solidFill>
@@ -2681,7 +2735,7 @@
               <a:t> </a:t>
             </a:r>
             <a:r>
-              <a:rPr dirty="0" sz="2400" spc="-10">
+              <a:rPr sz="2400" spc="-10" dirty="0">
                 <a:solidFill>
                   <a:srgbClr val="FFFFFF"/>
                 </a:solidFill>
@@ -2699,7 +2753,7 @@
       </p:sp>
       <p:sp>
         <p:nvSpPr>
-          <p:cNvPr id="7" name="object 7" descr=""/>
+          <p:cNvPr id="7" name="object 7"/>
           <p:cNvSpPr txBox="1"/>
           <p:nvPr/>
         </p:nvSpPr>
@@ -2718,7 +2772,7 @@
           </a:ln>
         </p:spPr>
         <p:txBody>
-          <a:bodyPr wrap="square" lIns="0" tIns="41275" rIns="0" bIns="0" rtlCol="0" vert="horz">
+          <a:bodyPr vert="horz" wrap="square" lIns="0" tIns="41275" rIns="0" bIns="0" rtlCol="0">
             <a:spAutoFit/>
           </a:bodyPr>
           <a:lstStyle/>
@@ -2732,7 +2786,7 @@
               </a:spcBef>
             </a:pPr>
             <a:r>
-              <a:rPr dirty="0" sz="1800">
+              <a:rPr sz="1800" dirty="0">
                 <a:solidFill>
                   <a:srgbClr val="FFFFFF"/>
                 </a:solidFill>
@@ -2742,7 +2796,7 @@
               <a:t>GameMain</a:t>
             </a:r>
             <a:r>
-              <a:rPr dirty="0" sz="1800" spc="-35">
+              <a:rPr sz="1800" spc="-35" dirty="0">
                 <a:solidFill>
                   <a:srgbClr val="FFFFFF"/>
                 </a:solidFill>
@@ -2752,7 +2806,7 @@
               <a:t> </a:t>
             </a:r>
             <a:r>
-              <a:rPr dirty="0" sz="1800" spc="-135">
+              <a:rPr sz="1800" spc="-135" dirty="0">
                 <a:solidFill>
                   <a:srgbClr val="FFFFFF"/>
                 </a:solidFill>
@@ -2762,7 +2816,7 @@
               <a:t>から </a:t>
             </a:r>
             <a:r>
-              <a:rPr dirty="0" sz="1800">
+              <a:rPr sz="1800" dirty="0">
                 <a:solidFill>
                   <a:srgbClr val="FFFFFF"/>
                 </a:solidFill>
@@ -2772,7 +2826,7 @@
               <a:t>API</a:t>
             </a:r>
             <a:r>
-              <a:rPr dirty="0" sz="1800" spc="-20">
+              <a:rPr sz="1800" spc="-20" dirty="0">
                 <a:solidFill>
                   <a:srgbClr val="FFFFFF"/>
                 </a:solidFill>
@@ -2782,7 +2836,7 @@
               <a:t> </a:t>
             </a:r>
             <a:r>
-              <a:rPr dirty="0" sz="1800" spc="-5">
+              <a:rPr sz="1800" spc="-5" dirty="0">
                 <a:solidFill>
                   <a:srgbClr val="FFFFFF"/>
                 </a:solidFill>
@@ -2803,7 +2857,7 @@
               </a:lnSpc>
             </a:pPr>
             <a:r>
-              <a:rPr dirty="0" sz="1800" spc="-10">
+              <a:rPr sz="1800" spc="-10" dirty="0">
                 <a:solidFill>
                   <a:srgbClr val="FFFFFF"/>
                 </a:solidFill>
@@ -2813,7 +2867,7 @@
               <a:t>❦の流れを共通化し、</a:t>
             </a:r>
             <a:r>
-              <a:rPr dirty="0" sz="1800" spc="-10">
+              <a:rPr sz="1800" spc="-10" dirty="0">
                 <a:solidFill>
                   <a:srgbClr val="FFFFFF"/>
                 </a:solidFill>
@@ -2823,7 +2877,7 @@
               <a:t>API</a:t>
             </a:r>
             <a:r>
-              <a:rPr dirty="0" sz="1800" spc="-15">
+              <a:rPr sz="1800" spc="-15" dirty="0">
                 <a:solidFill>
                   <a:srgbClr val="FFFFFF"/>
                 </a:solidFill>
@@ -2841,7 +2895,7 @@
       </p:sp>
       <p:sp>
         <p:nvSpPr>
-          <p:cNvPr id="8" name="object 8" descr=""/>
+          <p:cNvPr id="8" name="object 8"/>
           <p:cNvSpPr txBox="1"/>
           <p:nvPr/>
         </p:nvSpPr>
@@ -2860,7 +2914,7 @@
           </a:ln>
         </p:spPr>
         <p:txBody>
-          <a:bodyPr wrap="square" lIns="0" tIns="41910" rIns="0" bIns="0" rtlCol="0" vert="horz">
+          <a:bodyPr vert="horz" wrap="square" lIns="0" tIns="41910" rIns="0" bIns="0" rtlCol="0">
             <a:spAutoFit/>
           </a:bodyPr>
           <a:lstStyle/>
@@ -2874,7 +2928,7 @@
               </a:spcBef>
             </a:pPr>
             <a:r>
-              <a:rPr dirty="0" sz="1800" spc="-5">
+              <a:rPr sz="1800" spc="-5" dirty="0">
                 <a:solidFill>
                   <a:srgbClr val="FFFFFF"/>
                 </a:solidFill>
@@ -2884,7 +2938,7 @@
               <a:t>現在は、描画に必要な名前を引数で渡しているが、</a:t>
             </a:r>
             <a:r>
-              <a:rPr dirty="0" sz="1800">
+              <a:rPr sz="1800" dirty="0">
                 <a:solidFill>
                   <a:srgbClr val="FFFFFF"/>
                 </a:solidFill>
@@ -2894,7 +2948,7 @@
               <a:t>将来的には、描画</a:t>
             </a:r>
             <a:r>
-              <a:rPr dirty="0" sz="1800" spc="-10">
+              <a:rPr sz="1800" spc="-10" dirty="0">
                 <a:solidFill>
                   <a:srgbClr val="FFFFFF"/>
                 </a:solidFill>
@@ -2904,7 +2958,7 @@
               <a:t>ID</a:t>
             </a:r>
             <a:r>
-              <a:rPr dirty="0" sz="1800" spc="-5">
+              <a:rPr sz="1800" spc="-5" dirty="0">
                 <a:solidFill>
                   <a:srgbClr val="FFFFFF"/>
                 </a:solidFill>
@@ -2925,7 +2979,7 @@
               </a:lnSpc>
             </a:pPr>
             <a:r>
-              <a:rPr dirty="0" sz="1800" spc="-5">
+              <a:rPr sz="1800" spc="-5" dirty="0">
                 <a:solidFill>
                   <a:srgbClr val="FFFFFF"/>
                 </a:solidFill>
@@ -2943,7 +2997,7 @@
       </p:sp>
       <p:sp>
         <p:nvSpPr>
-          <p:cNvPr id="9" name="object 9" descr=""/>
+          <p:cNvPr id="9" name="object 9"/>
           <p:cNvSpPr txBox="1"/>
           <p:nvPr/>
         </p:nvSpPr>
@@ -2962,7 +3016,7 @@
           </a:ln>
         </p:spPr>
         <p:txBody>
-          <a:bodyPr wrap="square" lIns="0" tIns="118745" rIns="0" bIns="0" rtlCol="0" vert="horz">
+          <a:bodyPr vert="horz" wrap="square" lIns="0" tIns="118745" rIns="0" bIns="0" rtlCol="0">
             <a:spAutoFit/>
           </a:bodyPr>
           <a:lstStyle/>
@@ -2976,7 +3030,7 @@
               </a:spcBef>
             </a:pPr>
             <a:r>
-              <a:rPr dirty="0" sz="1800" spc="-5">
+              <a:rPr sz="1800" spc="-5" dirty="0">
                 <a:solidFill>
                   <a:srgbClr val="FFFFFF"/>
                 </a:solidFill>
@@ -2986,7 +3040,7 @@
               <a:t>シェーダー名、テクスチャ</a:t>
             </a:r>
             <a:r>
-              <a:rPr dirty="0" sz="1800" spc="-10">
+              <a:rPr sz="1800" spc="-10" dirty="0">
                 <a:solidFill>
                   <a:srgbClr val="FFFFFF"/>
                 </a:solidFill>
@@ -3038,10 +3092,12 @@
           </p:nvPr>
         </p:nvSpPr>
         <p:spPr>
-          <a:prstGeom prst="rect"/>
+          <a:prstGeom prst="rect">
+            <a:avLst/>
+          </a:prstGeom>
         </p:spPr>
         <p:txBody>
-          <a:bodyPr wrap="square" lIns="0" tIns="13335" rIns="0" bIns="0" rtlCol="0" vert="horz">
+          <a:bodyPr vert="horz" wrap="square" lIns="0" tIns="13335" rIns="0" bIns="0" rtlCol="0">
             <a:spAutoFit/>
           </a:bodyPr>
           <a:lstStyle/>
@@ -3055,7 +3111,7 @@
               </a:spcBef>
             </a:pPr>
             <a:r>
-              <a:rPr dirty="0" spc="-25"/>
+              <a:rPr spc="-25" dirty="0"/>
               <a:t>シェーダーのリフレクション</a:t>
             </a:r>
           </a:p>
@@ -3063,7 +3119,7 @@
       </p:sp>
       <p:sp>
         <p:nvSpPr>
-          <p:cNvPr id="3" name="object 3" descr=""/>
+          <p:cNvPr id="3" name="object 3"/>
           <p:cNvSpPr txBox="1"/>
           <p:nvPr/>
         </p:nvSpPr>
@@ -3077,7 +3133,7 @@
           </a:prstGeom>
         </p:spPr>
         <p:txBody>
-          <a:bodyPr wrap="square" lIns="0" tIns="12065" rIns="0" bIns="0" rtlCol="0" vert="horz">
+          <a:bodyPr vert="horz" wrap="square" lIns="0" tIns="12065" rIns="0" bIns="0" rtlCol="0">
             <a:spAutoFit/>
           </a:bodyPr>
           <a:lstStyle/>
@@ -3091,7 +3147,7 @@
               </a:spcBef>
             </a:pPr>
             <a:r>
-              <a:rPr dirty="0" sz="2800" spc="-40">
+              <a:rPr sz="2800" spc="-40" dirty="0">
                 <a:solidFill>
                   <a:srgbClr val="FFFFFF"/>
                 </a:solidFill>
@@ -3126,7 +3182,7 @@
               </a:lnSpc>
             </a:pPr>
             <a:r>
-              <a:rPr dirty="0" sz="2800" spc="-40">
+              <a:rPr sz="2800" spc="-40" dirty="0">
                 <a:solidFill>
                   <a:srgbClr val="FFFFFF"/>
                 </a:solidFill>
@@ -3150,7 +3206,7 @@
               </a:spcBef>
             </a:pPr>
             <a:r>
-              <a:rPr dirty="0" sz="2800" spc="-40">
+              <a:rPr sz="2800" spc="-40" dirty="0">
                 <a:solidFill>
                   <a:srgbClr val="FFFFFF"/>
                 </a:solidFill>
@@ -3171,7 +3227,7 @@
               </a:lnSpc>
             </a:pPr>
             <a:r>
-              <a:rPr dirty="0" sz="2800" spc="-40">
+              <a:rPr sz="2800" spc="-40" dirty="0">
                 <a:solidFill>
                   <a:srgbClr val="FFFFFF"/>
                 </a:solidFill>
@@ -3189,7 +3245,7 @@
       </p:sp>
       <p:pic>
         <p:nvPicPr>
-          <p:cNvPr id="4" name="object 4" descr=""/>
+          <p:cNvPr id="4" name="object 4"/>
           <p:cNvPicPr/>
           <p:nvPr/>
         </p:nvPicPr>
@@ -3245,10 +3301,12 @@
           </p:nvPr>
         </p:nvSpPr>
         <p:spPr>
-          <a:prstGeom prst="rect"/>
+          <a:prstGeom prst="rect">
+            <a:avLst/>
+          </a:prstGeom>
         </p:spPr>
         <p:txBody>
-          <a:bodyPr wrap="square" lIns="0" tIns="13335" rIns="0" bIns="0" rtlCol="0" vert="horz">
+          <a:bodyPr vert="horz" wrap="square" lIns="0" tIns="13335" rIns="0" bIns="0" rtlCol="0">
             <a:spAutoFit/>
           </a:bodyPr>
           <a:lstStyle/>
@@ -3262,7 +3320,7 @@
               </a:spcBef>
             </a:pPr>
             <a:r>
-              <a:rPr dirty="0" spc="-25"/>
+              <a:rPr spc="-25" dirty="0"/>
               <a:t>意識して開発していると❦ろ</a:t>
             </a:r>
           </a:p>
@@ -3270,7 +3328,7 @@
       </p:sp>
       <p:sp>
         <p:nvSpPr>
-          <p:cNvPr id="3" name="object 3" descr=""/>
+          <p:cNvPr id="3" name="object 3"/>
           <p:cNvSpPr txBox="1"/>
           <p:nvPr/>
         </p:nvSpPr>
@@ -3284,7 +3342,7 @@
           </a:prstGeom>
         </p:spPr>
         <p:txBody>
-          <a:bodyPr wrap="square" lIns="0" tIns="60960" rIns="0" bIns="0" rtlCol="0" vert="horz">
+          <a:bodyPr vert="horz" wrap="square" lIns="0" tIns="60960" rIns="0" bIns="0" rtlCol="0">
             <a:spAutoFit/>
           </a:bodyPr>
           <a:lstStyle/>
@@ -3298,7 +3356,7 @@
               </a:spcBef>
             </a:pPr>
             <a:r>
-              <a:rPr dirty="0" sz="2800" spc="-40">
+              <a:rPr sz="2800" spc="-40" dirty="0">
                 <a:solidFill>
                   <a:srgbClr val="FFFFFF"/>
                 </a:solidFill>
@@ -3319,7 +3377,7 @@
               </a:lnSpc>
             </a:pPr>
             <a:r>
-              <a:rPr dirty="0" sz="2800" spc="-40">
+              <a:rPr sz="2800" spc="-40" dirty="0">
                 <a:solidFill>
                   <a:srgbClr val="FFFFFF"/>
                 </a:solidFill>
@@ -3337,7 +3395,7 @@
       </p:sp>
       <p:pic>
         <p:nvPicPr>
-          <p:cNvPr id="4" name="object 4" descr=""/>
+          <p:cNvPr id="4" name="object 4"/>
           <p:cNvPicPr/>
           <p:nvPr/>
         </p:nvPicPr>
@@ -3397,10 +3455,12 @@
             <a:off x="553313" y="547877"/>
             <a:ext cx="4497070" cy="696595"/>
           </a:xfrm>
-          <a:prstGeom prst="rect"/>
+          <a:prstGeom prst="rect">
+            <a:avLst/>
+          </a:prstGeom>
         </p:spPr>
         <p:txBody>
-          <a:bodyPr wrap="square" lIns="0" tIns="13335" rIns="0" bIns="0" rtlCol="0" vert="horz">
+          <a:bodyPr vert="horz" wrap="square" lIns="0" tIns="13335" rIns="0" bIns="0" rtlCol="0">
             <a:spAutoFit/>
           </a:bodyPr>
           <a:lstStyle/>
@@ -3414,7 +3474,7 @@
               </a:spcBef>
             </a:pPr>
             <a:r>
-              <a:rPr dirty="0" spc="-15"/>
+              <a:rPr spc="-15" dirty="0"/>
               <a:t>今後制作するもの</a:t>
             </a:r>
           </a:p>
@@ -3422,7 +3482,7 @@
       </p:sp>
       <p:sp>
         <p:nvSpPr>
-          <p:cNvPr id="3" name="object 3" descr=""/>
+          <p:cNvPr id="3" name="object 3"/>
           <p:cNvSpPr txBox="1">
             <a:spLocks noGrp="1"/>
           </p:cNvSpPr>
@@ -3431,10 +3491,12 @@
           </p:nvPr>
         </p:nvSpPr>
         <p:spPr>
-          <a:prstGeom prst="rect"/>
+          <a:prstGeom prst="rect">
+            <a:avLst/>
+          </a:prstGeom>
         </p:spPr>
         <p:txBody>
-          <a:bodyPr wrap="square" lIns="0" tIns="12065" rIns="0" bIns="0" rtlCol="0" vert="horz">
+          <a:bodyPr vert="horz" wrap="square" lIns="0" tIns="12065" rIns="0" bIns="0" rtlCol="0">
             <a:spAutoFit/>
           </a:bodyPr>
           <a:lstStyle/>
@@ -3448,7 +3510,7 @@
               </a:spcBef>
             </a:pPr>
             <a:r>
-              <a:rPr dirty="0" spc="-40"/>
+              <a:rPr spc="-40" dirty="0"/>
               <a:t>・描画マネージャー</a:t>
             </a:r>
           </a:p>
@@ -3459,7 +3521,7 @@
               </a:lnSpc>
             </a:pPr>
             <a:r>
-              <a:rPr dirty="0" spc="-40"/>
+              <a:rPr spc="-40" dirty="0"/>
               <a:t>・自作フォーマアットモデル</a:t>
             </a:r>
           </a:p>
@@ -3473,7 +3535,7 @@
               </a:spcBef>
             </a:pPr>
             <a:r>
-              <a:rPr dirty="0" spc="-40"/>
+              <a:rPr spc="-40" dirty="0"/>
               <a:t>・モデルロードモジュール</a:t>
             </a:r>
           </a:p>
@@ -3487,7 +3549,7 @@
               </a:spcBef>
             </a:pPr>
             <a:r>
-              <a:rPr dirty="0" spc="-40"/>
+              <a:rPr spc="-40" dirty="0"/>
               <a:t>・モデルマネージャー</a:t>
             </a:r>
           </a:p>
@@ -3501,7 +3563,7 @@
               </a:spcBef>
             </a:pPr>
             <a:r>
-              <a:rPr dirty="0" spc="-40"/>
+              <a:rPr spc="-40" dirty="0"/>
               <a:t>・モデルデータクラス</a:t>
             </a:r>
           </a:p>
@@ -3509,7 +3571,7 @@
       </p:sp>
       <p:sp>
         <p:nvSpPr>
-          <p:cNvPr id="4" name="object 4" descr=""/>
+          <p:cNvPr id="4" name="object 4"/>
           <p:cNvSpPr txBox="1"/>
           <p:nvPr/>
         </p:nvSpPr>
@@ -3523,7 +3585,7 @@
           </a:prstGeom>
         </p:spPr>
         <p:txBody>
-          <a:bodyPr wrap="square" lIns="0" tIns="12065" rIns="0" bIns="0" rtlCol="0" vert="horz">
+          <a:bodyPr vert="horz" wrap="square" lIns="0" tIns="12065" rIns="0" bIns="0" rtlCol="0">
             <a:spAutoFit/>
           </a:bodyPr>
           <a:lstStyle/>
@@ -3537,7 +3599,7 @@
               </a:spcBef>
             </a:pPr>
             <a:r>
-              <a:rPr dirty="0" sz="2800" spc="-35">
+              <a:rPr sz="2800" spc="-35" dirty="0">
                 <a:solidFill>
                   <a:srgbClr val="FFFFFF"/>
                 </a:solidFill>
@@ -3547,7 +3609,7 @@
               <a:t>・バッチ処理</a:t>
             </a:r>
             <a:r>
-              <a:rPr dirty="0" sz="2800" spc="-10">
+              <a:rPr sz="2800" spc="-10" dirty="0">
                 <a:solidFill>
                   <a:srgbClr val="FFFFFF"/>
                 </a:solidFill>
@@ -3557,7 +3619,7 @@
               <a:t>(</a:t>
             </a:r>
             <a:r>
-              <a:rPr dirty="0" sz="2800" spc="-35">
+              <a:rPr sz="2800" spc="-35" dirty="0">
                 <a:solidFill>
                   <a:srgbClr val="FFFFFF"/>
                 </a:solidFill>
@@ -3567,7 +3629,7 @@
               <a:t>インスタンシングの予定</a:t>
             </a:r>
             <a:r>
-              <a:rPr dirty="0" sz="2800" spc="-50">
+              <a:rPr sz="2800" spc="-50" dirty="0">
                 <a:solidFill>
                   <a:srgbClr val="FFFFFF"/>
                 </a:solidFill>
@@ -3585,7 +3647,7 @@
       </p:sp>
       <p:sp>
         <p:nvSpPr>
-          <p:cNvPr id="5" name="object 5" descr=""/>
+          <p:cNvPr id="5" name="object 5"/>
           <p:cNvSpPr txBox="1"/>
           <p:nvPr/>
         </p:nvSpPr>
@@ -3604,7 +3666,7 @@
           </a:ln>
         </p:spPr>
         <p:txBody>
-          <a:bodyPr wrap="square" lIns="0" tIns="42544" rIns="0" bIns="0" rtlCol="0" vert="horz">
+          <a:bodyPr vert="horz" wrap="square" lIns="0" tIns="42544" rIns="0" bIns="0" rtlCol="0">
             <a:spAutoFit/>
           </a:bodyPr>
           <a:lstStyle/>
@@ -3618,7 +3680,7 @@
               </a:spcBef>
             </a:pPr>
             <a:r>
-              <a:rPr dirty="0" sz="1800">
+              <a:rPr sz="1800" dirty="0">
                 <a:solidFill>
                   <a:srgbClr val="FFFFFF"/>
                 </a:solidFill>
@@ -3628,7 +3690,7 @@
               <a:t>ロード読込みの開発が</a:t>
             </a:r>
             <a:r>
-              <a:rPr dirty="0" sz="1800" spc="-10">
+              <a:rPr sz="1800" spc="-10" dirty="0">
                 <a:solidFill>
                   <a:srgbClr val="FFFFFF"/>
                 </a:solidFill>
@@ -3638,7 +3700,7 @@
               <a:t>1</a:t>
             </a:r>
             <a:r>
-              <a:rPr dirty="0" sz="1800" spc="-5">
+              <a:rPr sz="1800" spc="-5" dirty="0">
                 <a:solidFill>
                   <a:srgbClr val="FFFFFF"/>
                 </a:solidFill>
@@ -3656,7 +3718,7 @@
       </p:sp>
       <p:sp>
         <p:nvSpPr>
-          <p:cNvPr id="6" name="object 6" descr=""/>
+          <p:cNvPr id="6" name="object 6"/>
           <p:cNvSpPr txBox="1"/>
           <p:nvPr/>
         </p:nvSpPr>
@@ -3675,12 +3737,12 @@
           </a:ln>
         </p:spPr>
         <p:txBody>
-          <a:bodyPr wrap="square" lIns="0" tIns="41275" rIns="0" bIns="0" rtlCol="0" vert="horz">
+          <a:bodyPr vert="horz" wrap="square" lIns="0" tIns="41275" rIns="0" bIns="0" rtlCol="0">
             <a:spAutoFit/>
           </a:bodyPr>
           <a:lstStyle/>
           <a:p>
-            <a:pPr algn="just" marL="92075" marR="696595">
+            <a:pPr marL="92075" marR="696595" algn="just">
               <a:lnSpc>
                 <a:spcPct val="100000"/>
               </a:lnSpc>
@@ -3689,7 +3751,7 @@
               </a:spcBef>
             </a:pPr>
             <a:r>
-              <a:rPr dirty="0" sz="1800" spc="-15">
+              <a:rPr sz="1800" spc="-15" dirty="0">
                 <a:solidFill>
                   <a:srgbClr val="FFFFFF"/>
                 </a:solidFill>
@@ -3699,7 +3761,7 @@
               <a:t>まだモデルのロードと、サンプラーマネージャーが</a:t>
             </a:r>
             <a:r>
-              <a:rPr dirty="0" sz="1800" spc="-5">
+              <a:rPr sz="1800" spc="-5" dirty="0">
                 <a:solidFill>
                   <a:srgbClr val="FFFFFF"/>
                 </a:solidFill>
@@ -3717,7 +3779,7 @@
       </p:sp>
       <p:sp>
         <p:nvSpPr>
-          <p:cNvPr id="7" name="object 7" descr=""/>
+          <p:cNvPr id="7" name="object 7"/>
           <p:cNvSpPr txBox="1"/>
           <p:nvPr/>
         </p:nvSpPr>
@@ -3736,7 +3798,7 @@
           </a:ln>
         </p:spPr>
         <p:txBody>
-          <a:bodyPr wrap="square" lIns="0" tIns="41275" rIns="0" bIns="0" rtlCol="0" vert="horz">
+          <a:bodyPr vert="horz" wrap="square" lIns="0" tIns="41275" rIns="0" bIns="0" rtlCol="0">
             <a:spAutoFit/>
           </a:bodyPr>
           <a:lstStyle/>
@@ -3750,7 +3812,7 @@
               </a:spcBef>
             </a:pPr>
             <a:r>
-              <a:rPr dirty="0" sz="1800" spc="-20">
+              <a:rPr sz="1800" spc="-20" dirty="0">
                 <a:solidFill>
                   <a:srgbClr val="FFFFFF"/>
                 </a:solidFill>
@@ -3774,7 +3836,7 @@
               </a:spcBef>
             </a:pPr>
             <a:r>
-              <a:rPr dirty="0" sz="1800" spc="-5">
+              <a:rPr sz="1800" spc="-5" dirty="0">
                 <a:solidFill>
                   <a:srgbClr val="FFFFFF"/>
                 </a:solidFill>
@@ -3830,10 +3892,12 @@
             <a:off x="78739" y="61087"/>
             <a:ext cx="5053965" cy="696595"/>
           </a:xfrm>
-          <a:prstGeom prst="rect"/>
+          <a:prstGeom prst="rect">
+            <a:avLst/>
+          </a:prstGeom>
         </p:spPr>
         <p:txBody>
-          <a:bodyPr wrap="square" lIns="0" tIns="12700" rIns="0" bIns="0" rtlCol="0" vert="horz">
+          <a:bodyPr vert="horz" wrap="square" lIns="0" tIns="12700" rIns="0" bIns="0" rtlCol="0">
             <a:spAutoFit/>
           </a:bodyPr>
           <a:lstStyle/>
@@ -3847,7 +3911,7 @@
               </a:spcBef>
             </a:pPr>
             <a:r>
-              <a:rPr dirty="0" spc="-20"/>
+              <a:rPr spc="-20" dirty="0"/>
               <a:t>作品概要・開発目的</a:t>
             </a:r>
           </a:p>
@@ -3855,29 +3919,26 @@
       </p:sp>
       <p:sp>
         <p:nvSpPr>
-          <p:cNvPr id="3" name="object 3" descr=""/>
+          <p:cNvPr id="3" name="object 3"/>
           <p:cNvSpPr txBox="1"/>
           <p:nvPr/>
         </p:nvSpPr>
         <p:spPr>
           <a:xfrm>
-            <a:off x="78739" y="908685"/>
-            <a:ext cx="12077700" cy="5297170"/>
+            <a:off x="78739" y="1219200"/>
+            <a:ext cx="12077700" cy="4931478"/>
           </a:xfrm>
           <a:prstGeom prst="rect">
             <a:avLst/>
           </a:prstGeom>
         </p:spPr>
         <p:txBody>
-          <a:bodyPr wrap="square" lIns="0" tIns="12065" rIns="0" bIns="0" rtlCol="0" vert="horz">
+          <a:bodyPr vert="horz" wrap="square" lIns="0" tIns="12065" rIns="0" bIns="0" rtlCol="0">
             <a:spAutoFit/>
           </a:bodyPr>
           <a:lstStyle/>
           <a:p>
             <a:pPr marL="405765">
-              <a:lnSpc>
-                <a:spcPct val="100000"/>
-              </a:lnSpc>
               <a:spcBef>
                 <a:spcPts val="95"/>
               </a:spcBef>
@@ -3887,220 +3948,116 @@
               </a:tabLst>
             </a:pPr>
             <a:r>
-              <a:rPr dirty="0" sz="2800" spc="-25">
-                <a:solidFill>
-                  <a:srgbClr val="FFFFFF"/>
-                </a:solidFill>
-                <a:latin typeface="MS Gothic"/>
-                <a:cs typeface="MS Gothic"/>
-              </a:rPr>
-              <a:t>最終的に</a:t>
-            </a:r>
-            <a:r>
-              <a:rPr dirty="0" sz="2800" spc="-50">
-                <a:solidFill>
-                  <a:srgbClr val="FFFFFF"/>
-                </a:solidFill>
-                <a:latin typeface="MS Gothic"/>
-                <a:cs typeface="MS Gothic"/>
-              </a:rPr>
-              <a:t>は</a:t>
-            </a:r>
-            <a:r>
-              <a:rPr dirty="0" sz="2800">
-                <a:solidFill>
-                  <a:srgbClr val="FFFFFF"/>
-                </a:solidFill>
-                <a:latin typeface="MS Gothic"/>
-                <a:cs typeface="MS Gothic"/>
-              </a:rPr>
-              <a:t>	</a:t>
-            </a:r>
-            <a:r>
-              <a:rPr dirty="0" sz="2800" spc="-25">
-                <a:solidFill>
-                  <a:srgbClr val="FFFFFF"/>
-                </a:solidFill>
-                <a:latin typeface="MS Gothic"/>
-                <a:cs typeface="MS Gothic"/>
-              </a:rPr>
-              <a:t>３</a:t>
-            </a:r>
-            <a:r>
-              <a:rPr dirty="0" sz="2800" spc="-25">
-                <a:solidFill>
-                  <a:srgbClr val="FFFFFF"/>
-                </a:solidFill>
-                <a:latin typeface="Arial MT"/>
-                <a:cs typeface="Arial MT"/>
+              <a:rPr lang="ja-JP" altLang="en-US" sz="2800" spc="-25" dirty="0">
+                <a:solidFill>
+                  <a:srgbClr val="FFFFFF"/>
+                </a:solidFill>
+                <a:latin typeface="MS Gothic"/>
+                <a:cs typeface="MS Gothic"/>
+              </a:rPr>
+              <a:t>大量のオブジェクトやパーティクルを描画して、</a:t>
+            </a:r>
+            <a:br>
+              <a:rPr lang="en-US" altLang="ja-JP" sz="2800" spc="-25" dirty="0">
+                <a:solidFill>
+                  <a:srgbClr val="FFFFFF"/>
+                </a:solidFill>
+                <a:latin typeface="MS Gothic"/>
+                <a:cs typeface="MS Gothic"/>
+              </a:rPr>
+            </a:br>
+            <a:r>
+              <a:rPr lang="en-US" altLang="ja-JP" sz="2800" b="1" dirty="0">
+                <a:solidFill>
+                  <a:schemeClr val="bg1"/>
+                </a:solidFill>
+              </a:rPr>
+              <a:t>Vampire Survivors </a:t>
+            </a:r>
+            <a:r>
+              <a:rPr lang="ja-JP" altLang="en-US" sz="2800" b="1" dirty="0">
+                <a:solidFill>
+                  <a:schemeClr val="bg1"/>
+                </a:solidFill>
+              </a:rPr>
+              <a:t>の３</a:t>
+            </a:r>
+            <a:r>
+              <a:rPr lang="en-US" altLang="ja-JP" sz="2800" b="1" dirty="0">
+                <a:solidFill>
+                  <a:schemeClr val="bg1"/>
+                </a:solidFill>
               </a:rPr>
               <a:t>D</a:t>
             </a:r>
             <a:r>
-              <a:rPr dirty="0" sz="2800" spc="-30">
-                <a:solidFill>
-                  <a:srgbClr val="FFFFFF"/>
-                </a:solidFill>
-                <a:latin typeface="MS Gothic"/>
-                <a:cs typeface="MS Gothic"/>
-              </a:rPr>
-              <a:t>アクション</a:t>
-            </a:r>
-            <a:r>
-              <a:rPr dirty="0" sz="2800" spc="-35">
-                <a:solidFill>
-                  <a:srgbClr val="FFFFFF"/>
-                </a:solidFill>
-                <a:latin typeface="MS Gothic"/>
-                <a:cs typeface="MS Gothic"/>
-              </a:rPr>
-              <a:t>ゲー</a:t>
-            </a:r>
-            <a:r>
-              <a:rPr dirty="0" sz="2800" spc="-50">
-                <a:solidFill>
-                  <a:srgbClr val="FFFFFF"/>
-                </a:solidFill>
-                <a:latin typeface="MS Gothic"/>
-                <a:cs typeface="MS Gothic"/>
-              </a:rPr>
-              <a:t>ム</a:t>
-            </a:r>
-            <a:r>
-              <a:rPr dirty="0" sz="2800">
-                <a:solidFill>
-                  <a:srgbClr val="FFFFFF"/>
-                </a:solidFill>
-                <a:latin typeface="MS Gothic"/>
-                <a:cs typeface="MS Gothic"/>
-              </a:rPr>
-              <a:t>	</a:t>
-            </a:r>
-            <a:r>
-              <a:rPr dirty="0" sz="2800" spc="-30">
-                <a:solidFill>
-                  <a:srgbClr val="FFFFFF"/>
-                </a:solidFill>
-                <a:latin typeface="MS Gothic"/>
-                <a:cs typeface="MS Gothic"/>
-              </a:rPr>
-              <a:t>を制作する</a:t>
-            </a:r>
-            <a:r>
-              <a:rPr dirty="0" sz="2800" spc="-35">
-                <a:solidFill>
-                  <a:srgbClr val="FFFFFF"/>
-                </a:solidFill>
-                <a:latin typeface="MS Gothic"/>
-                <a:cs typeface="MS Gothic"/>
-              </a:rPr>
-              <a:t>予定</a:t>
-            </a:r>
-            <a:r>
-              <a:rPr dirty="0" sz="2800" spc="-30">
-                <a:solidFill>
-                  <a:srgbClr val="FFFFFF"/>
-                </a:solidFill>
-                <a:latin typeface="MS Gothic"/>
-                <a:cs typeface="MS Gothic"/>
-              </a:rPr>
-              <a:t>で</a:t>
-            </a:r>
-            <a:r>
-              <a:rPr dirty="0" sz="2800" spc="-35">
-                <a:solidFill>
-                  <a:srgbClr val="FFFFFF"/>
-                </a:solidFill>
-                <a:latin typeface="MS Gothic"/>
-                <a:cs typeface="MS Gothic"/>
-              </a:rPr>
-              <a:t>す</a:t>
-            </a:r>
-            <a:r>
-              <a:rPr dirty="0" sz="2800" spc="-50">
-                <a:solidFill>
-                  <a:srgbClr val="FFFFFF"/>
-                </a:solidFill>
-                <a:latin typeface="MS Gothic"/>
-                <a:cs typeface="MS Gothic"/>
-              </a:rPr>
-              <a:t>。</a:t>
-            </a:r>
-            <a:endParaRPr sz="2800">
+              <a:rPr lang="ja-JP" altLang="en-US" sz="2800" b="1" dirty="0">
+                <a:solidFill>
+                  <a:schemeClr val="bg1"/>
+                </a:solidFill>
+              </a:rPr>
+              <a:t>版のような</a:t>
+            </a:r>
+            <a:endParaRPr lang="en-US" altLang="ja-JP" sz="2800" b="1" dirty="0">
+              <a:solidFill>
+                <a:schemeClr val="bg1"/>
+              </a:solidFill>
+            </a:endParaRPr>
+          </a:p>
+          <a:p>
+            <a:pPr marL="405765">
+              <a:spcBef>
+                <a:spcPts val="95"/>
+              </a:spcBef>
+              <a:tabLst>
+                <a:tab pos="2539365" algn="l"/>
+                <a:tab pos="6353175" algn="l"/>
+              </a:tabLst>
+            </a:pPr>
+            <a:r>
+              <a:rPr lang="ja-JP" altLang="en-US" sz="2800" b="1" dirty="0">
+                <a:solidFill>
+                  <a:schemeClr val="bg1"/>
+                </a:solidFill>
+                <a:latin typeface="MS Gothic"/>
+                <a:cs typeface="MS Gothic"/>
+              </a:rPr>
+              <a:t>無双ゲーム制作を目指しています。</a:t>
+            </a:r>
+            <a:endParaRPr lang="en-US" altLang="ja-JP" sz="2800" b="1" dirty="0">
+              <a:solidFill>
+                <a:schemeClr val="bg1"/>
+              </a:solidFill>
               <a:latin typeface="MS Gothic"/>
               <a:cs typeface="MS Gothic"/>
             </a:endParaRPr>
           </a:p>
           <a:p>
             <a:pPr marL="405765">
-              <a:lnSpc>
-                <a:spcPct val="100000"/>
-              </a:lnSpc>
-              <a:spcBef>
-                <a:spcPts val="2545"/>
-              </a:spcBef>
-            </a:pPr>
-            <a:r>
-              <a:rPr dirty="0" sz="2700" spc="-15">
-                <a:solidFill>
-                  <a:srgbClr val="FFFFFF"/>
-                </a:solidFill>
-                <a:latin typeface="MS Gothic"/>
-                <a:cs typeface="MS Gothic"/>
-              </a:rPr>
-              <a:t>現在は、大量のオブジェクトを描画しても重たくならない様に</a:t>
-            </a:r>
-            <a:endParaRPr sz="2700">
+              <a:spcBef>
+                <a:spcPts val="95"/>
+              </a:spcBef>
+              <a:tabLst>
+                <a:tab pos="2539365" algn="l"/>
+                <a:tab pos="6353175" algn="l"/>
+              </a:tabLst>
+            </a:pPr>
+            <a:endParaRPr sz="2700" dirty="0">
+              <a:solidFill>
+                <a:schemeClr val="bg1"/>
+              </a:solidFill>
               <a:latin typeface="MS Gothic"/>
               <a:cs typeface="MS Gothic"/>
             </a:endParaRPr>
           </a:p>
           <a:p>
-            <a:pPr marL="405765">
-              <a:lnSpc>
-                <a:spcPct val="100000"/>
-              </a:lnSpc>
-              <a:spcBef>
-                <a:spcPts val="675"/>
-              </a:spcBef>
-            </a:pPr>
-            <a:r>
-              <a:rPr dirty="0" sz="2700" spc="-5">
-                <a:solidFill>
-                  <a:srgbClr val="FFFFFF"/>
-                </a:solidFill>
-                <a:latin typeface="MS Gothic"/>
-                <a:cs typeface="MS Gothic"/>
-              </a:rPr>
-              <a:t>バッチ処理などを後から拡張追加しやすい描画マネージャーを制作中です。</a:t>
-            </a:r>
-            <a:endParaRPr sz="2700">
-              <a:latin typeface="MS Gothic"/>
-              <a:cs typeface="MS Gothic"/>
-            </a:endParaRPr>
-          </a:p>
-          <a:p>
-            <a:pPr>
-              <a:lnSpc>
-                <a:spcPct val="100000"/>
-              </a:lnSpc>
-              <a:spcBef>
-                <a:spcPts val="250"/>
-              </a:spcBef>
-            </a:pPr>
-            <a:endParaRPr sz="2700">
-              <a:latin typeface="MS Gothic"/>
-              <a:cs typeface="MS Gothic"/>
-            </a:endParaRPr>
-          </a:p>
-          <a:p>
             <a:pPr marL="12700">
               <a:lnSpc>
                 <a:spcPct val="100000"/>
               </a:lnSpc>
             </a:pPr>
             <a:r>
-              <a:rPr dirty="0" u="sng" sz="4400" spc="-15">
+              <a:rPr sz="4400" u="sng" spc="-15" dirty="0">
                 <a:solidFill>
                   <a:srgbClr val="FFFFFF"/>
                 </a:solidFill>
@@ -4114,7 +4071,7 @@
               </a:rPr>
               <a:t>開発環境</a:t>
             </a:r>
-            <a:endParaRPr sz="4400">
+            <a:endParaRPr sz="4400" dirty="0">
               <a:latin typeface="MS Gothic"/>
               <a:cs typeface="MS Gothic"/>
             </a:endParaRPr>
@@ -4129,7 +4086,7 @@
               </a:spcBef>
             </a:pPr>
             <a:r>
-              <a:rPr dirty="0" sz="2800" spc="-30">
+              <a:rPr sz="2800" spc="-30" dirty="0">
                 <a:solidFill>
                   <a:srgbClr val="FFFFFF"/>
                 </a:solidFill>
@@ -4139,17 +4096,17 @@
               <a:t>C++</a:t>
             </a:r>
             <a:r>
-              <a:rPr dirty="0" sz="2800" spc="-30">
-                <a:solidFill>
-                  <a:srgbClr val="FFFFFF"/>
-                </a:solidFill>
-                <a:latin typeface="MS Gothic"/>
-                <a:cs typeface="MS Gothic"/>
-              </a:rPr>
-              <a:t>１７</a:t>
-            </a:r>
-            <a:r>
-              <a:rPr dirty="0" sz="2800" spc="-590">
+              <a:rPr lang="en-US" sz="2800" spc="-30" dirty="0">
+                <a:solidFill>
+                  <a:srgbClr val="FFFFFF"/>
+                </a:solidFill>
+                <a:latin typeface="MS Gothic"/>
+                <a:cs typeface="Arial MT"/>
+              </a:rPr>
+              <a:t>20</a:t>
+            </a:r>
+            <a:r>
+              <a:rPr sz="2800" spc="-590" dirty="0">
                 <a:solidFill>
                   <a:srgbClr val="FFFFFF"/>
                 </a:solidFill>
@@ -4159,7 +4116,7 @@
               <a:t> </a:t>
             </a:r>
             <a:r>
-              <a:rPr dirty="0" sz="2800">
+              <a:rPr sz="2800" dirty="0">
                 <a:solidFill>
                   <a:srgbClr val="FFFFFF"/>
                 </a:solidFill>
@@ -4169,7 +4126,7 @@
               <a:t>/</a:t>
             </a:r>
             <a:r>
-              <a:rPr dirty="0" sz="2800" spc="20">
+              <a:rPr sz="2800" spc="20" dirty="0">
                 <a:solidFill>
                   <a:srgbClr val="FFFFFF"/>
                 </a:solidFill>
@@ -4179,7 +4136,7 @@
               <a:t> </a:t>
             </a:r>
             <a:r>
-              <a:rPr dirty="0" sz="2800" spc="-10">
+              <a:rPr sz="2800" spc="-10" dirty="0">
                 <a:solidFill>
                   <a:srgbClr val="FFFFFF"/>
                 </a:solidFill>
@@ -4188,7 +4145,7 @@
               </a:rPr>
               <a:t>DirectX11</a:t>
             </a:r>
-            <a:endParaRPr sz="2800">
+            <a:endParaRPr sz="2800" dirty="0">
               <a:latin typeface="Arial MT"/>
               <a:cs typeface="Arial MT"/>
             </a:endParaRPr>
@@ -4202,7 +4159,7 @@
                 <a:spcPts val="1900"/>
               </a:spcBef>
             </a:pPr>
-            <a:endParaRPr sz="2800">
+            <a:endParaRPr sz="2800" dirty="0">
               <a:latin typeface="Arial MT"/>
               <a:cs typeface="Arial MT"/>
             </a:endParaRPr>
@@ -4217,7 +4174,7 @@
               </a:spcBef>
             </a:pPr>
             <a:r>
-              <a:rPr dirty="0" u="sng" sz="4400" spc="-20">
+              <a:rPr sz="4400" u="sng" spc="-20" dirty="0" err="1">
                 <a:solidFill>
                   <a:srgbClr val="FFFFFF"/>
                 </a:solidFill>
@@ -4231,7 +4188,15 @@
               </a:rPr>
               <a:t>開発期間</a:t>
             </a:r>
-            <a:endParaRPr sz="4400">
+            <a:endParaRPr lang="ja-JP" altLang="en-US" sz="4400" u="sng" spc="-20" dirty="0">
+              <a:solidFill>
+                <a:srgbClr val="FFFFFF"/>
+              </a:solidFill>
+              <a:uFill>
+                <a:solidFill>
+                  <a:srgbClr val="FFFFFF"/>
+                </a:solidFill>
+              </a:uFill>
               <a:latin typeface="MS Gothic"/>
               <a:cs typeface="MS Gothic"/>
             </a:endParaRPr>
@@ -4246,16 +4211,16 @@
               </a:spcBef>
             </a:pPr>
             <a:r>
-              <a:rPr dirty="0" sz="2800" spc="-40">
-                <a:solidFill>
-                  <a:srgbClr val="FFFFFF"/>
-                </a:solidFill>
-                <a:latin typeface="MS Gothic"/>
-                <a:cs typeface="MS Gothic"/>
-              </a:rPr>
-              <a:t>８月から制作開始しました</a:t>
-            </a:r>
-            <a:endParaRPr sz="2800">
+              <a:rPr lang="ja-JP" altLang="en-US" sz="2800" spc="-40" dirty="0">
+                <a:solidFill>
+                  <a:srgbClr val="FFFFFF"/>
+                </a:solidFill>
+                <a:latin typeface="MS Gothic"/>
+                <a:cs typeface="MS Gothic"/>
+              </a:rPr>
+              <a:t>約３～４カ月くらい</a:t>
+            </a:r>
+            <a:endParaRPr lang="ja-JP" altLang="en-US" sz="2800" dirty="0">
               <a:latin typeface="MS Gothic"/>
               <a:cs typeface="MS Gothic"/>
             </a:endParaRPr>
@@ -4302,7 +4267,9 @@
             <a:off x="1867535" y="2172970"/>
             <a:ext cx="8457565" cy="1631950"/>
           </a:xfrm>
-          <a:prstGeom prst="rect"/>
+          <a:prstGeom prst="rect">
+            <a:avLst/>
+          </a:prstGeom>
           <a:ln w="38100">
             <a:solidFill>
               <a:srgbClr val="FFFFFF"/>
@@ -4310,7 +4277,7 @@
           </a:ln>
         </p:spPr>
         <p:txBody>
-          <a:bodyPr wrap="square" lIns="0" tIns="212090" rIns="0" bIns="0" rtlCol="0" vert="horz">
+          <a:bodyPr vert="horz" wrap="square" lIns="0" tIns="212090" rIns="0" bIns="0" rtlCol="0">
             <a:spAutoFit/>
           </a:bodyPr>
           <a:lstStyle/>
@@ -4324,7 +4291,7 @@
               </a:spcBef>
             </a:pPr>
             <a:r>
-              <a:rPr dirty="0" u="heavy" spc="-5">
+              <a:rPr u="heavy" spc="-5" dirty="0">
                 <a:uFill>
                   <a:solidFill>
                     <a:srgbClr val="FFFFFF"/>
@@ -4334,7 +4301,7 @@
               <a:t>制作したいと思っている</a:t>
             </a:r>
             <a:r>
-              <a:rPr dirty="0" u="heavy" spc="1100">
+              <a:rPr u="heavy" spc="1100" dirty="0">
                 <a:uFill>
                   <a:solidFill>
                     <a:srgbClr val="FFFFFF"/>
@@ -4344,7 +4311,7 @@
               <a:t>          </a:t>
             </a:r>
             <a:r>
-              <a:rPr dirty="0" u="heavy" spc="-5">
+              <a:rPr u="heavy" spc="-5" dirty="0">
                 <a:uFill>
                   <a:solidFill>
                     <a:srgbClr val="FFFFFF"/>
@@ -4396,46 +4363,12 @@
             <a:off x="346659" y="331977"/>
             <a:ext cx="2819400" cy="696595"/>
           </a:xfrm>
-          <a:prstGeom prst="rect"/>
-        </p:spPr>
-        <p:txBody>
-          <a:bodyPr wrap="square" lIns="0" tIns="12700" rIns="0" bIns="0" rtlCol="0" vert="horz">
-            <a:spAutoFit/>
-          </a:bodyPr>
-          <a:lstStyle/>
-          <a:p>
-            <a:pPr marL="12700">
-              <a:lnSpc>
-                <a:spcPct val="100000"/>
-              </a:lnSpc>
-              <a:spcBef>
-                <a:spcPts val="100"/>
-              </a:spcBef>
-            </a:pPr>
-            <a:r>
-              <a:rPr dirty="0" spc="-20"/>
-              <a:t>ゲーム紹介</a:t>
-            </a:r>
-          </a:p>
-        </p:txBody>
-      </p:sp>
-      <p:sp>
-        <p:nvSpPr>
-          <p:cNvPr id="3" name="object 3" descr=""/>
-          <p:cNvSpPr txBox="1"/>
-          <p:nvPr/>
-        </p:nvSpPr>
-        <p:spPr>
-          <a:xfrm>
-            <a:off x="6469126" y="4911978"/>
-            <a:ext cx="5200015" cy="452120"/>
-          </a:xfrm>
           <a:prstGeom prst="rect">
             <a:avLst/>
           </a:prstGeom>
         </p:spPr>
         <p:txBody>
-          <a:bodyPr wrap="square" lIns="0" tIns="12065" rIns="0" bIns="0" rtlCol="0" vert="horz">
+          <a:bodyPr vert="horz" wrap="square" lIns="0" tIns="12700" rIns="0" bIns="0" rtlCol="0">
             <a:spAutoFit/>
           </a:bodyPr>
           <a:lstStyle/>
@@ -4445,56 +4378,26 @@
                 <a:spcPct val="100000"/>
               </a:lnSpc>
               <a:spcBef>
-                <a:spcPts val="95"/>
-              </a:spcBef>
-            </a:pPr>
-            <a:r>
-              <a:rPr dirty="0" sz="2800" spc="-25">
-                <a:solidFill>
-                  <a:srgbClr val="FFFFFF"/>
-                </a:solidFill>
-                <a:latin typeface="MS Gothic"/>
-                <a:cs typeface="MS Gothic"/>
-              </a:rPr>
-              <a:t>敵は</a:t>
-            </a:r>
-            <a:r>
-              <a:rPr dirty="0" sz="2800" spc="-35">
-                <a:solidFill>
-                  <a:srgbClr val="FFFFFF"/>
-                </a:solidFill>
-                <a:latin typeface="Arial MT"/>
-                <a:cs typeface="Arial MT"/>
-              </a:rPr>
-              <a:t>1</a:t>
-            </a:r>
-            <a:r>
-              <a:rPr dirty="0" sz="2800" spc="-40">
-                <a:solidFill>
-                  <a:srgbClr val="FFFFFF"/>
-                </a:solidFill>
-                <a:latin typeface="MS Gothic"/>
-                <a:cs typeface="MS Gothic"/>
-              </a:rPr>
-              <a:t>種類だけを制作予定です。</a:t>
-            </a:r>
-            <a:endParaRPr sz="2800">
-              <a:latin typeface="MS Gothic"/>
-              <a:cs typeface="MS Gothic"/>
-            </a:endParaRPr>
-          </a:p>
-        </p:txBody>
-      </p:sp>
-      <p:sp>
-        <p:nvSpPr>
-          <p:cNvPr id="4" name="object 4" descr=""/>
+                <a:spcPts val="100"/>
+              </a:spcBef>
+            </a:pPr>
+            <a:r>
+              <a:rPr spc="-20" dirty="0"/>
+              <a:t>ゲーム紹介</a:t>
+            </a:r>
+          </a:p>
+        </p:txBody>
+      </p:sp>
+      <p:sp>
+        <p:nvSpPr>
+          <p:cNvPr id="4" name="object 4"/>
           <p:cNvSpPr txBox="1"/>
           <p:nvPr/>
         </p:nvSpPr>
         <p:spPr>
           <a:xfrm>
             <a:off x="267931" y="1379474"/>
-            <a:ext cx="11796395" cy="1452880"/>
+            <a:ext cx="11796395" cy="885499"/>
           </a:xfrm>
           <a:prstGeom prst="rect">
             <a:avLst/>
@@ -4506,7 +4409,7 @@
           </a:ln>
         </p:spPr>
         <p:txBody>
-          <a:bodyPr wrap="square" lIns="0" tIns="94615" rIns="0" bIns="0" rtlCol="0" vert="horz">
+          <a:bodyPr vert="horz" wrap="square" lIns="0" tIns="94615" rIns="0" bIns="0" rtlCol="0">
             <a:spAutoFit/>
           </a:bodyPr>
           <a:lstStyle/>
@@ -4520,16 +4423,26 @@
               </a:spcBef>
             </a:pPr>
             <a:r>
-              <a:rPr dirty="0" sz="2400" spc="-5">
-                <a:solidFill>
-                  <a:srgbClr val="FFFFFF"/>
-                </a:solidFill>
-                <a:latin typeface="MS Gothic"/>
-                <a:cs typeface="MS Gothic"/>
-              </a:rPr>
-              <a:t>❦のゲームで一番拘りたい点</a:t>
-            </a:r>
-            <a:endParaRPr sz="2400">
+              <a:rPr lang="ja-JP" altLang="en-US" sz="2400" spc="-5" dirty="0">
+                <a:solidFill>
+                  <a:srgbClr val="FFFFFF"/>
+                </a:solidFill>
+                <a:latin typeface="MS Gothic"/>
+                <a:cs typeface="MS Gothic"/>
+              </a:rPr>
+              <a:t>この</a:t>
+            </a:r>
+            <a:r>
+              <a:rPr sz="2400" spc="-5" dirty="0" err="1">
+                <a:solidFill>
+                  <a:srgbClr val="FFFFFF"/>
+                </a:solidFill>
+                <a:latin typeface="MS Gothic"/>
+                <a:cs typeface="MS Gothic"/>
+              </a:rPr>
+              <a:t>ゲームで一番拘りたい点</a:t>
+            </a:r>
+            <a:endParaRPr sz="2400" dirty="0">
               <a:latin typeface="MS Gothic"/>
               <a:cs typeface="MS Gothic"/>
             </a:endParaRPr>
@@ -4544,7 +4457,7 @@
               </a:spcBef>
             </a:pPr>
             <a:r>
-              <a:rPr dirty="0" u="sng" sz="2400" spc="-15">
+              <a:rPr lang="ja-JP" altLang="en-US" sz="2400" spc="-15" dirty="0">
                 <a:solidFill>
                   <a:srgbClr val="FFFFFF"/>
                 </a:solidFill>
@@ -4556,24 +4469,10 @@
                 <a:latin typeface="MS Gothic"/>
                 <a:cs typeface="MS Gothic"/>
               </a:rPr>
-              <a:t>プレイヤーが巨大なお城などを目の前にして、</a:t>
-            </a:r>
-            <a:endParaRPr sz="2400">
-              <a:latin typeface="MS Gothic"/>
-              <a:cs typeface="MS Gothic"/>
-            </a:endParaRPr>
-          </a:p>
-          <a:p>
-            <a:pPr marL="814705">
-              <a:lnSpc>
-                <a:spcPct val="100000"/>
-              </a:lnSpc>
-              <a:spcBef>
-                <a:spcPts val="434"/>
-              </a:spcBef>
-            </a:pPr>
-            <a:r>
-              <a:rPr dirty="0" u="sng" sz="2400" spc="-10">
+              <a:t>　　</a:t>
+            </a:r>
+            <a:r>
+              <a:rPr lang="ja-JP" altLang="en-US" sz="2400" u="sng" spc="-15" dirty="0">
                 <a:solidFill>
                   <a:srgbClr val="FFFFFF"/>
                 </a:solidFill>
@@ -4585,25 +4484,125 @@
                 <a:latin typeface="MS Gothic"/>
                 <a:cs typeface="MS Gothic"/>
               </a:rPr>
-              <a:t>今から❦の場所を探索するんだというワクワク感を味わえるゲームを作りたい。</a:t>
-            </a:r>
-            <a:endParaRPr sz="2400">
+              <a:t>敵やパーティクルを大量に描画</a:t>
+            </a:r>
+            <a:endParaRPr sz="2400" dirty="0">
               <a:latin typeface="MS Gothic"/>
               <a:cs typeface="MS Gothic"/>
             </a:endParaRPr>
           </a:p>
         </p:txBody>
       </p:sp>
-      <p:sp>
-        <p:nvSpPr>
-          <p:cNvPr id="5" name="object 5" descr=""/>
+      <p:pic>
+        <p:nvPicPr>
+          <p:cNvPr id="1026" name="Picture 2" descr="Vampire Survivors - Google Play のアプリ">
+            <a:extLst>
+              <a:ext uri="{FF2B5EF4-FFF2-40B4-BE49-F238E27FC236}">
+                <a16:creationId xmlns:a16="http://schemas.microsoft.com/office/drawing/2014/main" id="{6B819FD2-F057-211C-F5A8-9CDDAFCC79B8}"/>
+              </a:ext>
+            </a:extLst>
+          </p:cNvPr>
+          <p:cNvPicPr>
+            <a:picLocks noChangeAspect="1" noChangeArrowheads="1"/>
+          </p:cNvPicPr>
+          <p:nvPr/>
+        </p:nvPicPr>
+        <p:blipFill>
+          <a:blip r:embed="rId2">
+            <a:extLst>
+              <a:ext uri="{28A0092B-C50C-407E-A947-70E740481C1C}">
+                <a14:useLocalDpi xmlns:a14="http://schemas.microsoft.com/office/drawing/2010/main" val="0"/>
+              </a:ext>
+            </a:extLst>
+          </a:blip>
+          <a:srcRect/>
+          <a:stretch>
+            <a:fillRect/>
+          </a:stretch>
+        </p:blipFill>
+        <p:spPr bwMode="auto">
+          <a:xfrm>
+            <a:off x="533400" y="3787739"/>
+            <a:ext cx="4882243" cy="2743200"/>
+          </a:xfrm>
+          <a:prstGeom prst="rect">
+            <a:avLst/>
+          </a:prstGeom>
+          <a:noFill/>
+          <a:extLst>
+            <a:ext uri="{909E8E84-426E-40DD-AFC4-6F175D3DCCD1}">
+              <a14:hiddenFill xmlns:a14="http://schemas.microsoft.com/office/drawing/2010/main">
+                <a:solidFill>
+                  <a:srgbClr val="FFFFFF"/>
+                </a:solidFill>
+              </a14:hiddenFill>
+            </a:ext>
+          </a:extLst>
+        </p:spPr>
+      </p:pic>
+      <p:pic>
+        <p:nvPicPr>
+          <p:cNvPr id="1028" name="Picture 4" descr="ONE PIECE 海賊無双4 | バンダイナムコエンターテインメント公式サイト">
+            <a:extLst>
+              <a:ext uri="{FF2B5EF4-FFF2-40B4-BE49-F238E27FC236}">
+                <a16:creationId xmlns:a16="http://schemas.microsoft.com/office/drawing/2014/main" id="{09338CBB-AF07-ACCA-8C7E-A77020BC0B8F}"/>
+              </a:ext>
+            </a:extLst>
+          </p:cNvPr>
+          <p:cNvPicPr>
+            <a:picLocks noChangeAspect="1" noChangeArrowheads="1"/>
+          </p:cNvPicPr>
+          <p:nvPr/>
+        </p:nvPicPr>
+        <p:blipFill>
+          <a:blip r:embed="rId3">
+            <a:extLst>
+              <a:ext uri="{28A0092B-C50C-407E-A947-70E740481C1C}">
+                <a14:useLocalDpi xmlns:a14="http://schemas.microsoft.com/office/drawing/2010/main" val="0"/>
+              </a:ext>
+            </a:extLst>
+          </a:blip>
+          <a:srcRect/>
+          <a:stretch>
+            <a:fillRect/>
+          </a:stretch>
+        </p:blipFill>
+        <p:spPr bwMode="auto">
+          <a:xfrm>
+            <a:off x="5638800" y="3956704"/>
+            <a:ext cx="4572000" cy="2574235"/>
+          </a:xfrm>
+          <a:prstGeom prst="rect">
+            <a:avLst/>
+          </a:prstGeom>
+          <a:noFill/>
+          <a:extLst>
+            <a:ext uri="{909E8E84-426E-40DD-AFC4-6F175D3DCCD1}">
+              <a14:hiddenFill xmlns:a14="http://schemas.microsoft.com/office/drawing/2010/main">
+                <a:solidFill>
+                  <a:srgbClr val="FFFFFF"/>
+                </a:solidFill>
+              </a14:hiddenFill>
+            </a:ext>
+          </a:extLst>
+        </p:spPr>
+      </p:pic>
+      <p:sp>
+        <p:nvSpPr>
+          <p:cNvPr id="9" name="object 4">
+            <a:extLst>
+              <a:ext uri="{FF2B5EF4-FFF2-40B4-BE49-F238E27FC236}">
+                <a16:creationId xmlns:a16="http://schemas.microsoft.com/office/drawing/2014/main" id="{36EB1FFB-DF02-E06D-1CF0-394EEDFB26AD}"/>
+              </a:ext>
+            </a:extLst>
+          </p:cNvPr>
           <p:cNvSpPr txBox="1"/>
           <p:nvPr/>
         </p:nvSpPr>
         <p:spPr>
           <a:xfrm>
-            <a:off x="267931" y="3151606"/>
-            <a:ext cx="5031740" cy="3455670"/>
+            <a:off x="267930" y="3196564"/>
+            <a:ext cx="11796395" cy="464871"/>
           </a:xfrm>
           <a:prstGeom prst="rect">
             <a:avLst/>
@@ -4615,7 +4614,7 @@
           </a:ln>
         </p:spPr>
         <p:txBody>
-          <a:bodyPr wrap="square" lIns="0" tIns="125095" rIns="0" bIns="0" rtlCol="0" vert="horz">
+          <a:bodyPr vert="horz" wrap="square" lIns="0" tIns="94615" rIns="0" bIns="0" rtlCol="0">
             <a:spAutoFit/>
           </a:bodyPr>
           <a:lstStyle/>
@@ -4625,110 +4624,20 @@
                 <a:spcPct val="100000"/>
               </a:lnSpc>
               <a:spcBef>
-                <a:spcPts val="985"/>
-              </a:spcBef>
-            </a:pPr>
-            <a:r>
-              <a:rPr dirty="0" sz="2800" spc="-35">
-                <a:solidFill>
-                  <a:srgbClr val="FFFFFF"/>
-                </a:solidFill>
-                <a:latin typeface="MS Gothic"/>
-                <a:cs typeface="MS Gothic"/>
-              </a:rPr>
-              <a:t>イメージとしては</a:t>
-            </a:r>
-            <a:endParaRPr sz="2800">
-              <a:latin typeface="MS Gothic"/>
-              <a:cs typeface="MS Gothic"/>
-            </a:endParaRPr>
-          </a:p>
-        </p:txBody>
-      </p:sp>
-      <p:pic>
-        <p:nvPicPr>
-          <p:cNvPr id="6" name="object 6"/>
-          <p:cNvPicPr/>
-          <p:nvPr/>
-        </p:nvPicPr>
-        <p:blipFill>
-          <a:blip r:embed="rId2" cstate="print"/>
-          <a:stretch>
-            <a:fillRect/>
-          </a:stretch>
-        </p:blipFill>
-        <p:spPr>
-          <a:xfrm>
-            <a:off x="2268854" y="3622421"/>
-            <a:ext cx="2887598" cy="2665476"/>
-          </a:xfrm>
-          <a:prstGeom prst="rect">
-            <a:avLst/>
-          </a:prstGeom>
-        </p:spPr>
-      </p:pic>
-      <p:pic>
-        <p:nvPicPr>
-          <p:cNvPr id="7" name="object 7"/>
-          <p:cNvPicPr/>
-          <p:nvPr/>
-        </p:nvPicPr>
-        <p:blipFill>
-          <a:blip r:embed="rId3" cstate="print"/>
-          <a:stretch>
-            <a:fillRect/>
-          </a:stretch>
-        </p:blipFill>
-        <p:spPr>
-          <a:xfrm>
-            <a:off x="909142" y="5697791"/>
-            <a:ext cx="718464" cy="909485"/>
-          </a:xfrm>
-          <a:prstGeom prst="rect">
-            <a:avLst/>
-          </a:prstGeom>
-        </p:spPr>
-      </p:pic>
-      <p:sp>
-        <p:nvSpPr>
-          <p:cNvPr id="8" name="object 8" descr=""/>
-          <p:cNvSpPr txBox="1"/>
-          <p:nvPr/>
-        </p:nvSpPr>
-        <p:spPr>
-          <a:xfrm>
-            <a:off x="6405498" y="3499484"/>
-            <a:ext cx="4290060" cy="793115"/>
-          </a:xfrm>
-          <a:prstGeom prst="rect">
-            <a:avLst/>
-          </a:prstGeom>
-        </p:spPr>
-        <p:txBody>
-          <a:bodyPr wrap="square" lIns="0" tIns="93980" rIns="0" bIns="0" rtlCol="0" vert="horz">
-            <a:spAutoFit/>
-          </a:bodyPr>
-          <a:lstStyle/>
-          <a:p>
-            <a:pPr marL="12700" marR="5080">
-              <a:lnSpc>
-                <a:spcPts val="2690"/>
-              </a:lnSpc>
-              <a:spcBef>
-                <a:spcPts val="740"/>
-              </a:spcBef>
-            </a:pPr>
-            <a:r>
-              <a:rPr dirty="0" sz="2800" spc="-40">
-                <a:solidFill>
-                  <a:srgbClr val="FFFFFF"/>
-                </a:solidFill>
-                <a:latin typeface="MS Gothic"/>
-                <a:cs typeface="MS Gothic"/>
-              </a:rPr>
-              <a:t>探索面よりアート面に力を入れたいと思っています。</a:t>
-            </a:r>
-            <a:endParaRPr sz="2800">
+                <a:spcPts val="745"/>
+              </a:spcBef>
+            </a:pPr>
+            <a:r>
+              <a:rPr lang="ja-JP" altLang="en-US" sz="2400" spc="-5" dirty="0">
+                <a:solidFill>
+                  <a:srgbClr val="FFFFFF"/>
+                </a:solidFill>
+                <a:latin typeface="MS Gothic"/>
+                <a:cs typeface="MS Gothic"/>
+              </a:rPr>
+              <a:t>目指しているゲーム</a:t>
+            </a:r>
+            <a:endParaRPr sz="2400" dirty="0">
               <a:latin typeface="MS Gothic"/>
               <a:cs typeface="MS Gothic"/>
             </a:endParaRPr>
@@ -4773,9 +4682,11 @@
         <p:spPr>
           <a:xfrm>
             <a:off x="1867535" y="2172970"/>
-            <a:ext cx="8457565" cy="1631950"/>
+            <a:ext cx="8457565" cy="1445267"/>
           </a:xfrm>
-          <a:prstGeom prst="rect"/>
+          <a:prstGeom prst="rect">
+            <a:avLst/>
+          </a:prstGeom>
           <a:ln w="38100">
             <a:solidFill>
               <a:srgbClr val="FFFFFF"/>
@@ -4783,7 +4694,7 @@
           </a:ln>
         </p:spPr>
         <p:txBody>
-          <a:bodyPr wrap="square" lIns="0" tIns="212090" rIns="0" bIns="0" rtlCol="0" vert="horz">
+          <a:bodyPr vert="horz" wrap="square" lIns="0" tIns="212090" rIns="0" bIns="0" rtlCol="0">
             <a:spAutoFit/>
           </a:bodyPr>
           <a:lstStyle/>
@@ -4797,27 +4708,37 @@
               </a:spcBef>
             </a:pPr>
             <a:r>
-              <a:rPr dirty="0" u="heavy" spc="-5">
+              <a:rPr lang="ja-JP" altLang="en-US" u="heavy" spc="-5" dirty="0">
                 <a:uFill>
                   <a:solidFill>
                     <a:srgbClr val="FFFFFF"/>
                   </a:solidFill>
                 </a:uFill>
               </a:rPr>
-              <a:t>❦のゲームを作成するうえで</a:t>
-            </a:r>
-            <a:r>
-              <a:rPr dirty="0" u="heavy" spc="1100">
+              <a:t>この</a:t>
+            </a:r>
+            <a:r>
+              <a:rPr u="heavy" spc="-5" dirty="0" err="1">
                 <a:uFill>
                   <a:solidFill>
                     <a:srgbClr val="FFFFFF"/>
                   </a:solidFill>
                 </a:uFill>
               </a:rPr>
+              <a:t>ゲームを作成するうえで</a:t>
+            </a:r>
+            <a:r>
+              <a:rPr u="heavy" spc="1100" dirty="0">
+                <a:uFill>
+                  <a:solidFill>
+                    <a:srgbClr val="FFFFFF"/>
+                  </a:solidFill>
+                </a:uFill>
+              </a:rPr>
               <a:t>          </a:t>
             </a:r>
             <a:r>
-              <a:rPr dirty="0" u="heavy" spc="-10">
+              <a:rPr u="heavy" spc="-10" dirty="0">
                 <a:uFill>
                   <a:solidFill>
                     <a:srgbClr val="FFFFFF"/>
@@ -4869,10 +4790,12 @@
             <a:off x="346659" y="437133"/>
             <a:ext cx="2263140" cy="696595"/>
           </a:xfrm>
-          <a:prstGeom prst="rect"/>
+          <a:prstGeom prst="rect">
+            <a:avLst/>
+          </a:prstGeom>
         </p:spPr>
         <p:txBody>
-          <a:bodyPr wrap="square" lIns="0" tIns="13335" rIns="0" bIns="0" rtlCol="0" vert="horz">
+          <a:bodyPr vert="horz" wrap="square" lIns="0" tIns="13335" rIns="0" bIns="0" rtlCol="0">
             <a:spAutoFit/>
           </a:bodyPr>
           <a:lstStyle/>
@@ -4886,7 +4809,7 @@
               </a:spcBef>
             </a:pPr>
             <a:r>
-              <a:rPr dirty="0" u="none" spc="-15"/>
+              <a:rPr u="none" spc="-15" dirty="0"/>
               <a:t>技術選定</a:t>
             </a:r>
           </a:p>
@@ -4894,7 +4817,7 @@
       </p:sp>
       <p:sp>
         <p:nvSpPr>
-          <p:cNvPr id="3" name="object 3" descr=""/>
+          <p:cNvPr id="3" name="object 3"/>
           <p:cNvSpPr txBox="1"/>
           <p:nvPr/>
         </p:nvSpPr>
@@ -4913,7 +4836,7 @@
           </a:ln>
         </p:spPr>
         <p:txBody>
-          <a:bodyPr wrap="square" lIns="0" tIns="41275" rIns="0" bIns="0" rtlCol="0" vert="horz">
+          <a:bodyPr vert="horz" wrap="square" lIns="0" tIns="41275" rIns="0" bIns="0" rtlCol="0">
             <a:spAutoFit/>
           </a:bodyPr>
           <a:lstStyle/>
@@ -4927,7 +4850,7 @@
               </a:spcBef>
             </a:pPr>
             <a:r>
-              <a:rPr dirty="0" sz="2800" spc="-35">
+              <a:rPr sz="2800" spc="-35" dirty="0">
                 <a:solidFill>
                   <a:srgbClr val="FFFFFF"/>
                 </a:solidFill>
@@ -4936,7 +4859,7 @@
               </a:rPr>
               <a:t>❦のゲームで一番大事だと思っている技術は、フレームレートとロードだと思っています。</a:t>
             </a:r>
-            <a:endParaRPr sz="2800">
+            <a:endParaRPr sz="2800" dirty="0">
               <a:latin typeface="MS Gothic"/>
               <a:cs typeface="MS Gothic"/>
             </a:endParaRPr>
@@ -4945,7 +4868,7 @@
       </p:sp>
       <p:sp>
         <p:nvSpPr>
-          <p:cNvPr id="4" name="object 4" descr=""/>
+          <p:cNvPr id="4" name="object 4"/>
           <p:cNvSpPr/>
           <p:nvPr/>
         </p:nvSpPr>
@@ -4990,12 +4913,14 @@
         <p:txBody>
           <a:bodyPr wrap="square" lIns="0" tIns="0" rIns="0" bIns="0" rtlCol="0"/>
           <a:lstStyle/>
-          <a:p/>
-        </p:txBody>
-      </p:sp>
-      <p:sp>
-        <p:nvSpPr>
-          <p:cNvPr id="5" name="object 5" descr=""/>
+          <a:p>
+            <a:endParaRPr/>
+          </a:p>
+        </p:txBody>
+      </p:sp>
+      <p:sp>
+        <p:nvSpPr>
+          <p:cNvPr id="5" name="object 5"/>
           <p:cNvSpPr txBox="1"/>
           <p:nvPr/>
         </p:nvSpPr>
@@ -5009,7 +4934,7 @@
           </a:prstGeom>
         </p:spPr>
         <p:txBody>
-          <a:bodyPr wrap="square" lIns="0" tIns="12065" rIns="0" bIns="0" rtlCol="0" vert="horz">
+          <a:bodyPr vert="horz" wrap="square" lIns="0" tIns="12065" rIns="0" bIns="0" rtlCol="0">
             <a:spAutoFit/>
           </a:bodyPr>
           <a:lstStyle/>
@@ -5023,7 +4948,7 @@
               </a:spcBef>
             </a:pPr>
             <a:r>
-              <a:rPr dirty="0" sz="2800" spc="-40">
+              <a:rPr sz="2800" spc="-40" dirty="0">
                 <a:solidFill>
                   <a:srgbClr val="FFFFFF"/>
                 </a:solidFill>
@@ -5047,7 +4972,7 @@
               </a:spcBef>
             </a:pPr>
             <a:r>
-              <a:rPr dirty="0" sz="2800" spc="-35">
+              <a:rPr sz="2800" spc="-35" dirty="0">
                 <a:solidFill>
                   <a:srgbClr val="FFFFFF"/>
                 </a:solidFill>
@@ -5071,7 +4996,7 @@
               </a:spcBef>
             </a:pPr>
             <a:r>
-              <a:rPr dirty="0" sz="2800" spc="-30">
+              <a:rPr sz="2800" spc="-30" dirty="0">
                 <a:solidFill>
                   <a:srgbClr val="FFFFFF"/>
                 </a:solidFill>
@@ -5081,7 +5006,7 @@
               <a:t>描画マネージャーでバッチ処理</a:t>
             </a:r>
             <a:r>
-              <a:rPr dirty="0" sz="2800" spc="-10" b="1">
+              <a:rPr sz="2800" b="1" spc="-10" dirty="0">
                 <a:solidFill>
                   <a:srgbClr val="FFFFFF"/>
                 </a:solidFill>
@@ -5091,7 +5016,7 @@
               <a:t>(</a:t>
             </a:r>
             <a:r>
-              <a:rPr dirty="0" sz="2800" spc="-30">
+              <a:rPr sz="2800" spc="-30" dirty="0">
                 <a:solidFill>
                   <a:srgbClr val="FFFFFF"/>
                 </a:solidFill>
@@ -5101,7 +5026,7 @@
               <a:t>インスタンシングの予定</a:t>
             </a:r>
             <a:r>
-              <a:rPr dirty="0" sz="2800" spc="-50" b="1">
+              <a:rPr sz="2800" b="1" spc="-50" dirty="0">
                 <a:solidFill>
                   <a:srgbClr val="FFFFFF"/>
                 </a:solidFill>
@@ -5111,7 +5036,7 @@
               <a:t>)</a:t>
             </a:r>
             <a:r>
-              <a:rPr dirty="0" sz="2800" spc="-40">
+              <a:rPr sz="2800" spc="-40" dirty="0">
                 <a:solidFill>
                   <a:srgbClr val="FFFFFF"/>
                 </a:solidFill>
@@ -5135,7 +5060,7 @@
               </a:spcBef>
             </a:pPr>
             <a:r>
-              <a:rPr dirty="0" sz="2800" spc="-30">
+              <a:rPr sz="2800" spc="-30" dirty="0">
                 <a:solidFill>
                   <a:srgbClr val="FFFFFF"/>
                 </a:solidFill>
@@ -5145,7 +5070,7 @@
               <a:t>もし、❦れでも重たい場合</a:t>
             </a:r>
             <a:r>
-              <a:rPr dirty="0" sz="2800" spc="-30" b="1">
+              <a:rPr sz="2800" b="1" spc="-30" dirty="0">
                 <a:solidFill>
                   <a:srgbClr val="FFFFFF"/>
                 </a:solidFill>
@@ -5155,7 +5080,7 @@
               <a:t>(LOD)</a:t>
             </a:r>
             <a:r>
-              <a:rPr dirty="0" sz="2800" spc="-80">
+              <a:rPr sz="2800" spc="-80" dirty="0">
                 <a:solidFill>
                   <a:srgbClr val="FFFFFF"/>
                 </a:solidFill>
@@ -5165,7 +5090,7 @@
               <a:t>を実装予定です。</a:t>
             </a:r>
             <a:r>
-              <a:rPr dirty="0" baseline="-21825" sz="2100" spc="-15">
+              <a:rPr sz="2100" spc="-15" baseline="-21825" dirty="0">
                 <a:solidFill>
                   <a:srgbClr val="FFFFFF"/>
                 </a:solidFill>
@@ -5175,7 +5100,7 @@
               <a:t>LOD</a:t>
             </a:r>
             <a:r>
-              <a:rPr dirty="0" baseline="-21825" sz="2100" spc="-30">
+              <a:rPr sz="2100" spc="-30" baseline="-21825" dirty="0">
                 <a:solidFill>
                   <a:srgbClr val="FFFFFF"/>
                 </a:solidFill>
@@ -5184,7 +5109,7 @@
               </a:rPr>
               <a:t>の勉✲はまだできていません</a:t>
             </a:r>
-            <a:endParaRPr baseline="-21825" sz="2100">
+            <a:endParaRPr sz="2100" baseline="-21825">
               <a:latin typeface="MS Gothic"/>
               <a:cs typeface="MS Gothic"/>
             </a:endParaRPr>
@@ -5231,10 +5156,12 @@
             <a:off x="346659" y="437133"/>
             <a:ext cx="2263140" cy="696595"/>
           </a:xfrm>
-          <a:prstGeom prst="rect"/>
+          <a:prstGeom prst="rect">
+            <a:avLst/>
+          </a:prstGeom>
         </p:spPr>
         <p:txBody>
-          <a:bodyPr wrap="square" lIns="0" tIns="13335" rIns="0" bIns="0" rtlCol="0" vert="horz">
+          <a:bodyPr vert="horz" wrap="square" lIns="0" tIns="13335" rIns="0" bIns="0" rtlCol="0">
             <a:spAutoFit/>
           </a:bodyPr>
           <a:lstStyle/>
@@ -5248,7 +5175,7 @@
               </a:spcBef>
             </a:pPr>
             <a:r>
-              <a:rPr dirty="0" u="none" spc="-15"/>
+              <a:rPr u="none" spc="-15" dirty="0"/>
               <a:t>技術選定</a:t>
             </a:r>
           </a:p>
@@ -5256,7 +5183,7 @@
       </p:sp>
       <p:sp>
         <p:nvSpPr>
-          <p:cNvPr id="3" name="object 3" descr=""/>
+          <p:cNvPr id="3" name="object 3"/>
           <p:cNvSpPr txBox="1"/>
           <p:nvPr/>
         </p:nvSpPr>
@@ -5275,7 +5202,7 @@
           </a:ln>
         </p:spPr>
         <p:txBody>
-          <a:bodyPr wrap="square" lIns="0" tIns="40640" rIns="0" bIns="0" rtlCol="0" vert="horz">
+          <a:bodyPr vert="horz" wrap="square" lIns="0" tIns="40640" rIns="0" bIns="0" rtlCol="0">
             <a:spAutoFit/>
           </a:bodyPr>
           <a:lstStyle/>
@@ -5289,7 +5216,7 @@
               </a:spcBef>
             </a:pPr>
             <a:r>
-              <a:rPr dirty="0" sz="2800" spc="-35">
+              <a:rPr sz="2800" spc="-35" dirty="0">
                 <a:solidFill>
                   <a:srgbClr val="FFFFFF"/>
                 </a:solidFill>
@@ -5299,7 +5226,7 @@
               <a:t>自作モデルフォーマットを作成して、バイナリーデータで持つ</a:t>
             </a:r>
             <a:r>
-              <a:rPr dirty="0" sz="2800" spc="-15">
+              <a:rPr sz="2800" spc="-15" dirty="0">
                 <a:solidFill>
                   <a:srgbClr val="FFFFFF"/>
                 </a:solidFill>
@@ -5309,7 +5236,7 @@
               <a:t>スレッド処理</a:t>
             </a:r>
             <a:r>
-              <a:rPr dirty="0" sz="2800" spc="-10" b="1">
+              <a:rPr sz="2800" b="1" spc="-10" dirty="0">
                 <a:solidFill>
                   <a:srgbClr val="FFFFFF"/>
                 </a:solidFill>
@@ -5319,7 +5246,7 @@
               <a:t>(</a:t>
             </a:r>
             <a:r>
-              <a:rPr dirty="0" sz="2800" spc="-35">
+              <a:rPr sz="2800" spc="-35" dirty="0">
                 <a:solidFill>
                   <a:srgbClr val="FFFFFF"/>
                 </a:solidFill>
@@ -5340,7 +5267,7 @@
               </a:lnSpc>
             </a:pPr>
             <a:r>
-              <a:rPr dirty="0" sz="2800" spc="-30">
+              <a:rPr sz="2800" spc="-30" dirty="0">
                 <a:solidFill>
                   <a:srgbClr val="FFFFFF"/>
                 </a:solidFill>
@@ -5350,7 +5277,7 @@
               <a:t>別スレッドで行うようにしたい</a:t>
             </a:r>
             <a:r>
-              <a:rPr dirty="0" sz="2800" spc="-50" b="1">
+              <a:rPr sz="2800" b="1" spc="-50" dirty="0">
                 <a:solidFill>
                   <a:srgbClr val="FFFFFF"/>
                 </a:solidFill>
@@ -5368,7 +5295,7 @@
       </p:sp>
       <p:sp>
         <p:nvSpPr>
-          <p:cNvPr id="4" name="object 4" descr=""/>
+          <p:cNvPr id="4" name="object 4"/>
           <p:cNvSpPr txBox="1"/>
           <p:nvPr/>
         </p:nvSpPr>
@@ -5382,7 +5309,7 @@
           </a:prstGeom>
         </p:spPr>
         <p:txBody>
-          <a:bodyPr wrap="square" lIns="0" tIns="12065" rIns="0" bIns="0" rtlCol="0" vert="horz">
+          <a:bodyPr vert="horz" wrap="square" lIns="0" tIns="12065" rIns="0" bIns="0" rtlCol="0">
             <a:spAutoFit/>
           </a:bodyPr>
           <a:lstStyle/>
@@ -5396,7 +5323,7 @@
               </a:spcBef>
             </a:pPr>
             <a:r>
-              <a:rPr dirty="0" sz="2800" spc="-40">
+              <a:rPr sz="2800" spc="-40" dirty="0">
                 <a:solidFill>
                   <a:srgbClr val="FFFFFF"/>
                 </a:solidFill>
@@ -5414,7 +5341,7 @@
       </p:sp>
       <p:sp>
         <p:nvSpPr>
-          <p:cNvPr id="5" name="object 5" descr=""/>
+          <p:cNvPr id="5" name="object 5"/>
           <p:cNvSpPr txBox="1"/>
           <p:nvPr/>
         </p:nvSpPr>
@@ -5428,7 +5355,7 @@
           </a:prstGeom>
         </p:spPr>
         <p:txBody>
-          <a:bodyPr wrap="square" lIns="0" tIns="13335" rIns="0" bIns="0" rtlCol="0" vert="horz">
+          <a:bodyPr vert="horz" wrap="square" lIns="0" tIns="13335" rIns="0" bIns="0" rtlCol="0">
             <a:spAutoFit/>
           </a:bodyPr>
           <a:lstStyle/>
@@ -5442,7 +5369,7 @@
               </a:spcBef>
             </a:pPr>
             <a:r>
-              <a:rPr dirty="0" sz="1400" spc="-20">
+              <a:rPr sz="1400" spc="-20" dirty="0">
                 <a:solidFill>
                   <a:srgbClr val="FFFFFF"/>
                 </a:solidFill>
@@ -5498,7 +5425,9 @@
             <a:off x="1867535" y="2172970"/>
             <a:ext cx="8457565" cy="1631950"/>
           </a:xfrm>
-          <a:prstGeom prst="rect"/>
+          <a:prstGeom prst="rect">
+            <a:avLst/>
+          </a:prstGeom>
           <a:ln w="38100">
             <a:solidFill>
               <a:srgbClr val="FFFFFF"/>
@@ -5506,7 +5435,7 @@
           </a:ln>
         </p:spPr>
         <p:txBody>
-          <a:bodyPr wrap="square" lIns="0" tIns="267335" rIns="0" bIns="0" rtlCol="0" vert="horz">
+          <a:bodyPr vert="horz" wrap="square" lIns="0" tIns="267335" rIns="0" bIns="0" rtlCol="0">
             <a:spAutoFit/>
           </a:bodyPr>
           <a:lstStyle/>
@@ -5520,7 +5449,7 @@
               </a:spcBef>
             </a:pPr>
             <a:r>
-              <a:rPr dirty="0" u="heavy" sz="4000" spc="-45">
+              <a:rPr sz="4000" u="heavy" spc="-45" dirty="0">
                 <a:uFill>
                   <a:solidFill>
                     <a:srgbClr val="FFFFFF"/>
@@ -5530,7 +5459,7 @@
               <a:t>今制作している描画マネージャーの</a:t>
             </a:r>
             <a:r>
-              <a:rPr dirty="0" u="heavy" sz="4000" spc="1000">
+              <a:rPr sz="4000" u="heavy" spc="1000" dirty="0">
                 <a:uFill>
                   <a:solidFill>
                     <a:srgbClr val="FFFFFF"/>
@@ -5540,7 +5469,7 @@
               <a:t>            </a:t>
             </a:r>
             <a:r>
-              <a:rPr dirty="0" u="heavy" sz="4000" spc="-40">
+              <a:rPr sz="4000" u="heavy" spc="-40" dirty="0">
                 <a:uFill>
                   <a:solidFill>
                     <a:srgbClr val="FFFFFF"/>
@@ -5593,10 +5522,12 @@
             <a:off x="78739" y="603884"/>
             <a:ext cx="7288530" cy="696595"/>
           </a:xfrm>
-          <a:prstGeom prst="rect"/>
+          <a:prstGeom prst="rect">
+            <a:avLst/>
+          </a:prstGeom>
         </p:spPr>
         <p:txBody>
-          <a:bodyPr wrap="square" lIns="0" tIns="13335" rIns="0" bIns="0" rtlCol="0" vert="horz">
+          <a:bodyPr vert="horz" wrap="square" lIns="0" tIns="13335" rIns="0" bIns="0" rtlCol="0">
             <a:spAutoFit/>
           </a:bodyPr>
           <a:lstStyle/>
@@ -5610,7 +5541,7 @@
               </a:spcBef>
             </a:pPr>
             <a:r>
-              <a:rPr dirty="0" spc="-25"/>
+              <a:rPr spc="-25" dirty="0"/>
               <a:t>プラットフォーム非依存設計</a:t>
             </a:r>
           </a:p>
@@ -5618,7 +5549,7 @@
       </p:sp>
       <p:sp>
         <p:nvSpPr>
-          <p:cNvPr id="3" name="object 3" descr=""/>
+          <p:cNvPr id="3" name="object 3"/>
           <p:cNvSpPr txBox="1"/>
           <p:nvPr/>
         </p:nvSpPr>
@@ -5632,7 +5563,7 @@
           </a:prstGeom>
         </p:spPr>
         <p:txBody>
-          <a:bodyPr wrap="square" lIns="0" tIns="29209" rIns="0" bIns="0" rtlCol="0" vert="horz">
+          <a:bodyPr vert="horz" wrap="square" lIns="0" tIns="29209" rIns="0" bIns="0" rtlCol="0">
             <a:spAutoFit/>
           </a:bodyPr>
           <a:lstStyle/>
@@ -5646,7 +5577,7 @@
               </a:spcBef>
             </a:pPr>
             <a:r>
-              <a:rPr dirty="0" sz="2200" spc="-35">
+              <a:rPr sz="2200" spc="-35" dirty="0">
                 <a:solidFill>
                   <a:srgbClr val="FFFFFF"/>
                 </a:solidFill>
@@ -5670,7 +5601,7 @@
               </a:spcBef>
             </a:pPr>
             <a:r>
-              <a:rPr dirty="0" sz="2200" spc="-35">
+              <a:rPr sz="2200" spc="-35" dirty="0">
                 <a:solidFill>
                   <a:srgbClr val="FFFFFF"/>
                 </a:solidFill>
@@ -5694,7 +5625,7 @@
               </a:spcBef>
             </a:pPr>
             <a:r>
-              <a:rPr dirty="0" sz="2200" spc="-20">
+              <a:rPr sz="2200" spc="-20" dirty="0">
                 <a:solidFill>
                   <a:srgbClr val="FFFFFF"/>
                 </a:solidFill>
@@ -5704,7 +5635,7 @@
               <a:t>ゲーム基盤</a:t>
             </a:r>
             <a:r>
-              <a:rPr dirty="0" sz="2200" spc="-25">
+              <a:rPr sz="2200" spc="-25" dirty="0">
                 <a:solidFill>
                   <a:srgbClr val="FFFFFF"/>
                 </a:solidFill>
@@ -5714,7 +5645,7 @@
               <a:t>（</a:t>
             </a:r>
             <a:r>
-              <a:rPr dirty="0" sz="2200" spc="-25">
+              <a:rPr sz="2200" spc="-25" dirty="0">
                 <a:solidFill>
                   <a:srgbClr val="FFFFFF"/>
                 </a:solidFill>
@@ -5724,7 +5655,7 @@
               <a:t>GameMain</a:t>
             </a:r>
             <a:r>
-              <a:rPr dirty="0" sz="2200" spc="-25">
+              <a:rPr sz="2200" spc="-25" dirty="0">
                 <a:solidFill>
                   <a:srgbClr val="FFFFFF"/>
                 </a:solidFill>
@@ -5734,7 +5665,7 @@
               <a:t>）</a:t>
             </a:r>
             <a:r>
-              <a:rPr dirty="0" sz="2200" spc="-35">
+              <a:rPr sz="2200" spc="-35" dirty="0">
                 <a:solidFill>
                   <a:srgbClr val="FFFFFF"/>
                 </a:solidFill>
@@ -5772,7 +5703,7 @@
               </a:spcBef>
             </a:pPr>
             <a:r>
-              <a:rPr dirty="0" sz="2200" spc="-35">
+              <a:rPr sz="2200" spc="-35" dirty="0">
                 <a:solidFill>
                   <a:srgbClr val="FFFFFF"/>
                 </a:solidFill>
@@ -5796,7 +5727,7 @@
               </a:spcBef>
             </a:pPr>
             <a:r>
-              <a:rPr dirty="0" sz="2200" spc="-35">
+              <a:rPr sz="2200" spc="-35" dirty="0">
                 <a:solidFill>
                   <a:srgbClr val="FFFFFF"/>
                 </a:solidFill>
@@ -5817,7 +5748,7 @@
               </a:lnSpc>
             </a:pPr>
             <a:r>
-              <a:rPr dirty="0" sz="2200" spc="-35">
+              <a:rPr sz="2200" spc="-35" dirty="0">
                 <a:solidFill>
                   <a:srgbClr val="FFFFFF"/>
                 </a:solidFill>
@@ -5852,7 +5783,7 @@
               </a:lnSpc>
             </a:pPr>
             <a:r>
-              <a:rPr dirty="0" sz="2200" spc="-35">
+              <a:rPr sz="2200" spc="-35" dirty="0">
                 <a:solidFill>
                   <a:srgbClr val="FFFFFF"/>
                 </a:solidFill>
@@ -5870,7 +5801,7 @@
       </p:sp>
       <p:pic>
         <p:nvPicPr>
-          <p:cNvPr id="4" name="object 4" descr=""/>
+          <p:cNvPr id="4" name="object 4"/>
           <p:cNvPicPr/>
           <p:nvPr/>
         </p:nvPicPr>

--- a/就職作品制作アピール.pptx
+++ b/就職作品制作アピール.pptx
@@ -7,8 +7,14 @@
   <p:sldIdLst>
     <p:sldId id="256" r:id="rId2"/>
     <p:sldId id="257" r:id="rId3"/>
-    <p:sldId id="258" r:id="rId4"/>
-    <p:sldId id="259" r:id="rId5"/>
+    <p:sldId id="259" r:id="rId4"/>
+    <p:sldId id="260" r:id="rId5"/>
+    <p:sldId id="261" r:id="rId6"/>
+    <p:sldId id="262" r:id="rId7"/>
+    <p:sldId id="264" r:id="rId8"/>
+    <p:sldId id="263" r:id="rId9"/>
+    <p:sldId id="265" r:id="rId10"/>
+    <p:sldId id="266" r:id="rId11"/>
   </p:sldIdLst>
   <p:sldSz cx="12192000" cy="6858000"/>
   <p:notesSz cx="12192000" cy="6858000"/>
@@ -187,7 +193,7 @@
           <a:p>
             <a:fld id="{1D8BD707-D9CF-40AE-B4C6-C98DA3205C09}" type="datetimeFigureOut">
               <a:rPr lang="en-US"/>
-              <a:t>12/13/2025</a:t>
+              <a:t>1/28/2026</a:t>
             </a:fld>
             <a:endParaRPr lang="en-US"/>
           </a:p>
@@ -364,7 +370,7 @@
           <a:p>
             <a:fld id="{1D8BD707-D9CF-40AE-B4C6-C98DA3205C09}" type="datetimeFigureOut">
               <a:rPr lang="en-US"/>
-              <a:t>12/13/2025</a:t>
+              <a:t>1/28/2026</a:t>
             </a:fld>
             <a:endParaRPr lang="en-US"/>
           </a:p>
@@ -578,7 +584,7 @@
           <a:p>
             <a:fld id="{1D8BD707-D9CF-40AE-B4C6-C98DA3205C09}" type="datetimeFigureOut">
               <a:rPr lang="en-US"/>
-              <a:t>12/13/2025</a:t>
+              <a:t>1/28/2026</a:t>
             </a:fld>
             <a:endParaRPr lang="en-US"/>
           </a:p>
@@ -726,7 +732,7 @@
           <a:p>
             <a:fld id="{1D8BD707-D9CF-40AE-B4C6-C98DA3205C09}" type="datetimeFigureOut">
               <a:rPr lang="en-US"/>
-              <a:t>12/13/2025</a:t>
+              <a:t>1/28/2026</a:t>
             </a:fld>
             <a:endParaRPr lang="en-US"/>
           </a:p>
@@ -845,7 +851,7 @@
           <a:p>
             <a:fld id="{1D8BD707-D9CF-40AE-B4C6-C98DA3205C09}" type="datetimeFigureOut">
               <a:rPr lang="en-US"/>
-              <a:t>12/13/2025</a:t>
+              <a:t>1/28/2026</a:t>
             </a:fld>
             <a:endParaRPr lang="en-US"/>
           </a:p>
@@ -1092,7 +1098,7 @@
           <a:p>
             <a:fld id="{1D8BD707-D9CF-40AE-B4C6-C98DA3205C09}" type="datetimeFigureOut">
               <a:rPr lang="en-US"/>
-              <a:t>12/13/2025</a:t>
+              <a:t>1/28/2026</a:t>
             </a:fld>
             <a:endParaRPr lang="en-US"/>
           </a:p>
@@ -1323,8 +1329,8 @@
         </p:nvSpPr>
         <p:spPr>
           <a:xfrm>
-            <a:off x="838200" y="1905000"/>
-            <a:ext cx="10736580" cy="940435"/>
+            <a:off x="727710" y="2192962"/>
+            <a:ext cx="10736580" cy="936154"/>
           </a:xfrm>
           <a:prstGeom prst="rect">
             <a:avLst/>
@@ -1346,7 +1352,7 @@
             </a:pPr>
             <a:r>
               <a:rPr lang="ja-JP" altLang="en-US" sz="6000" dirty="0"/>
-              <a:t>ポートフォリオ</a:t>
+              <a:t>作品資料</a:t>
             </a:r>
             <a:endParaRPr sz="6000" dirty="0"/>
           </a:p>
@@ -1360,8 +1366,8 @@
         </p:nvSpPr>
         <p:spPr>
           <a:xfrm>
-            <a:off x="9322054" y="5404603"/>
-            <a:ext cx="2092960" cy="942975"/>
+            <a:off x="4381500" y="3733800"/>
+            <a:ext cx="3429000" cy="536685"/>
           </a:xfrm>
           <a:prstGeom prst="rect">
             <a:avLst/>
@@ -1372,70 +1378,6 @@
             <a:spAutoFit/>
           </a:bodyPr>
           <a:lstStyle/>
-          <a:p>
-            <a:pPr marL="12700">
-              <a:lnSpc>
-                <a:spcPct val="100000"/>
-              </a:lnSpc>
-              <a:spcBef>
-                <a:spcPts val="825"/>
-              </a:spcBef>
-            </a:pPr>
-            <a:r>
-              <a:rPr sz="2400" spc="-10" dirty="0">
-                <a:solidFill>
-                  <a:srgbClr val="FFFFFF"/>
-                </a:solidFill>
-                <a:latin typeface="Arial MT"/>
-                <a:cs typeface="Arial MT"/>
-              </a:rPr>
-              <a:t>AT-</a:t>
-            </a:r>
-            <a:r>
-              <a:rPr sz="2400" spc="-25" dirty="0">
-                <a:solidFill>
-                  <a:srgbClr val="FFFFFF"/>
-                </a:solidFill>
-                <a:latin typeface="Arial MT"/>
-                <a:cs typeface="Arial MT"/>
-              </a:rPr>
-              <a:t>13B-</a:t>
-            </a:r>
-            <a:r>
-              <a:rPr sz="2400" dirty="0">
-                <a:solidFill>
-                  <a:srgbClr val="FFFFFF"/>
-                </a:solidFill>
-                <a:latin typeface="Arial MT"/>
-                <a:cs typeface="Arial MT"/>
-              </a:rPr>
-              <a:t>529</a:t>
-            </a:r>
-            <a:r>
-              <a:rPr sz="2400" spc="5" dirty="0">
-                <a:solidFill>
-                  <a:srgbClr val="FFFFFF"/>
-                </a:solidFill>
-                <a:latin typeface="Arial MT"/>
-                <a:cs typeface="Arial MT"/>
-              </a:rPr>
-              <a:t> </a:t>
-            </a:r>
-            <a:r>
-              <a:rPr sz="2400" spc="-25" dirty="0">
-                <a:solidFill>
-                  <a:srgbClr val="FFFFFF"/>
-                </a:solidFill>
-                <a:latin typeface="Arial MT"/>
-                <a:cs typeface="Arial MT"/>
-              </a:rPr>
-              <a:t>32</a:t>
-            </a:r>
-            <a:endParaRPr sz="2400">
-              <a:latin typeface="Arial MT"/>
-              <a:cs typeface="Arial MT"/>
-            </a:endParaRPr>
-          </a:p>
           <a:p>
             <a:pPr marL="12700">
               <a:lnSpc>
@@ -1446,69 +1388,204 @@
               </a:spcBef>
             </a:pPr>
             <a:r>
-              <a:rPr sz="2400" spc="-125" dirty="0">
+              <a:rPr lang="en-US" altLang="ja-JP" sz="2800" spc="-125" dirty="0">
                 <a:solidFill>
                   <a:srgbClr val="FFFFFF"/>
                 </a:solidFill>
                 <a:latin typeface="MS Gothic"/>
                 <a:cs typeface="MS Gothic"/>
               </a:rPr>
-              <a:t>松田 健志</a:t>
-            </a:r>
-            <a:endParaRPr sz="2400">
+              <a:t>HAL</a:t>
+            </a:r>
+            <a:r>
+              <a:rPr lang="ja-JP" altLang="en-US" sz="2800" spc="-125" dirty="0">
+                <a:solidFill>
+                  <a:srgbClr val="FFFFFF"/>
+                </a:solidFill>
+                <a:latin typeface="MS Gothic"/>
+                <a:cs typeface="MS Gothic"/>
+              </a:rPr>
+              <a:t>大阪　　松田 </a:t>
+            </a:r>
+            <a:r>
+              <a:rPr sz="2800" spc="-125" dirty="0" err="1">
+                <a:solidFill>
+                  <a:srgbClr val="FFFFFF"/>
+                </a:solidFill>
+                <a:latin typeface="MS Gothic"/>
+                <a:cs typeface="MS Gothic"/>
+              </a:rPr>
+              <a:t>健志</a:t>
+            </a:r>
+            <a:endParaRPr sz="2800" dirty="0">
               <a:latin typeface="MS Gothic"/>
               <a:cs typeface="MS Gothic"/>
             </a:endParaRPr>
           </a:p>
         </p:txBody>
       </p:sp>
-      <p:sp>
-        <p:nvSpPr>
-          <p:cNvPr id="4" name="object 4"/>
+    </p:spTree>
+  </p:cSld>
+  <p:clrMapOvr>
+    <a:masterClrMapping/>
+  </p:clrMapOvr>
+</p:sld>
+</file>
+
+<file path=ppt/slides/slide10.xml><?xml version="1.0" encoding="utf-8"?>
+<p:sld xmlns:a="http://schemas.openxmlformats.org/drawingml/2006/main" xmlns:r="http://schemas.openxmlformats.org/officeDocument/2006/relationships" xmlns:p="http://schemas.openxmlformats.org/presentationml/2006/main">
+  <p:cSld>
+    <p:spTree>
+      <p:nvGrpSpPr>
+        <p:cNvPr id="1" name="">
+          <a:extLst>
+            <a:ext uri="{FF2B5EF4-FFF2-40B4-BE49-F238E27FC236}">
+              <a16:creationId xmlns:a16="http://schemas.microsoft.com/office/drawing/2014/main" id="{5180B81A-2B52-A397-F013-E1D59C17A104}"/>
+            </a:ext>
+          </a:extLst>
+        </p:cNvPr>
+        <p:cNvGrpSpPr/>
+        <p:nvPr/>
+      </p:nvGrpSpPr>
+      <p:grpSpPr>
+        <a:xfrm>
+          <a:off x="0" y="0"/>
+          <a:ext cx="0" cy="0"/>
+          <a:chOff x="0" y="0"/>
+          <a:chExt cx="0" cy="0"/>
+        </a:xfrm>
+      </p:grpSpPr>
+      <p:sp>
+        <p:nvSpPr>
+          <p:cNvPr id="2" name="タイトル 1">
+            <a:extLst>
+              <a:ext uri="{FF2B5EF4-FFF2-40B4-BE49-F238E27FC236}">
+                <a16:creationId xmlns:a16="http://schemas.microsoft.com/office/drawing/2014/main" id="{491EDACF-D60C-FE19-77A7-71118ED88DD2}"/>
+              </a:ext>
+            </a:extLst>
+          </p:cNvPr>
+          <p:cNvSpPr>
+            <a:spLocks noGrp="1"/>
+          </p:cNvSpPr>
+          <p:nvPr>
+            <p:ph type="title"/>
+          </p:nvPr>
+        </p:nvSpPr>
+        <p:spPr>
+          <a:xfrm>
+            <a:off x="371168" y="390833"/>
+            <a:ext cx="7706032" cy="923330"/>
+          </a:xfrm>
+        </p:spPr>
+        <p:txBody>
+          <a:bodyPr/>
+          <a:lstStyle/>
+          <a:p>
+            <a:r>
+              <a:rPr kumimoji="1" lang="ja-JP" altLang="en-US" sz="6000" dirty="0"/>
+              <a:t>今後</a:t>
+            </a:r>
+          </a:p>
+        </p:txBody>
+      </p:sp>
+      <p:sp>
+        <p:nvSpPr>
+          <p:cNvPr id="7" name="テキスト ボックス 6">
+            <a:extLst>
+              <a:ext uri="{FF2B5EF4-FFF2-40B4-BE49-F238E27FC236}">
+                <a16:creationId xmlns:a16="http://schemas.microsoft.com/office/drawing/2014/main" id="{A370E018-015F-6D9B-6B02-3A8BADC61388}"/>
+              </a:ext>
+            </a:extLst>
+          </p:cNvPr>
           <p:cNvSpPr txBox="1"/>
           <p:nvPr/>
         </p:nvSpPr>
         <p:spPr>
           <a:xfrm>
-            <a:off x="4690173" y="3400603"/>
-            <a:ext cx="3032633" cy="391160"/>
+            <a:off x="371168" y="1670339"/>
+            <a:ext cx="5191432" cy="584775"/>
           </a:xfrm>
           <a:prstGeom prst="rect">
             <a:avLst/>
           </a:prstGeom>
-        </p:spPr>
-        <p:txBody>
-          <a:bodyPr vert="horz" wrap="square" lIns="0" tIns="12700" rIns="0" bIns="0" rtlCol="0">
+          <a:noFill/>
+          <a:ln w="19050">
+            <a:solidFill>
+              <a:schemeClr val="bg1"/>
+            </a:solidFill>
+          </a:ln>
+        </p:spPr>
+        <p:txBody>
+          <a:bodyPr wrap="square" rtlCol="0">
             <a:spAutoFit/>
           </a:bodyPr>
           <a:lstStyle/>
           <a:p>
-            <a:pPr marL="12700" algn="ctr">
-              <a:lnSpc>
-                <a:spcPct val="100000"/>
-              </a:lnSpc>
-              <a:spcBef>
-                <a:spcPts val="100"/>
-              </a:spcBef>
-            </a:pPr>
-            <a:r>
-              <a:rPr lang="ja-JP" altLang="en-US" sz="2400" spc="-5" dirty="0">
-                <a:solidFill>
-                  <a:srgbClr val="FFFFFF"/>
-                </a:solidFill>
-                <a:latin typeface="MS Gothic"/>
-                <a:cs typeface="MS Gothic"/>
-              </a:rPr>
-              <a:t>無双ゲーム制作</a:t>
-            </a:r>
-            <a:endParaRPr lang="ja-JP" altLang="en-US" sz="2400" dirty="0">
-              <a:latin typeface="MS Gothic"/>
-              <a:cs typeface="MS Gothic"/>
+            <a:pPr algn="l"/>
+            <a:r>
+              <a:rPr kumimoji="1" lang="ja-JP" altLang="en-US" sz="3200" dirty="0">
+                <a:solidFill>
+                  <a:schemeClr val="bg1"/>
+                </a:solidFill>
+              </a:rPr>
+              <a:t>キャッシュミスの少なさ</a:t>
+            </a:r>
+          </a:p>
+        </p:txBody>
+      </p:sp>
+      <p:sp>
+        <p:nvSpPr>
+          <p:cNvPr id="9" name="テキスト ボックス 8">
+            <a:extLst>
+              <a:ext uri="{FF2B5EF4-FFF2-40B4-BE49-F238E27FC236}">
+                <a16:creationId xmlns:a16="http://schemas.microsoft.com/office/drawing/2014/main" id="{64096C8E-2385-53F6-9578-C01DDB0C8B8C}"/>
+              </a:ext>
+            </a:extLst>
+          </p:cNvPr>
+          <p:cNvSpPr txBox="1"/>
+          <p:nvPr/>
+        </p:nvSpPr>
+        <p:spPr>
+          <a:xfrm>
+            <a:off x="371168" y="2255114"/>
+            <a:ext cx="10754032" cy="461665"/>
+          </a:xfrm>
+          <a:prstGeom prst="rect">
+            <a:avLst/>
+          </a:prstGeom>
+          <a:noFill/>
+          <a:ln>
+            <a:noFill/>
+          </a:ln>
+        </p:spPr>
+        <p:txBody>
+          <a:bodyPr wrap="square" rtlCol="0">
+            <a:spAutoFit/>
+          </a:bodyPr>
+          <a:lstStyle/>
+          <a:p>
+            <a:r>
+              <a:rPr kumimoji="1" lang="ja-JP" altLang="en-US" sz="2400" dirty="0">
+                <a:solidFill>
+                  <a:schemeClr val="bg1"/>
+                </a:solidFill>
+              </a:rPr>
+              <a:t>リソース管理</a:t>
+            </a:r>
+            <a:endParaRPr kumimoji="1" lang="en-US" altLang="ja-JP" sz="2400" dirty="0">
+              <a:solidFill>
+                <a:schemeClr val="bg1"/>
+              </a:solidFill>
             </a:endParaRPr>
           </a:p>
         </p:txBody>
       </p:sp>
     </p:spTree>
+    <p:extLst>
+      <p:ext uri="{BB962C8B-B14F-4D97-AF65-F5344CB8AC3E}">
+        <p14:creationId xmlns:p14="http://schemas.microsoft.com/office/powerpoint/2010/main" val="2142884083"/>
+      </p:ext>
+    </p:extLst>
   </p:cSld>
   <p:clrMapOvr>
     <a:masterClrMapping/>
@@ -1535,8 +1612,14 @@
       </p:grpSpPr>
       <p:sp>
         <p:nvSpPr>
-          <p:cNvPr id="2" name="object 2"/>
-          <p:cNvSpPr txBox="1">
+          <p:cNvPr id="2" name="タイトル 1">
+            <a:extLst>
+              <a:ext uri="{FF2B5EF4-FFF2-40B4-BE49-F238E27FC236}">
+                <a16:creationId xmlns:a16="http://schemas.microsoft.com/office/drawing/2014/main" id="{3030DCD2-F0DB-B7B9-A22B-CC6696E04FBA}"/>
+              </a:ext>
+            </a:extLst>
+          </p:cNvPr>
+          <p:cNvSpPr>
             <a:spLocks noGrp="1"/>
           </p:cNvSpPr>
           <p:nvPr>
@@ -1545,392 +1628,177 @@
         </p:nvSpPr>
         <p:spPr>
           <a:xfrm>
-            <a:off x="78739" y="61087"/>
-            <a:ext cx="5053965" cy="696595"/>
-          </a:xfrm>
-          <a:prstGeom prst="rect">
-            <a:avLst/>
-          </a:prstGeom>
-        </p:spPr>
-        <p:txBody>
-          <a:bodyPr vert="horz" wrap="square" lIns="0" tIns="12700" rIns="0" bIns="0" rtlCol="0">
-            <a:spAutoFit/>
-          </a:bodyPr>
+            <a:off x="381001" y="381000"/>
+            <a:ext cx="1981200" cy="923330"/>
+          </a:xfrm>
+        </p:spPr>
+        <p:txBody>
+          <a:bodyPr/>
           <a:lstStyle/>
           <a:p>
-            <a:pPr marL="12700">
-              <a:lnSpc>
-                <a:spcPct val="100000"/>
-              </a:lnSpc>
-              <a:spcBef>
-                <a:spcPts val="100"/>
-              </a:spcBef>
-            </a:pPr>
-            <a:r>
-              <a:rPr spc="-20" dirty="0"/>
-              <a:t>作品概要・開発目的</a:t>
-            </a:r>
-          </a:p>
-        </p:txBody>
-      </p:sp>
-      <p:sp>
-        <p:nvSpPr>
-          <p:cNvPr id="3" name="object 3"/>
-          <p:cNvSpPr txBox="1"/>
-          <p:nvPr/>
-        </p:nvSpPr>
-        <p:spPr>
-          <a:xfrm>
-            <a:off x="78739" y="1219200"/>
-            <a:ext cx="12077700" cy="4931478"/>
-          </a:xfrm>
-          <a:prstGeom prst="rect">
-            <a:avLst/>
-          </a:prstGeom>
-        </p:spPr>
-        <p:txBody>
-          <a:bodyPr vert="horz" wrap="square" lIns="0" tIns="12065" rIns="0" bIns="0" rtlCol="0">
-            <a:spAutoFit/>
-          </a:bodyPr>
-          <a:lstStyle/>
-          <a:p>
-            <a:pPr marL="405765">
-              <a:spcBef>
-                <a:spcPts val="95"/>
-              </a:spcBef>
-              <a:tabLst>
-                <a:tab pos="2539365" algn="l"/>
-                <a:tab pos="6353175" algn="l"/>
-              </a:tabLst>
-            </a:pPr>
-            <a:r>
-              <a:rPr lang="ja-JP" altLang="en-US" sz="2800" spc="-25" dirty="0">
-                <a:solidFill>
-                  <a:srgbClr val="FFFFFF"/>
-                </a:solidFill>
-                <a:latin typeface="MS Gothic"/>
-                <a:cs typeface="MS Gothic"/>
-              </a:rPr>
-              <a:t>大量のオブジェクトやパーティクルを描画して、</a:t>
-            </a:r>
-            <a:br>
-              <a:rPr lang="en-US" altLang="ja-JP" sz="2800" spc="-25" dirty="0">
-                <a:solidFill>
-                  <a:srgbClr val="FFFFFF"/>
-                </a:solidFill>
-                <a:latin typeface="MS Gothic"/>
-                <a:cs typeface="MS Gothic"/>
-              </a:rPr>
-            </a:br>
-            <a:r>
-              <a:rPr lang="en-US" altLang="ja-JP" sz="2800" b="1" dirty="0">
-                <a:solidFill>
-                  <a:schemeClr val="bg1"/>
-                </a:solidFill>
-              </a:rPr>
-              <a:t>Vampire Survivors </a:t>
-            </a:r>
-            <a:r>
-              <a:rPr lang="ja-JP" altLang="en-US" sz="2800" b="1" dirty="0">
-                <a:solidFill>
-                  <a:schemeClr val="bg1"/>
-                </a:solidFill>
-              </a:rPr>
-              <a:t>の３</a:t>
-            </a:r>
-            <a:r>
-              <a:rPr lang="en-US" altLang="ja-JP" sz="2800" b="1" dirty="0">
-                <a:solidFill>
-                  <a:schemeClr val="bg1"/>
-                </a:solidFill>
-              </a:rPr>
-              <a:t>D</a:t>
-            </a:r>
-            <a:r>
-              <a:rPr lang="ja-JP" altLang="en-US" sz="2800" b="1" dirty="0">
-                <a:solidFill>
-                  <a:schemeClr val="bg1"/>
-                </a:solidFill>
-              </a:rPr>
-              <a:t>版のような</a:t>
-            </a:r>
-            <a:endParaRPr lang="en-US" altLang="ja-JP" sz="2800" b="1" dirty="0">
-              <a:solidFill>
-                <a:schemeClr val="bg1"/>
-              </a:solidFill>
-            </a:endParaRPr>
-          </a:p>
-          <a:p>
-            <a:pPr marL="405765">
-              <a:spcBef>
-                <a:spcPts val="95"/>
-              </a:spcBef>
-              <a:tabLst>
-                <a:tab pos="2539365" algn="l"/>
-                <a:tab pos="6353175" algn="l"/>
-              </a:tabLst>
-            </a:pPr>
-            <a:r>
-              <a:rPr lang="ja-JP" altLang="en-US" sz="2800" b="1" dirty="0">
-                <a:solidFill>
-                  <a:schemeClr val="bg1"/>
-                </a:solidFill>
-                <a:latin typeface="MS Gothic"/>
-                <a:cs typeface="MS Gothic"/>
-              </a:rPr>
-              <a:t>無双ゲーム制作を目指しています。</a:t>
-            </a:r>
-            <a:endParaRPr lang="en-US" altLang="ja-JP" sz="2800" b="1" dirty="0">
-              <a:solidFill>
-                <a:schemeClr val="bg1"/>
-              </a:solidFill>
-              <a:latin typeface="MS Gothic"/>
-              <a:cs typeface="MS Gothic"/>
-            </a:endParaRPr>
-          </a:p>
-          <a:p>
-            <a:pPr marL="405765">
-              <a:spcBef>
-                <a:spcPts val="95"/>
-              </a:spcBef>
-              <a:tabLst>
-                <a:tab pos="2539365" algn="l"/>
-                <a:tab pos="6353175" algn="l"/>
-              </a:tabLst>
-            </a:pPr>
-            <a:endParaRPr sz="2700" dirty="0">
-              <a:solidFill>
-                <a:schemeClr val="bg1"/>
-              </a:solidFill>
-              <a:latin typeface="MS Gothic"/>
-              <a:cs typeface="MS Gothic"/>
-            </a:endParaRPr>
-          </a:p>
-          <a:p>
-            <a:pPr marL="12700">
-              <a:lnSpc>
-                <a:spcPct val="100000"/>
-              </a:lnSpc>
-            </a:pPr>
-            <a:r>
-              <a:rPr sz="4400" u="sng" spc="-15" dirty="0">
-                <a:solidFill>
-                  <a:srgbClr val="FFFFFF"/>
-                </a:solidFill>
-                <a:uFill>
-                  <a:solidFill>
-                    <a:srgbClr val="FFFFFF"/>
-                  </a:solidFill>
-                </a:uFill>
-                <a:latin typeface="MS Gothic"/>
-                <a:cs typeface="MS Gothic"/>
-              </a:rPr>
-              <a:t>開発環境</a:t>
-            </a:r>
-            <a:endParaRPr sz="4400" dirty="0">
-              <a:latin typeface="MS Gothic"/>
-              <a:cs typeface="MS Gothic"/>
-            </a:endParaRPr>
-          </a:p>
-          <a:p>
-            <a:pPr marL="405765">
-              <a:lnSpc>
-                <a:spcPct val="100000"/>
-              </a:lnSpc>
-              <a:spcBef>
-                <a:spcPts val="1095"/>
-              </a:spcBef>
-            </a:pPr>
-            <a:r>
-              <a:rPr sz="2800" spc="-30" dirty="0">
-                <a:solidFill>
-                  <a:srgbClr val="FFFFFF"/>
-                </a:solidFill>
-                <a:latin typeface="Arial MT"/>
-                <a:cs typeface="Arial MT"/>
-              </a:rPr>
-              <a:t>C++</a:t>
-            </a:r>
-            <a:r>
-              <a:rPr lang="en-US" sz="2800" spc="-30" dirty="0">
-                <a:solidFill>
-                  <a:srgbClr val="FFFFFF"/>
-                </a:solidFill>
-                <a:latin typeface="MS Gothic"/>
-                <a:cs typeface="Arial MT"/>
-              </a:rPr>
-              <a:t>20</a:t>
-            </a:r>
-            <a:r>
-              <a:rPr sz="2800" spc="-590" dirty="0">
-                <a:solidFill>
-                  <a:srgbClr val="FFFFFF"/>
-                </a:solidFill>
-                <a:latin typeface="MS Gothic"/>
-                <a:cs typeface="MS Gothic"/>
-              </a:rPr>
-              <a:t> </a:t>
-            </a:r>
-            <a:r>
-              <a:rPr sz="2800" dirty="0">
-                <a:solidFill>
-                  <a:srgbClr val="FFFFFF"/>
-                </a:solidFill>
-                <a:latin typeface="Arial MT"/>
-                <a:cs typeface="Arial MT"/>
-              </a:rPr>
-              <a:t>/</a:t>
-            </a:r>
-            <a:r>
-              <a:rPr sz="2800" spc="20" dirty="0">
-                <a:solidFill>
-                  <a:srgbClr val="FFFFFF"/>
-                </a:solidFill>
-                <a:latin typeface="Arial MT"/>
-                <a:cs typeface="Arial MT"/>
-              </a:rPr>
-              <a:t> </a:t>
-            </a:r>
-            <a:r>
-              <a:rPr sz="2800" spc="-10" dirty="0">
-                <a:solidFill>
-                  <a:srgbClr val="FFFFFF"/>
-                </a:solidFill>
-                <a:latin typeface="Arial MT"/>
-                <a:cs typeface="Arial MT"/>
-              </a:rPr>
-              <a:t>DirectX11</a:t>
-            </a:r>
-            <a:endParaRPr sz="2800" dirty="0">
-              <a:latin typeface="Arial MT"/>
-              <a:cs typeface="Arial MT"/>
-            </a:endParaRPr>
-          </a:p>
-          <a:p>
-            <a:pPr>
-              <a:lnSpc>
-                <a:spcPct val="100000"/>
-              </a:lnSpc>
-              <a:spcBef>
-                <a:spcPts val="1900"/>
-              </a:spcBef>
-            </a:pPr>
-            <a:endParaRPr sz="2800" dirty="0">
-              <a:latin typeface="Arial MT"/>
-              <a:cs typeface="Arial MT"/>
-            </a:endParaRPr>
-          </a:p>
-          <a:p>
-            <a:pPr marL="12700">
-              <a:lnSpc>
-                <a:spcPct val="100000"/>
-              </a:lnSpc>
-              <a:spcBef>
-                <a:spcPts val="5"/>
-              </a:spcBef>
-            </a:pPr>
-            <a:r>
-              <a:rPr sz="4400" u="sng" spc="-20" dirty="0" err="1">
-                <a:solidFill>
-                  <a:srgbClr val="FFFFFF"/>
-                </a:solidFill>
-                <a:uFill>
-                  <a:solidFill>
-                    <a:srgbClr val="FFFFFF"/>
-                  </a:solidFill>
-                </a:uFill>
-                <a:latin typeface="MS Gothic"/>
-                <a:cs typeface="MS Gothic"/>
-              </a:rPr>
-              <a:t>開発期間</a:t>
-            </a:r>
-            <a:endParaRPr lang="ja-JP" altLang="en-US" sz="4400" u="sng" spc="-20" dirty="0">
-              <a:solidFill>
-                <a:srgbClr val="FFFFFF"/>
-              </a:solidFill>
-              <a:uFill>
-                <a:solidFill>
-                  <a:srgbClr val="FFFFFF"/>
-                </a:solidFill>
-              </a:uFill>
-              <a:latin typeface="MS Gothic"/>
-              <a:cs typeface="MS Gothic"/>
-            </a:endParaRPr>
-          </a:p>
-          <a:p>
-            <a:pPr marL="405765">
-              <a:lnSpc>
-                <a:spcPct val="100000"/>
-              </a:lnSpc>
-              <a:spcBef>
-                <a:spcPts val="1245"/>
-              </a:spcBef>
-            </a:pPr>
-            <a:r>
-              <a:rPr lang="ja-JP" altLang="en-US" sz="2800" spc="-40" dirty="0">
-                <a:solidFill>
-                  <a:srgbClr val="FFFFFF"/>
-                </a:solidFill>
-                <a:latin typeface="MS Gothic"/>
-                <a:cs typeface="MS Gothic"/>
-              </a:rPr>
-              <a:t>約３～４カ月間くらい</a:t>
-            </a:r>
-            <a:endParaRPr lang="ja-JP" altLang="en-US" sz="2800" dirty="0">
-              <a:latin typeface="MS Gothic"/>
-              <a:cs typeface="MS Gothic"/>
-            </a:endParaRPr>
-          </a:p>
-        </p:txBody>
-      </p:sp>
-      <p:pic>
-        <p:nvPicPr>
-          <p:cNvPr id="2050" name="Picture 2" descr="配信開始】ゴシックホラーカジュアルゲーム『Vampire Survivors（ヴァンパイア・サバイバーズ）』がスマホアプリで登場 |  ファミ通App【スマホゲーム情報サイト】">
+            <a:r>
+              <a:rPr kumimoji="1" lang="ja-JP" altLang="en-US" sz="6000" dirty="0"/>
+              <a:t>目次</a:t>
+            </a:r>
+          </a:p>
+        </p:txBody>
+      </p:sp>
+      <p:sp>
+        <p:nvSpPr>
+          <p:cNvPr id="5" name="テキスト ボックス 4">
             <a:extLst>
               <a:ext uri="{FF2B5EF4-FFF2-40B4-BE49-F238E27FC236}">
-                <a16:creationId xmlns:a16="http://schemas.microsoft.com/office/drawing/2014/main" id="{3FD1B44D-A6BF-568A-E8B2-0D6FFC2AAB9D}"/>
+                <a16:creationId xmlns:a16="http://schemas.microsoft.com/office/drawing/2014/main" id="{4EE9F1BA-CC7D-3F20-F458-0F6492D5C4D6}"/>
               </a:ext>
             </a:extLst>
           </p:cNvPr>
-          <p:cNvPicPr>
-            <a:picLocks noChangeAspect="1" noChangeArrowheads="1"/>
-          </p:cNvPicPr>
+          <p:cNvSpPr txBox="1"/>
           <p:nvPr/>
-        </p:nvPicPr>
-        <p:blipFill>
-          <a:blip r:embed="rId2">
-            <a:extLst>
-              <a:ext uri="{28A0092B-C50C-407E-A947-70E740481C1C}">
-                <a14:useLocalDpi xmlns:a14="http://schemas.microsoft.com/office/drawing/2010/main" val="0"/>
-              </a:ext>
-            </a:extLst>
-          </a:blip>
-          <a:srcRect/>
-          <a:stretch>
-            <a:fillRect/>
-          </a:stretch>
-        </p:blipFill>
-        <p:spPr bwMode="auto">
-          <a:xfrm>
-            <a:off x="8077200" y="1828800"/>
-            <a:ext cx="3820796" cy="2152382"/>
+        </p:nvSpPr>
+        <p:spPr>
+          <a:xfrm>
+            <a:off x="381000" y="1981200"/>
+            <a:ext cx="2514600" cy="584775"/>
           </a:xfrm>
           <a:prstGeom prst="rect">
             <a:avLst/>
           </a:prstGeom>
           <a:noFill/>
-          <a:extLst>
-            <a:ext uri="{909E8E84-426E-40DD-AFC4-6F175D3DCCD1}">
-              <a14:hiddenFill xmlns:a14="http://schemas.microsoft.com/office/drawing/2010/main">
-                <a:solidFill>
-                  <a:srgbClr val="FFFFFF"/>
-                </a:solidFill>
-              </a14:hiddenFill>
-            </a:ext>
-          </a:extLst>
-        </p:spPr>
-      </p:pic>
+          <a:ln>
+            <a:noFill/>
+          </a:ln>
+        </p:spPr>
+        <p:txBody>
+          <a:bodyPr wrap="square" rtlCol="0">
+            <a:spAutoFit/>
+          </a:bodyPr>
+          <a:lstStyle/>
+          <a:p>
+            <a:r>
+              <a:rPr kumimoji="1" lang="ja-JP" altLang="en-US" sz="3200" b="1" dirty="0">
+                <a:solidFill>
+                  <a:schemeClr val="bg1"/>
+                </a:solidFill>
+              </a:rPr>
+              <a:t>① </a:t>
+            </a:r>
+            <a:r>
+              <a:rPr kumimoji="1" lang="ja-JP" altLang="en-US" sz="3200" b="1" u="sng" dirty="0">
+                <a:solidFill>
+                  <a:schemeClr val="bg1"/>
+                </a:solidFill>
+              </a:rPr>
+              <a:t>作品概要</a:t>
+            </a:r>
+          </a:p>
+        </p:txBody>
+      </p:sp>
+      <p:sp>
+        <p:nvSpPr>
+          <p:cNvPr id="6" name="テキスト ボックス 5">
+            <a:extLst>
+              <a:ext uri="{FF2B5EF4-FFF2-40B4-BE49-F238E27FC236}">
+                <a16:creationId xmlns:a16="http://schemas.microsoft.com/office/drawing/2014/main" id="{FE09693D-262C-394F-A8A7-640967748777}"/>
+              </a:ext>
+            </a:extLst>
+          </p:cNvPr>
+          <p:cNvSpPr txBox="1"/>
+          <p:nvPr/>
+        </p:nvSpPr>
+        <p:spPr>
+          <a:xfrm>
+            <a:off x="381000" y="2844225"/>
+            <a:ext cx="5410200" cy="584775"/>
+          </a:xfrm>
+          <a:prstGeom prst="rect">
+            <a:avLst/>
+          </a:prstGeom>
+          <a:noFill/>
+          <a:ln>
+            <a:noFill/>
+          </a:ln>
+        </p:spPr>
+        <p:txBody>
+          <a:bodyPr wrap="square" rtlCol="0">
+            <a:spAutoFit/>
+          </a:bodyPr>
+          <a:lstStyle/>
+          <a:p>
+            <a:r>
+              <a:rPr kumimoji="1" lang="ja-JP" altLang="en-US" sz="3200" b="1" dirty="0">
+                <a:solidFill>
+                  <a:schemeClr val="bg1"/>
+                </a:solidFill>
+              </a:rPr>
+              <a:t>② </a:t>
+            </a:r>
+            <a:r>
+              <a:rPr kumimoji="1" lang="ja-JP" altLang="en-US" sz="3200" b="1" u="sng" dirty="0">
+                <a:solidFill>
+                  <a:schemeClr val="bg1"/>
+                </a:solidFill>
+              </a:rPr>
+              <a:t>コンセプト実現に向けて</a:t>
+            </a:r>
+          </a:p>
+        </p:txBody>
+      </p:sp>
+      <p:sp>
+        <p:nvSpPr>
+          <p:cNvPr id="8" name="テキスト ボックス 7">
+            <a:extLst>
+              <a:ext uri="{FF2B5EF4-FFF2-40B4-BE49-F238E27FC236}">
+                <a16:creationId xmlns:a16="http://schemas.microsoft.com/office/drawing/2014/main" id="{C60C6055-A983-F43C-12BA-368BCF79D180}"/>
+              </a:ext>
+            </a:extLst>
+          </p:cNvPr>
+          <p:cNvSpPr txBox="1"/>
+          <p:nvPr/>
+        </p:nvSpPr>
+        <p:spPr>
+          <a:xfrm>
+            <a:off x="381000" y="3707250"/>
+            <a:ext cx="5410200" cy="584775"/>
+          </a:xfrm>
+          <a:prstGeom prst="rect">
+            <a:avLst/>
+          </a:prstGeom>
+          <a:noFill/>
+          <a:ln>
+            <a:noFill/>
+          </a:ln>
+        </p:spPr>
+        <p:txBody>
+          <a:bodyPr wrap="square" rtlCol="0">
+            <a:spAutoFit/>
+          </a:bodyPr>
+          <a:lstStyle/>
+          <a:p>
+            <a:r>
+              <a:rPr kumimoji="1" lang="ja-JP" altLang="en-US" sz="3200" b="1" dirty="0">
+                <a:solidFill>
+                  <a:schemeClr val="bg1"/>
+                </a:solidFill>
+              </a:rPr>
+              <a:t>③ </a:t>
+            </a:r>
+            <a:r>
+              <a:rPr kumimoji="1" lang="ja-JP" altLang="en-US" sz="3200" b="1" u="sng" dirty="0">
+                <a:solidFill>
+                  <a:schemeClr val="bg1"/>
+                </a:solidFill>
+              </a:rPr>
+              <a:t>今後</a:t>
+            </a:r>
+          </a:p>
+        </p:txBody>
+      </p:sp>
     </p:spTree>
+    <p:extLst>
+      <p:ext uri="{BB962C8B-B14F-4D97-AF65-F5344CB8AC3E}">
+        <p14:creationId xmlns:p14="http://schemas.microsoft.com/office/powerpoint/2010/main" val="651915208"/>
+      </p:ext>
+    </p:extLst>
   </p:cSld>
   <p:clrMapOvr>
     <a:masterClrMapping/>
@@ -1943,7 +1811,13 @@
   <p:cSld>
     <p:spTree>
       <p:nvGrpSpPr>
-        <p:cNvPr id="1" name=""/>
+        <p:cNvPr id="1" name="">
+          <a:extLst>
+            <a:ext uri="{FF2B5EF4-FFF2-40B4-BE49-F238E27FC236}">
+              <a16:creationId xmlns:a16="http://schemas.microsoft.com/office/drawing/2014/main" id="{5265D6B6-954C-4D82-7E7B-002BE8F8D031}"/>
+            </a:ext>
+          </a:extLst>
+        </p:cNvPr>
         <p:cNvGrpSpPr/>
         <p:nvPr/>
       </p:nvGrpSpPr>
@@ -1957,8 +1831,14 @@
       </p:grpSpPr>
       <p:sp>
         <p:nvSpPr>
-          <p:cNvPr id="2" name="object 2"/>
-          <p:cNvSpPr txBox="1">
+          <p:cNvPr id="2" name="タイトル 1">
+            <a:extLst>
+              <a:ext uri="{FF2B5EF4-FFF2-40B4-BE49-F238E27FC236}">
+                <a16:creationId xmlns:a16="http://schemas.microsoft.com/office/drawing/2014/main" id="{B3081D0E-FD59-D61C-C70D-E4F752D7470F}"/>
+              </a:ext>
+            </a:extLst>
+          </p:cNvPr>
+          <p:cNvSpPr>
             <a:spLocks noGrp="1"/>
           </p:cNvSpPr>
           <p:nvPr>
@@ -1967,66 +1847,138 @@
         </p:nvSpPr>
         <p:spPr>
           <a:xfrm>
-            <a:off x="1867535" y="2172970"/>
-            <a:ext cx="8457565" cy="1631950"/>
+            <a:off x="371168" y="390832"/>
+            <a:ext cx="7287259" cy="923330"/>
+          </a:xfrm>
+        </p:spPr>
+        <p:txBody>
+          <a:bodyPr/>
+          <a:lstStyle/>
+          <a:p>
+            <a:r>
+              <a:rPr kumimoji="1" lang="ja-JP" altLang="en-US" sz="6000" dirty="0"/>
+              <a:t>作品概要</a:t>
+            </a:r>
+          </a:p>
+        </p:txBody>
+      </p:sp>
+      <p:sp>
+        <p:nvSpPr>
+          <p:cNvPr id="5" name="テキスト ボックス 4">
+            <a:extLst>
+              <a:ext uri="{FF2B5EF4-FFF2-40B4-BE49-F238E27FC236}">
+                <a16:creationId xmlns:a16="http://schemas.microsoft.com/office/drawing/2014/main" id="{35E731EC-97BD-6702-40FB-F449B406C8C4}"/>
+              </a:ext>
+            </a:extLst>
+          </p:cNvPr>
+          <p:cNvSpPr txBox="1"/>
+          <p:nvPr/>
+        </p:nvSpPr>
+        <p:spPr>
+          <a:xfrm>
+            <a:off x="371168" y="1600200"/>
+            <a:ext cx="9230032" cy="584775"/>
           </a:xfrm>
           <a:prstGeom prst="rect">
             <a:avLst/>
           </a:prstGeom>
-          <a:ln w="38100">
+          <a:noFill/>
+          <a:ln w="19050">
             <a:solidFill>
-              <a:srgbClr val="FFFFFF"/>
+              <a:schemeClr val="bg1"/>
             </a:solidFill>
           </a:ln>
         </p:spPr>
         <p:txBody>
-          <a:bodyPr vert="horz" wrap="square" lIns="0" tIns="212090" rIns="0" bIns="0" rtlCol="0">
+          <a:bodyPr wrap="square" rtlCol="0">
             <a:spAutoFit/>
           </a:bodyPr>
           <a:lstStyle/>
           <a:p>
-            <a:pPr marL="1428115" marR="1141095" indent="-281305">
-              <a:lnSpc>
-                <a:spcPts val="4750"/>
-              </a:lnSpc>
-              <a:spcBef>
-                <a:spcPts val="1670"/>
-              </a:spcBef>
-            </a:pPr>
-            <a:r>
-              <a:rPr u="heavy" spc="-5" dirty="0">
-                <a:uFill>
-                  <a:solidFill>
-                    <a:srgbClr val="FFFFFF"/>
-                  </a:solidFill>
-                </a:uFill>
-              </a:rPr>
-              <a:t>制作したいと思っている</a:t>
-            </a:r>
-            <a:r>
-              <a:rPr u="heavy" spc="1100" dirty="0">
-                <a:uFill>
-                  <a:solidFill>
-                    <a:srgbClr val="FFFFFF"/>
-                  </a:solidFill>
-                </a:uFill>
-              </a:rPr>
-              <a:t>          </a:t>
-            </a:r>
-            <a:r>
-              <a:rPr u="heavy" spc="-5" dirty="0">
-                <a:uFill>
-                  <a:solidFill>
-                    <a:srgbClr val="FFFFFF"/>
-                  </a:solidFill>
-                </a:uFill>
-              </a:rPr>
-              <a:t>アクションゲーム紹介</a:t>
+            <a:pPr algn="l"/>
+            <a:r>
+              <a:rPr kumimoji="1" lang="ja-JP" altLang="en-US" sz="3200" dirty="0">
+                <a:solidFill>
+                  <a:schemeClr val="bg1"/>
+                </a:solidFill>
+              </a:rPr>
+              <a:t>コンセプト </a:t>
+            </a:r>
+            <a:r>
+              <a:rPr kumimoji="1" lang="en-US" altLang="ja-JP" sz="3200" dirty="0">
+                <a:solidFill>
+                  <a:schemeClr val="bg1"/>
+                </a:solidFill>
+              </a:rPr>
+              <a:t>: </a:t>
+            </a:r>
+            <a:r>
+              <a:rPr kumimoji="1" lang="ja-JP" altLang="en-US" sz="3200" dirty="0">
+                <a:solidFill>
+                  <a:schemeClr val="bg1"/>
+                </a:solidFill>
+              </a:rPr>
+              <a:t>クロスプラットフォーム</a:t>
+            </a:r>
+          </a:p>
+        </p:txBody>
+      </p:sp>
+      <p:sp>
+        <p:nvSpPr>
+          <p:cNvPr id="3" name="テキスト ボックス 2">
+            <a:extLst>
+              <a:ext uri="{FF2B5EF4-FFF2-40B4-BE49-F238E27FC236}">
+                <a16:creationId xmlns:a16="http://schemas.microsoft.com/office/drawing/2014/main" id="{72D9B942-9541-F528-6F28-F3CF955D7AB9}"/>
+              </a:ext>
+            </a:extLst>
+          </p:cNvPr>
+          <p:cNvSpPr txBox="1"/>
+          <p:nvPr/>
+        </p:nvSpPr>
+        <p:spPr>
+          <a:xfrm>
+            <a:off x="838200" y="2362200"/>
+            <a:ext cx="10210800" cy="830997"/>
+          </a:xfrm>
+          <a:prstGeom prst="rect">
+            <a:avLst/>
+          </a:prstGeom>
+          <a:noFill/>
+          <a:ln>
+            <a:noFill/>
+          </a:ln>
+        </p:spPr>
+        <p:txBody>
+          <a:bodyPr wrap="square" rtlCol="0">
+            <a:spAutoFit/>
+          </a:bodyPr>
+          <a:lstStyle/>
+          <a:p>
+            <a:r>
+              <a:rPr kumimoji="1" lang="en-US" altLang="ja-JP" sz="2400" dirty="0">
+                <a:solidFill>
+                  <a:schemeClr val="bg1"/>
+                </a:solidFill>
+              </a:rPr>
+              <a:t>PC(DirectX)</a:t>
+            </a:r>
+            <a:r>
+              <a:rPr kumimoji="1" lang="ja-JP" altLang="en-US" sz="2400" dirty="0">
+                <a:solidFill>
+                  <a:schemeClr val="bg1"/>
+                </a:solidFill>
+              </a:rPr>
+              <a:t>でゲーム開発を行い、ゲーム本編のプログラムを一切変更せずに他のプラットフォームに対応できるように</a:t>
             </a:r>
           </a:p>
         </p:txBody>
       </p:sp>
     </p:spTree>
+    <p:extLst>
+      <p:ext uri="{BB962C8B-B14F-4D97-AF65-F5344CB8AC3E}">
+        <p14:creationId xmlns:p14="http://schemas.microsoft.com/office/powerpoint/2010/main" val="3931342679"/>
+      </p:ext>
+    </p:extLst>
   </p:cSld>
   <p:clrMapOvr>
     <a:masterClrMapping/>
@@ -2039,7 +1991,13 @@
   <p:cSld>
     <p:spTree>
       <p:nvGrpSpPr>
-        <p:cNvPr id="1" name=""/>
+        <p:cNvPr id="1" name="">
+          <a:extLst>
+            <a:ext uri="{FF2B5EF4-FFF2-40B4-BE49-F238E27FC236}">
+              <a16:creationId xmlns:a16="http://schemas.microsoft.com/office/drawing/2014/main" id="{555A1B2D-7334-4B27-5A11-5C018C382F7B}"/>
+            </a:ext>
+          </a:extLst>
+        </p:cNvPr>
         <p:cNvGrpSpPr/>
         <p:nvPr/>
       </p:nvGrpSpPr>
@@ -2053,8 +2011,14 @@
       </p:grpSpPr>
       <p:sp>
         <p:nvSpPr>
-          <p:cNvPr id="2" name="object 2"/>
-          <p:cNvSpPr txBox="1">
+          <p:cNvPr id="2" name="タイトル 1">
+            <a:extLst>
+              <a:ext uri="{FF2B5EF4-FFF2-40B4-BE49-F238E27FC236}">
+                <a16:creationId xmlns:a16="http://schemas.microsoft.com/office/drawing/2014/main" id="{438A2789-DDC9-EA5E-D3D6-9256DF56098A}"/>
+              </a:ext>
+            </a:extLst>
+          </p:cNvPr>
+          <p:cNvSpPr>
             <a:spLocks noGrp="1"/>
           </p:cNvSpPr>
           <p:nvPr>
@@ -2063,239 +2027,27 @@
         </p:nvSpPr>
         <p:spPr>
           <a:xfrm>
-            <a:off x="346659" y="331977"/>
-            <a:ext cx="2819400" cy="696595"/>
-          </a:xfrm>
-          <a:prstGeom prst="rect">
-            <a:avLst/>
-          </a:prstGeom>
-        </p:spPr>
-        <p:txBody>
-          <a:bodyPr vert="horz" wrap="square" lIns="0" tIns="12700" rIns="0" bIns="0" rtlCol="0">
-            <a:spAutoFit/>
-          </a:bodyPr>
+            <a:off x="371168" y="390832"/>
+            <a:ext cx="7287259" cy="923330"/>
+          </a:xfrm>
+        </p:spPr>
+        <p:txBody>
+          <a:bodyPr/>
           <a:lstStyle/>
           <a:p>
-            <a:pPr marL="12700">
-              <a:lnSpc>
-                <a:spcPct val="100000"/>
-              </a:lnSpc>
-              <a:spcBef>
-                <a:spcPts val="100"/>
-              </a:spcBef>
-            </a:pPr>
-            <a:r>
-              <a:rPr spc="-20" dirty="0"/>
-              <a:t>ゲーム紹介</a:t>
-            </a:r>
-          </a:p>
-        </p:txBody>
-      </p:sp>
-      <p:sp>
-        <p:nvSpPr>
-          <p:cNvPr id="4" name="object 4"/>
-          <p:cNvSpPr txBox="1"/>
-          <p:nvPr/>
-        </p:nvSpPr>
-        <p:spPr>
-          <a:xfrm>
-            <a:off x="267931" y="1379474"/>
-            <a:ext cx="11796395" cy="885499"/>
-          </a:xfrm>
-          <a:prstGeom prst="rect">
-            <a:avLst/>
-          </a:prstGeom>
-          <a:ln w="9525">
-            <a:solidFill>
-              <a:srgbClr val="FFFFFF"/>
-            </a:solidFill>
-          </a:ln>
-        </p:spPr>
-        <p:txBody>
-          <a:bodyPr vert="horz" wrap="square" lIns="0" tIns="94615" rIns="0" bIns="0" rtlCol="0">
-            <a:spAutoFit/>
-          </a:bodyPr>
-          <a:lstStyle/>
-          <a:p>
-            <a:pPr marL="205104">
-              <a:lnSpc>
-                <a:spcPct val="100000"/>
-              </a:lnSpc>
-              <a:spcBef>
-                <a:spcPts val="745"/>
-              </a:spcBef>
-            </a:pPr>
-            <a:r>
-              <a:rPr lang="ja-JP" altLang="en-US" sz="2400" spc="-5" dirty="0">
-                <a:solidFill>
-                  <a:srgbClr val="FFFFFF"/>
-                </a:solidFill>
-                <a:latin typeface="MS Gothic"/>
-                <a:cs typeface="MS Gothic"/>
-              </a:rPr>
-              <a:t>この</a:t>
-            </a:r>
-            <a:r>
-              <a:rPr sz="2400" spc="-5" dirty="0" err="1">
-                <a:solidFill>
-                  <a:srgbClr val="FFFFFF"/>
-                </a:solidFill>
-                <a:latin typeface="MS Gothic"/>
-                <a:cs typeface="MS Gothic"/>
-              </a:rPr>
-              <a:t>ゲームで一番拘りたい点</a:t>
-            </a:r>
-            <a:endParaRPr sz="2400" dirty="0">
-              <a:latin typeface="MS Gothic"/>
-              <a:cs typeface="MS Gothic"/>
-            </a:endParaRPr>
-          </a:p>
-          <a:p>
-            <a:pPr marL="509905">
-              <a:lnSpc>
-                <a:spcPct val="100000"/>
-              </a:lnSpc>
-              <a:spcBef>
-                <a:spcPts val="420"/>
-              </a:spcBef>
-            </a:pPr>
-            <a:r>
-              <a:rPr lang="ja-JP" altLang="en-US" sz="2400" spc="-15" dirty="0">
-                <a:solidFill>
-                  <a:srgbClr val="FFFFFF"/>
-                </a:solidFill>
-                <a:uFill>
-                  <a:solidFill>
-                    <a:srgbClr val="FFFFFF"/>
-                  </a:solidFill>
-                </a:uFill>
-                <a:latin typeface="MS Gothic"/>
-                <a:cs typeface="MS Gothic"/>
-              </a:rPr>
-              <a:t>　　</a:t>
-            </a:r>
-            <a:r>
-              <a:rPr lang="ja-JP" altLang="en-US" sz="2400" u="sng" spc="-15" dirty="0">
-                <a:solidFill>
-                  <a:srgbClr val="FFFFFF"/>
-                </a:solidFill>
-                <a:uFill>
-                  <a:solidFill>
-                    <a:srgbClr val="FFFFFF"/>
-                  </a:solidFill>
-                </a:uFill>
-                <a:latin typeface="MS Gothic"/>
-                <a:cs typeface="MS Gothic"/>
-              </a:rPr>
-              <a:t>敵やパーティクルを大量に描画</a:t>
-            </a:r>
-            <a:endParaRPr sz="2400" dirty="0">
-              <a:latin typeface="MS Gothic"/>
-              <a:cs typeface="MS Gothic"/>
-            </a:endParaRPr>
-          </a:p>
-        </p:txBody>
-      </p:sp>
-      <p:pic>
-        <p:nvPicPr>
-          <p:cNvPr id="1026" name="Picture 2" descr="Vampire Survivors - Google Play のアプリ">
+            <a:r>
+              <a:rPr kumimoji="1" lang="ja-JP" altLang="en-US" sz="6000" dirty="0"/>
+              <a:t>作品概要</a:t>
+            </a:r>
+          </a:p>
+        </p:txBody>
+      </p:sp>
+      <p:sp>
+        <p:nvSpPr>
+          <p:cNvPr id="4" name="テキスト ボックス 3">
             <a:extLst>
               <a:ext uri="{FF2B5EF4-FFF2-40B4-BE49-F238E27FC236}">
-                <a16:creationId xmlns:a16="http://schemas.microsoft.com/office/drawing/2014/main" id="{6B819FD2-F057-211C-F5A8-9CDDAFCC79B8}"/>
-              </a:ext>
-            </a:extLst>
-          </p:cNvPr>
-          <p:cNvPicPr>
-            <a:picLocks noChangeAspect="1" noChangeArrowheads="1"/>
-          </p:cNvPicPr>
-          <p:nvPr/>
-        </p:nvPicPr>
-        <p:blipFill>
-          <a:blip r:embed="rId2">
-            <a:extLst>
-              <a:ext uri="{28A0092B-C50C-407E-A947-70E740481C1C}">
-                <a14:useLocalDpi xmlns:a14="http://schemas.microsoft.com/office/drawing/2010/main" val="0"/>
-              </a:ext>
-            </a:extLst>
-          </a:blip>
-          <a:srcRect/>
-          <a:stretch>
-            <a:fillRect/>
-          </a:stretch>
-        </p:blipFill>
-        <p:spPr bwMode="auto">
-          <a:xfrm>
-            <a:off x="533400" y="3787739"/>
-            <a:ext cx="4882243" cy="2743200"/>
-          </a:xfrm>
-          <a:prstGeom prst="rect">
-            <a:avLst/>
-          </a:prstGeom>
-          <a:noFill/>
-          <a:extLst>
-            <a:ext uri="{909E8E84-426E-40DD-AFC4-6F175D3DCCD1}">
-              <a14:hiddenFill xmlns:a14="http://schemas.microsoft.com/office/drawing/2010/main">
-                <a:solidFill>
-                  <a:srgbClr val="FFFFFF"/>
-                </a:solidFill>
-              </a14:hiddenFill>
-            </a:ext>
-          </a:extLst>
-        </p:spPr>
-      </p:pic>
-      <p:pic>
-        <p:nvPicPr>
-          <p:cNvPr id="1028" name="Picture 4" descr="ONE PIECE 海賊無双4 | バンダイナムコエンターテインメント公式サイト">
-            <a:extLst>
-              <a:ext uri="{FF2B5EF4-FFF2-40B4-BE49-F238E27FC236}">
-                <a16:creationId xmlns:a16="http://schemas.microsoft.com/office/drawing/2014/main" id="{09338CBB-AF07-ACCA-8C7E-A77020BC0B8F}"/>
-              </a:ext>
-            </a:extLst>
-          </p:cNvPr>
-          <p:cNvPicPr>
-            <a:picLocks noChangeAspect="1" noChangeArrowheads="1"/>
-          </p:cNvPicPr>
-          <p:nvPr/>
-        </p:nvPicPr>
-        <p:blipFill>
-          <a:blip r:embed="rId3">
-            <a:extLst>
-              <a:ext uri="{28A0092B-C50C-407E-A947-70E740481C1C}">
-                <a14:useLocalDpi xmlns:a14="http://schemas.microsoft.com/office/drawing/2010/main" val="0"/>
-              </a:ext>
-            </a:extLst>
-          </a:blip>
-          <a:srcRect/>
-          <a:stretch>
-            <a:fillRect/>
-          </a:stretch>
-        </p:blipFill>
-        <p:spPr bwMode="auto">
-          <a:xfrm>
-            <a:off x="5638800" y="3956704"/>
-            <a:ext cx="4572000" cy="2574235"/>
-          </a:xfrm>
-          <a:prstGeom prst="rect">
-            <a:avLst/>
-          </a:prstGeom>
-          <a:noFill/>
-          <a:extLst>
-            <a:ext uri="{909E8E84-426E-40DD-AFC4-6F175D3DCCD1}">
-              <a14:hiddenFill xmlns:a14="http://schemas.microsoft.com/office/drawing/2010/main">
-                <a:solidFill>
-                  <a:srgbClr val="FFFFFF"/>
-                </a:solidFill>
-              </a14:hiddenFill>
-            </a:ext>
-          </a:extLst>
-        </p:spPr>
-      </p:pic>
-      <p:sp>
-        <p:nvSpPr>
-          <p:cNvPr id="9" name="object 4">
-            <a:extLst>
-              <a:ext uri="{FF2B5EF4-FFF2-40B4-BE49-F238E27FC236}">
-                <a16:creationId xmlns:a16="http://schemas.microsoft.com/office/drawing/2014/main" id="{36EB1FFB-DF02-E06D-1CF0-394EEDFB26AD}"/>
+                <a16:creationId xmlns:a16="http://schemas.microsoft.com/office/drawing/2014/main" id="{0ED591FF-3C66-76C9-7DB1-C9FD342DC09F}"/>
               </a:ext>
             </a:extLst>
           </p:cNvPr>
@@ -2304,50 +2056,1470 @@
         </p:nvSpPr>
         <p:spPr>
           <a:xfrm>
-            <a:off x="267931" y="3140931"/>
-            <a:ext cx="11796395" cy="464871"/>
+            <a:off x="371168" y="5715000"/>
+            <a:ext cx="4810432" cy="584775"/>
           </a:xfrm>
           <a:prstGeom prst="rect">
             <a:avLst/>
           </a:prstGeom>
-          <a:ln w="9525">
+          <a:noFill/>
+          <a:ln w="19050">
             <a:solidFill>
-              <a:srgbClr val="FFFFFF"/>
+              <a:schemeClr val="bg1"/>
             </a:solidFill>
           </a:ln>
         </p:spPr>
         <p:txBody>
-          <a:bodyPr vert="horz" wrap="square" lIns="0" tIns="94615" rIns="0" bIns="0" rtlCol="0" anchor="ctr">
+          <a:bodyPr wrap="square" rtlCol="0">
             <a:spAutoFit/>
           </a:bodyPr>
           <a:lstStyle/>
           <a:p>
-            <a:pPr marL="205104" algn="l">
-              <a:lnSpc>
-                <a:spcPct val="100000"/>
-              </a:lnSpc>
-              <a:spcBef>
-                <a:spcPts val="745"/>
-              </a:spcBef>
-            </a:pPr>
-            <a:r>
-              <a:rPr lang="ja-JP" altLang="en-US" sz="2400" spc="-5" dirty="0">
-                <a:solidFill>
-                  <a:srgbClr val="FFFFFF"/>
-                </a:solidFill>
-                <a:latin typeface="MS Gothic"/>
-                <a:cs typeface="MS Gothic"/>
-              </a:rPr>
-              <a:t>目指しているゲーム</a:t>
-            </a:r>
-            <a:endParaRPr sz="2400" dirty="0">
-              <a:latin typeface="MS Gothic"/>
-              <a:cs typeface="MS Gothic"/>
+            <a:pPr algn="l"/>
+            <a:r>
+              <a:rPr kumimoji="1" lang="ja-JP" altLang="en-US" sz="3200" dirty="0">
+                <a:solidFill>
+                  <a:schemeClr val="bg1"/>
+                </a:solidFill>
+              </a:rPr>
+              <a:t>制作期間 </a:t>
+            </a:r>
+            <a:r>
+              <a:rPr kumimoji="1" lang="en-US" altLang="ja-JP" sz="3200" dirty="0">
+                <a:solidFill>
+                  <a:schemeClr val="bg1"/>
+                </a:solidFill>
+              </a:rPr>
+              <a:t>:</a:t>
+            </a:r>
+            <a:r>
+              <a:rPr kumimoji="1" lang="ja-JP" altLang="en-US" sz="3200" dirty="0">
+                <a:solidFill>
+                  <a:schemeClr val="bg1"/>
+                </a:solidFill>
+              </a:rPr>
+              <a:t>約３～４か月</a:t>
+            </a:r>
+          </a:p>
+        </p:txBody>
+      </p:sp>
+      <p:sp>
+        <p:nvSpPr>
+          <p:cNvPr id="7" name="テキスト ボックス 6">
+            <a:extLst>
+              <a:ext uri="{FF2B5EF4-FFF2-40B4-BE49-F238E27FC236}">
+                <a16:creationId xmlns:a16="http://schemas.microsoft.com/office/drawing/2014/main" id="{4C3ED28E-B2D5-C64C-E143-47076CA1F52A}"/>
+              </a:ext>
+            </a:extLst>
+          </p:cNvPr>
+          <p:cNvSpPr txBox="1"/>
+          <p:nvPr/>
+        </p:nvSpPr>
+        <p:spPr>
+          <a:xfrm>
+            <a:off x="371168" y="1587824"/>
+            <a:ext cx="1838632" cy="584775"/>
+          </a:xfrm>
+          <a:prstGeom prst="rect">
+            <a:avLst/>
+          </a:prstGeom>
+          <a:noFill/>
+          <a:ln w="19050">
+            <a:solidFill>
+              <a:schemeClr val="bg1"/>
+            </a:solidFill>
+          </a:ln>
+        </p:spPr>
+        <p:txBody>
+          <a:bodyPr wrap="square" rtlCol="0">
+            <a:spAutoFit/>
+          </a:bodyPr>
+          <a:lstStyle/>
+          <a:p>
+            <a:pPr algn="l"/>
+            <a:r>
+              <a:rPr kumimoji="1" lang="ja-JP" altLang="en-US" sz="3200" dirty="0">
+                <a:solidFill>
+                  <a:schemeClr val="bg1"/>
+                </a:solidFill>
+              </a:rPr>
+              <a:t>開発環境 </a:t>
+            </a:r>
+          </a:p>
+        </p:txBody>
+      </p:sp>
+      <p:sp>
+        <p:nvSpPr>
+          <p:cNvPr id="8" name="テキスト ボックス 7">
+            <a:extLst>
+              <a:ext uri="{FF2B5EF4-FFF2-40B4-BE49-F238E27FC236}">
+                <a16:creationId xmlns:a16="http://schemas.microsoft.com/office/drawing/2014/main" id="{485EB103-E022-71F1-C4DA-50FA9BB056C9}"/>
+              </a:ext>
+            </a:extLst>
+          </p:cNvPr>
+          <p:cNvSpPr txBox="1"/>
+          <p:nvPr/>
+        </p:nvSpPr>
+        <p:spPr>
+          <a:xfrm>
+            <a:off x="371168" y="3429000"/>
+            <a:ext cx="4810432" cy="584775"/>
+          </a:xfrm>
+          <a:prstGeom prst="rect">
+            <a:avLst/>
+          </a:prstGeom>
+          <a:noFill/>
+          <a:ln w="19050">
+            <a:solidFill>
+              <a:schemeClr val="bg1"/>
+            </a:solidFill>
+          </a:ln>
+        </p:spPr>
+        <p:txBody>
+          <a:bodyPr wrap="square" rtlCol="0">
+            <a:spAutoFit/>
+          </a:bodyPr>
+          <a:lstStyle/>
+          <a:p>
+            <a:pPr algn="l"/>
+            <a:r>
+              <a:rPr kumimoji="1" lang="ja-JP" altLang="en-US" sz="3200" dirty="0">
+                <a:solidFill>
+                  <a:schemeClr val="bg1"/>
+                </a:solidFill>
+              </a:rPr>
+              <a:t>使用したライブラリー</a:t>
+            </a:r>
+          </a:p>
+        </p:txBody>
+      </p:sp>
+      <p:sp>
+        <p:nvSpPr>
+          <p:cNvPr id="9" name="テキスト ボックス 8">
+            <a:extLst>
+              <a:ext uri="{FF2B5EF4-FFF2-40B4-BE49-F238E27FC236}">
+                <a16:creationId xmlns:a16="http://schemas.microsoft.com/office/drawing/2014/main" id="{2B0496B6-09CE-C597-6AE6-9E4529129B98}"/>
+              </a:ext>
+            </a:extLst>
+          </p:cNvPr>
+          <p:cNvSpPr txBox="1"/>
+          <p:nvPr/>
+        </p:nvSpPr>
+        <p:spPr>
+          <a:xfrm>
+            <a:off x="371168" y="2239108"/>
+            <a:ext cx="2067232" cy="830997"/>
+          </a:xfrm>
+          <a:prstGeom prst="rect">
+            <a:avLst/>
+          </a:prstGeom>
+          <a:noFill/>
+          <a:ln>
+            <a:noFill/>
+          </a:ln>
+        </p:spPr>
+        <p:txBody>
+          <a:bodyPr wrap="square" rtlCol="0">
+            <a:spAutoFit/>
+          </a:bodyPr>
+          <a:lstStyle/>
+          <a:p>
+            <a:r>
+              <a:rPr kumimoji="1" lang="ja-JP" altLang="en-US" sz="2400" dirty="0">
+                <a:solidFill>
+                  <a:schemeClr val="bg1"/>
+                </a:solidFill>
+              </a:rPr>
+              <a:t>・ </a:t>
+            </a:r>
+            <a:r>
+              <a:rPr kumimoji="1" lang="en-US" altLang="ja-JP" sz="2400" dirty="0">
+                <a:solidFill>
+                  <a:schemeClr val="bg1"/>
+                </a:solidFill>
+              </a:rPr>
+              <a:t>C++20</a:t>
+            </a:r>
+            <a:br>
+              <a:rPr kumimoji="1" lang="en-US" altLang="ja-JP" sz="2400" dirty="0">
+                <a:solidFill>
+                  <a:schemeClr val="bg1"/>
+                </a:solidFill>
+              </a:rPr>
+            </a:br>
+            <a:r>
+              <a:rPr kumimoji="1" lang="ja-JP" altLang="en-US" sz="2400" dirty="0">
+                <a:solidFill>
+                  <a:schemeClr val="bg1"/>
+                </a:solidFill>
+              </a:rPr>
+              <a:t>・ </a:t>
+            </a:r>
+            <a:r>
+              <a:rPr kumimoji="1" lang="en-US" altLang="ja-JP" sz="2400" dirty="0">
+                <a:solidFill>
+                  <a:schemeClr val="bg1"/>
+                </a:solidFill>
+              </a:rPr>
+              <a:t>DirectX11</a:t>
+            </a:r>
+            <a:endParaRPr kumimoji="1" lang="ja-JP" altLang="en-US" sz="2400" dirty="0">
+              <a:solidFill>
+                <a:schemeClr val="bg1"/>
+              </a:solidFill>
             </a:endParaRPr>
           </a:p>
         </p:txBody>
       </p:sp>
+      <p:sp>
+        <p:nvSpPr>
+          <p:cNvPr id="10" name="テキスト ボックス 9">
+            <a:extLst>
+              <a:ext uri="{FF2B5EF4-FFF2-40B4-BE49-F238E27FC236}">
+                <a16:creationId xmlns:a16="http://schemas.microsoft.com/office/drawing/2014/main" id="{E29686F3-4DCA-0446-F882-162AAF7222AC}"/>
+              </a:ext>
+            </a:extLst>
+          </p:cNvPr>
+          <p:cNvSpPr txBox="1"/>
+          <p:nvPr/>
+        </p:nvSpPr>
+        <p:spPr>
+          <a:xfrm>
+            <a:off x="371168" y="4114800"/>
+            <a:ext cx="2905432" cy="1200329"/>
+          </a:xfrm>
+          <a:prstGeom prst="rect">
+            <a:avLst/>
+          </a:prstGeom>
+          <a:noFill/>
+          <a:ln>
+            <a:noFill/>
+          </a:ln>
+        </p:spPr>
+        <p:txBody>
+          <a:bodyPr wrap="square" rtlCol="0">
+            <a:spAutoFit/>
+          </a:bodyPr>
+          <a:lstStyle/>
+          <a:p>
+            <a:r>
+              <a:rPr kumimoji="1" lang="ja-JP" altLang="en-US" sz="2400" dirty="0">
+                <a:solidFill>
+                  <a:schemeClr val="bg1"/>
+                </a:solidFill>
+              </a:rPr>
+              <a:t>・ </a:t>
+            </a:r>
+            <a:r>
+              <a:rPr kumimoji="1" lang="en-US" altLang="ja-JP" sz="2400" dirty="0" err="1">
+                <a:solidFill>
+                  <a:schemeClr val="bg1"/>
+                </a:solidFill>
+              </a:rPr>
+              <a:t>assimp</a:t>
+            </a:r>
+            <a:br>
+              <a:rPr kumimoji="1" lang="en-US" altLang="ja-JP" sz="2400" dirty="0">
+                <a:solidFill>
+                  <a:schemeClr val="bg1"/>
+                </a:solidFill>
+              </a:rPr>
+            </a:br>
+            <a:r>
+              <a:rPr kumimoji="1" lang="ja-JP" altLang="en-US" sz="2400" dirty="0">
+                <a:solidFill>
+                  <a:schemeClr val="bg1"/>
+                </a:solidFill>
+              </a:rPr>
+              <a:t>・ </a:t>
+            </a:r>
+            <a:r>
+              <a:rPr kumimoji="1" lang="en-US" altLang="ja-JP" sz="2400" dirty="0">
+                <a:solidFill>
+                  <a:schemeClr val="bg1"/>
+                </a:solidFill>
+              </a:rPr>
+              <a:t>DirectX Tex</a:t>
+            </a:r>
+          </a:p>
+          <a:p>
+            <a:r>
+              <a:rPr kumimoji="1" lang="ja-JP" altLang="en-US" sz="2400" dirty="0">
+                <a:solidFill>
+                  <a:schemeClr val="bg1"/>
+                </a:solidFill>
+              </a:rPr>
+              <a:t>・ </a:t>
+            </a:r>
+            <a:r>
+              <a:rPr kumimoji="1" lang="en-US" altLang="ja-JP" sz="2400" dirty="0" err="1">
+                <a:solidFill>
+                  <a:schemeClr val="bg1"/>
+                </a:solidFill>
+              </a:rPr>
+              <a:t>imgui</a:t>
+            </a:r>
+            <a:endParaRPr kumimoji="1" lang="ja-JP" altLang="en-US" sz="2400" dirty="0">
+              <a:solidFill>
+                <a:schemeClr val="bg1"/>
+              </a:solidFill>
+            </a:endParaRPr>
+          </a:p>
+        </p:txBody>
+      </p:sp>
     </p:spTree>
+    <p:extLst>
+      <p:ext uri="{BB962C8B-B14F-4D97-AF65-F5344CB8AC3E}">
+        <p14:creationId xmlns:p14="http://schemas.microsoft.com/office/powerpoint/2010/main" val="1339401001"/>
+      </p:ext>
+    </p:extLst>
+  </p:cSld>
+  <p:clrMapOvr>
+    <a:masterClrMapping/>
+  </p:clrMapOvr>
+</p:sld>
+</file>
+
+<file path=ppt/slides/slide5.xml><?xml version="1.0" encoding="utf-8"?>
+<p:sld xmlns:a="http://schemas.openxmlformats.org/drawingml/2006/main" xmlns:r="http://schemas.openxmlformats.org/officeDocument/2006/relationships" xmlns:p="http://schemas.openxmlformats.org/presentationml/2006/main">
+  <p:cSld>
+    <p:spTree>
+      <p:nvGrpSpPr>
+        <p:cNvPr id="1" name="">
+          <a:extLst>
+            <a:ext uri="{FF2B5EF4-FFF2-40B4-BE49-F238E27FC236}">
+              <a16:creationId xmlns:a16="http://schemas.microsoft.com/office/drawing/2014/main" id="{F4D2B8D1-7A44-1661-C741-A02FE6EF0877}"/>
+            </a:ext>
+          </a:extLst>
+        </p:cNvPr>
+        <p:cNvGrpSpPr/>
+        <p:nvPr/>
+      </p:nvGrpSpPr>
+      <p:grpSpPr>
+        <a:xfrm>
+          <a:off x="0" y="0"/>
+          <a:ext cx="0" cy="0"/>
+          <a:chOff x="0" y="0"/>
+          <a:chExt cx="0" cy="0"/>
+        </a:xfrm>
+      </p:grpSpPr>
+      <p:sp>
+        <p:nvSpPr>
+          <p:cNvPr id="2" name="タイトル 1">
+            <a:extLst>
+              <a:ext uri="{FF2B5EF4-FFF2-40B4-BE49-F238E27FC236}">
+                <a16:creationId xmlns:a16="http://schemas.microsoft.com/office/drawing/2014/main" id="{F7C518BC-F958-1B35-CCDD-CC2D785309FC}"/>
+              </a:ext>
+            </a:extLst>
+          </p:cNvPr>
+          <p:cNvSpPr>
+            <a:spLocks noGrp="1"/>
+          </p:cNvSpPr>
+          <p:nvPr>
+            <p:ph type="title"/>
+          </p:nvPr>
+        </p:nvSpPr>
+        <p:spPr>
+          <a:xfrm>
+            <a:off x="371168" y="390832"/>
+            <a:ext cx="7287259" cy="923330"/>
+          </a:xfrm>
+        </p:spPr>
+        <p:txBody>
+          <a:bodyPr/>
+          <a:lstStyle/>
+          <a:p>
+            <a:r>
+              <a:rPr kumimoji="1" lang="ja-JP" altLang="en-US" sz="6000" dirty="0"/>
+              <a:t>作品概要</a:t>
+            </a:r>
+          </a:p>
+        </p:txBody>
+      </p:sp>
+      <p:sp>
+        <p:nvSpPr>
+          <p:cNvPr id="4" name="テキスト ボックス 3">
+            <a:extLst>
+              <a:ext uri="{FF2B5EF4-FFF2-40B4-BE49-F238E27FC236}">
+                <a16:creationId xmlns:a16="http://schemas.microsoft.com/office/drawing/2014/main" id="{189EE7F1-9B2D-DFC2-B0AC-DB15DBEDC2CA}"/>
+              </a:ext>
+            </a:extLst>
+          </p:cNvPr>
+          <p:cNvSpPr txBox="1"/>
+          <p:nvPr/>
+        </p:nvSpPr>
+        <p:spPr>
+          <a:xfrm>
+            <a:off x="376084" y="5746988"/>
+            <a:ext cx="1838632" cy="584775"/>
+          </a:xfrm>
+          <a:prstGeom prst="rect">
+            <a:avLst/>
+          </a:prstGeom>
+          <a:noFill/>
+          <a:ln w="19050">
+            <a:solidFill>
+              <a:schemeClr val="bg1"/>
+            </a:solidFill>
+          </a:ln>
+        </p:spPr>
+        <p:txBody>
+          <a:bodyPr wrap="square" rtlCol="0">
+            <a:spAutoFit/>
+          </a:bodyPr>
+          <a:lstStyle/>
+          <a:p>
+            <a:pPr algn="l"/>
+            <a:r>
+              <a:rPr kumimoji="1" lang="ja-JP" altLang="en-US" sz="3200" dirty="0">
+                <a:solidFill>
+                  <a:schemeClr val="bg1"/>
+                </a:solidFill>
+              </a:rPr>
+              <a:t>制作期間</a:t>
+            </a:r>
+          </a:p>
+        </p:txBody>
+      </p:sp>
+      <p:sp>
+        <p:nvSpPr>
+          <p:cNvPr id="7" name="テキスト ボックス 6">
+            <a:extLst>
+              <a:ext uri="{FF2B5EF4-FFF2-40B4-BE49-F238E27FC236}">
+                <a16:creationId xmlns:a16="http://schemas.microsoft.com/office/drawing/2014/main" id="{04D52795-696D-6E1A-99BF-81E3D33BD6B9}"/>
+              </a:ext>
+            </a:extLst>
+          </p:cNvPr>
+          <p:cNvSpPr txBox="1"/>
+          <p:nvPr/>
+        </p:nvSpPr>
+        <p:spPr>
+          <a:xfrm>
+            <a:off x="371168" y="1670912"/>
+            <a:ext cx="1838632" cy="584775"/>
+          </a:xfrm>
+          <a:prstGeom prst="rect">
+            <a:avLst/>
+          </a:prstGeom>
+          <a:noFill/>
+          <a:ln w="19050">
+            <a:solidFill>
+              <a:schemeClr val="bg1"/>
+            </a:solidFill>
+          </a:ln>
+        </p:spPr>
+        <p:txBody>
+          <a:bodyPr wrap="square" rtlCol="0">
+            <a:spAutoFit/>
+          </a:bodyPr>
+          <a:lstStyle/>
+          <a:p>
+            <a:pPr algn="l"/>
+            <a:r>
+              <a:rPr kumimoji="1" lang="ja-JP" altLang="en-US" sz="3200" dirty="0">
+                <a:solidFill>
+                  <a:schemeClr val="bg1"/>
+                </a:solidFill>
+              </a:rPr>
+              <a:t>開発環境 </a:t>
+            </a:r>
+          </a:p>
+        </p:txBody>
+      </p:sp>
+      <p:sp>
+        <p:nvSpPr>
+          <p:cNvPr id="8" name="テキスト ボックス 7">
+            <a:extLst>
+              <a:ext uri="{FF2B5EF4-FFF2-40B4-BE49-F238E27FC236}">
+                <a16:creationId xmlns:a16="http://schemas.microsoft.com/office/drawing/2014/main" id="{B8A21C07-7042-B19C-7E48-4EBE8BF15940}"/>
+              </a:ext>
+            </a:extLst>
+          </p:cNvPr>
+          <p:cNvSpPr txBox="1"/>
+          <p:nvPr/>
+        </p:nvSpPr>
+        <p:spPr>
+          <a:xfrm>
+            <a:off x="371168" y="3485072"/>
+            <a:ext cx="4810432" cy="584775"/>
+          </a:xfrm>
+          <a:prstGeom prst="rect">
+            <a:avLst/>
+          </a:prstGeom>
+          <a:noFill/>
+          <a:ln w="19050">
+            <a:solidFill>
+              <a:schemeClr val="bg1"/>
+            </a:solidFill>
+          </a:ln>
+        </p:spPr>
+        <p:txBody>
+          <a:bodyPr wrap="square" rtlCol="0">
+            <a:spAutoFit/>
+          </a:bodyPr>
+          <a:lstStyle/>
+          <a:p>
+            <a:pPr algn="l"/>
+            <a:r>
+              <a:rPr kumimoji="1" lang="ja-JP" altLang="en-US" sz="3200" dirty="0">
+                <a:solidFill>
+                  <a:schemeClr val="bg1"/>
+                </a:solidFill>
+              </a:rPr>
+              <a:t>使用したライブラリー</a:t>
+            </a:r>
+          </a:p>
+        </p:txBody>
+      </p:sp>
+      <p:sp>
+        <p:nvSpPr>
+          <p:cNvPr id="9" name="テキスト ボックス 8">
+            <a:extLst>
+              <a:ext uri="{FF2B5EF4-FFF2-40B4-BE49-F238E27FC236}">
+                <a16:creationId xmlns:a16="http://schemas.microsoft.com/office/drawing/2014/main" id="{3ACF0306-DB2D-1AAF-5B7E-A3B634C448CD}"/>
+              </a:ext>
+            </a:extLst>
+          </p:cNvPr>
+          <p:cNvSpPr txBox="1"/>
+          <p:nvPr/>
+        </p:nvSpPr>
+        <p:spPr>
+          <a:xfrm>
+            <a:off x="371168" y="2317000"/>
+            <a:ext cx="2067232" cy="830997"/>
+          </a:xfrm>
+          <a:prstGeom prst="rect">
+            <a:avLst/>
+          </a:prstGeom>
+          <a:noFill/>
+          <a:ln>
+            <a:noFill/>
+          </a:ln>
+        </p:spPr>
+        <p:txBody>
+          <a:bodyPr wrap="square" rtlCol="0">
+            <a:spAutoFit/>
+          </a:bodyPr>
+          <a:lstStyle/>
+          <a:p>
+            <a:r>
+              <a:rPr kumimoji="1" lang="ja-JP" altLang="en-US" sz="2400" dirty="0">
+                <a:solidFill>
+                  <a:schemeClr val="bg1"/>
+                </a:solidFill>
+              </a:rPr>
+              <a:t>・ </a:t>
+            </a:r>
+            <a:r>
+              <a:rPr kumimoji="1" lang="en-US" altLang="ja-JP" sz="2400" dirty="0">
+                <a:solidFill>
+                  <a:schemeClr val="bg1"/>
+                </a:solidFill>
+              </a:rPr>
+              <a:t>C++20</a:t>
+            </a:r>
+            <a:br>
+              <a:rPr kumimoji="1" lang="en-US" altLang="ja-JP" sz="2400" dirty="0">
+                <a:solidFill>
+                  <a:schemeClr val="bg1"/>
+                </a:solidFill>
+              </a:rPr>
+            </a:br>
+            <a:r>
+              <a:rPr kumimoji="1" lang="ja-JP" altLang="en-US" sz="2400" dirty="0">
+                <a:solidFill>
+                  <a:schemeClr val="bg1"/>
+                </a:solidFill>
+              </a:rPr>
+              <a:t>・ </a:t>
+            </a:r>
+            <a:r>
+              <a:rPr kumimoji="1" lang="en-US" altLang="ja-JP" sz="2400" dirty="0">
+                <a:solidFill>
+                  <a:schemeClr val="bg1"/>
+                </a:solidFill>
+              </a:rPr>
+              <a:t>DirectX11</a:t>
+            </a:r>
+            <a:endParaRPr kumimoji="1" lang="ja-JP" altLang="en-US" sz="2400" dirty="0">
+              <a:solidFill>
+                <a:schemeClr val="bg1"/>
+              </a:solidFill>
+            </a:endParaRPr>
+          </a:p>
+        </p:txBody>
+      </p:sp>
+      <p:sp>
+        <p:nvSpPr>
+          <p:cNvPr id="10" name="テキスト ボックス 9">
+            <a:extLst>
+              <a:ext uri="{FF2B5EF4-FFF2-40B4-BE49-F238E27FC236}">
+                <a16:creationId xmlns:a16="http://schemas.microsoft.com/office/drawing/2014/main" id="{70C16102-087D-3E60-F93F-F272B10EBB0C}"/>
+              </a:ext>
+            </a:extLst>
+          </p:cNvPr>
+          <p:cNvSpPr txBox="1"/>
+          <p:nvPr/>
+        </p:nvSpPr>
+        <p:spPr>
+          <a:xfrm>
+            <a:off x="371168" y="4118578"/>
+            <a:ext cx="2905432" cy="1200329"/>
+          </a:xfrm>
+          <a:prstGeom prst="rect">
+            <a:avLst/>
+          </a:prstGeom>
+          <a:noFill/>
+          <a:ln>
+            <a:noFill/>
+          </a:ln>
+        </p:spPr>
+        <p:txBody>
+          <a:bodyPr wrap="square" rtlCol="0">
+            <a:spAutoFit/>
+          </a:bodyPr>
+          <a:lstStyle/>
+          <a:p>
+            <a:r>
+              <a:rPr kumimoji="1" lang="ja-JP" altLang="en-US" sz="2400" dirty="0">
+                <a:solidFill>
+                  <a:schemeClr val="bg1"/>
+                </a:solidFill>
+              </a:rPr>
+              <a:t>・ </a:t>
+            </a:r>
+            <a:r>
+              <a:rPr kumimoji="1" lang="en-US" altLang="ja-JP" sz="2400" dirty="0" err="1">
+                <a:solidFill>
+                  <a:schemeClr val="bg1"/>
+                </a:solidFill>
+              </a:rPr>
+              <a:t>assimp</a:t>
+            </a:r>
+            <a:br>
+              <a:rPr kumimoji="1" lang="en-US" altLang="ja-JP" sz="2400" dirty="0">
+                <a:solidFill>
+                  <a:schemeClr val="bg1"/>
+                </a:solidFill>
+              </a:rPr>
+            </a:br>
+            <a:r>
+              <a:rPr kumimoji="1" lang="ja-JP" altLang="en-US" sz="2400" dirty="0">
+                <a:solidFill>
+                  <a:schemeClr val="bg1"/>
+                </a:solidFill>
+              </a:rPr>
+              <a:t>・ </a:t>
+            </a:r>
+            <a:r>
+              <a:rPr kumimoji="1" lang="en-US" altLang="ja-JP" sz="2400" dirty="0">
+                <a:solidFill>
+                  <a:schemeClr val="bg1"/>
+                </a:solidFill>
+              </a:rPr>
+              <a:t>DirectX Tex</a:t>
+            </a:r>
+          </a:p>
+          <a:p>
+            <a:r>
+              <a:rPr kumimoji="1" lang="ja-JP" altLang="en-US" sz="2400" dirty="0">
+                <a:solidFill>
+                  <a:schemeClr val="bg1"/>
+                </a:solidFill>
+              </a:rPr>
+              <a:t>・ </a:t>
+            </a:r>
+            <a:r>
+              <a:rPr kumimoji="1" lang="en-US" altLang="ja-JP" sz="2400" dirty="0" err="1">
+                <a:solidFill>
+                  <a:schemeClr val="bg1"/>
+                </a:solidFill>
+              </a:rPr>
+              <a:t>imgui</a:t>
+            </a:r>
+            <a:endParaRPr kumimoji="1" lang="ja-JP" altLang="en-US" sz="2400" dirty="0">
+              <a:solidFill>
+                <a:schemeClr val="bg1"/>
+              </a:solidFill>
+            </a:endParaRPr>
+          </a:p>
+        </p:txBody>
+      </p:sp>
+      <p:sp>
+        <p:nvSpPr>
+          <p:cNvPr id="3" name="テキスト ボックス 2">
+            <a:extLst>
+              <a:ext uri="{FF2B5EF4-FFF2-40B4-BE49-F238E27FC236}">
+                <a16:creationId xmlns:a16="http://schemas.microsoft.com/office/drawing/2014/main" id="{CC53D2EB-AE10-803F-5B20-6760BC2CA432}"/>
+              </a:ext>
+            </a:extLst>
+          </p:cNvPr>
+          <p:cNvSpPr txBox="1"/>
+          <p:nvPr/>
+        </p:nvSpPr>
+        <p:spPr>
+          <a:xfrm>
+            <a:off x="2566997" y="5870098"/>
+            <a:ext cx="2081203" cy="461665"/>
+          </a:xfrm>
+          <a:prstGeom prst="rect">
+            <a:avLst/>
+          </a:prstGeom>
+          <a:noFill/>
+          <a:ln>
+            <a:noFill/>
+          </a:ln>
+        </p:spPr>
+        <p:txBody>
+          <a:bodyPr wrap="square" rtlCol="0">
+            <a:spAutoFit/>
+          </a:bodyPr>
+          <a:lstStyle/>
+          <a:p>
+            <a:r>
+              <a:rPr kumimoji="1" lang="ja-JP" altLang="ja-JP" sz="2400" u="sng" dirty="0">
+                <a:solidFill>
+                  <a:schemeClr val="bg1"/>
+                </a:solidFill>
+              </a:rPr>
+              <a:t>約３～４か月</a:t>
+            </a:r>
+            <a:endParaRPr kumimoji="1" lang="ja-JP" altLang="en-US" sz="2400" u="sng" dirty="0">
+              <a:solidFill>
+                <a:schemeClr val="bg1"/>
+              </a:solidFill>
+            </a:endParaRPr>
+          </a:p>
+        </p:txBody>
+      </p:sp>
+    </p:spTree>
+    <p:extLst>
+      <p:ext uri="{BB962C8B-B14F-4D97-AF65-F5344CB8AC3E}">
+        <p14:creationId xmlns:p14="http://schemas.microsoft.com/office/powerpoint/2010/main" val="84031127"/>
+      </p:ext>
+    </p:extLst>
+  </p:cSld>
+  <p:clrMapOvr>
+    <a:masterClrMapping/>
+  </p:clrMapOvr>
+</p:sld>
+</file>
+
+<file path=ppt/slides/slide6.xml><?xml version="1.0" encoding="utf-8"?>
+<p:sld xmlns:a="http://schemas.openxmlformats.org/drawingml/2006/main" xmlns:r="http://schemas.openxmlformats.org/officeDocument/2006/relationships" xmlns:p="http://schemas.openxmlformats.org/presentationml/2006/main">
+  <p:cSld>
+    <p:spTree>
+      <p:nvGrpSpPr>
+        <p:cNvPr id="1" name="">
+          <a:extLst>
+            <a:ext uri="{FF2B5EF4-FFF2-40B4-BE49-F238E27FC236}">
+              <a16:creationId xmlns:a16="http://schemas.microsoft.com/office/drawing/2014/main" id="{39AD54F2-5412-F8A6-C31D-E1DAF632D890}"/>
+            </a:ext>
+          </a:extLst>
+        </p:cNvPr>
+        <p:cNvGrpSpPr/>
+        <p:nvPr/>
+      </p:nvGrpSpPr>
+      <p:grpSpPr>
+        <a:xfrm>
+          <a:off x="0" y="0"/>
+          <a:ext cx="0" cy="0"/>
+          <a:chOff x="0" y="0"/>
+          <a:chExt cx="0" cy="0"/>
+        </a:xfrm>
+      </p:grpSpPr>
+      <p:sp>
+        <p:nvSpPr>
+          <p:cNvPr id="2" name="タイトル 1">
+            <a:extLst>
+              <a:ext uri="{FF2B5EF4-FFF2-40B4-BE49-F238E27FC236}">
+                <a16:creationId xmlns:a16="http://schemas.microsoft.com/office/drawing/2014/main" id="{2D25D28A-7AC9-B615-0884-AA4D0120BEC6}"/>
+              </a:ext>
+            </a:extLst>
+          </p:cNvPr>
+          <p:cNvSpPr>
+            <a:spLocks noGrp="1"/>
+          </p:cNvSpPr>
+          <p:nvPr>
+            <p:ph type="title"/>
+          </p:nvPr>
+        </p:nvSpPr>
+        <p:spPr>
+          <a:xfrm>
+            <a:off x="371168" y="390833"/>
+            <a:ext cx="7706032" cy="923330"/>
+          </a:xfrm>
+        </p:spPr>
+        <p:txBody>
+          <a:bodyPr/>
+          <a:lstStyle/>
+          <a:p>
+            <a:r>
+              <a:rPr kumimoji="1" lang="ja-JP" altLang="en-US" sz="6000" dirty="0"/>
+              <a:t>コンセプト実現に向けて</a:t>
+            </a:r>
+          </a:p>
+        </p:txBody>
+      </p:sp>
+      <p:sp>
+        <p:nvSpPr>
+          <p:cNvPr id="7" name="テキスト ボックス 6">
+            <a:extLst>
+              <a:ext uri="{FF2B5EF4-FFF2-40B4-BE49-F238E27FC236}">
+                <a16:creationId xmlns:a16="http://schemas.microsoft.com/office/drawing/2014/main" id="{E8803B9C-B76A-6051-F6AD-89F91A570D24}"/>
+              </a:ext>
+            </a:extLst>
+          </p:cNvPr>
+          <p:cNvSpPr txBox="1"/>
+          <p:nvPr/>
+        </p:nvSpPr>
+        <p:spPr>
+          <a:xfrm>
+            <a:off x="371168" y="1670339"/>
+            <a:ext cx="2676832" cy="584775"/>
+          </a:xfrm>
+          <a:prstGeom prst="rect">
+            <a:avLst/>
+          </a:prstGeom>
+          <a:noFill/>
+          <a:ln w="19050">
+            <a:solidFill>
+              <a:schemeClr val="bg1"/>
+            </a:solidFill>
+          </a:ln>
+        </p:spPr>
+        <p:txBody>
+          <a:bodyPr wrap="square" rtlCol="0">
+            <a:spAutoFit/>
+          </a:bodyPr>
+          <a:lstStyle/>
+          <a:p>
+            <a:pPr algn="l"/>
+            <a:r>
+              <a:rPr kumimoji="1" lang="ja-JP" altLang="en-US" sz="3200" dirty="0">
+                <a:solidFill>
+                  <a:schemeClr val="bg1"/>
+                </a:solidFill>
+              </a:rPr>
+              <a:t>基本データ型</a:t>
+            </a:r>
+          </a:p>
+        </p:txBody>
+      </p:sp>
+      <p:sp>
+        <p:nvSpPr>
+          <p:cNvPr id="9" name="テキスト ボックス 8">
+            <a:extLst>
+              <a:ext uri="{FF2B5EF4-FFF2-40B4-BE49-F238E27FC236}">
+                <a16:creationId xmlns:a16="http://schemas.microsoft.com/office/drawing/2014/main" id="{11A88100-0725-4EDC-2BE3-779C7D19AAC8}"/>
+              </a:ext>
+            </a:extLst>
+          </p:cNvPr>
+          <p:cNvSpPr txBox="1"/>
+          <p:nvPr/>
+        </p:nvSpPr>
+        <p:spPr>
+          <a:xfrm>
+            <a:off x="371168" y="2255114"/>
+            <a:ext cx="10754032" cy="1200329"/>
+          </a:xfrm>
+          <a:prstGeom prst="rect">
+            <a:avLst/>
+          </a:prstGeom>
+          <a:noFill/>
+          <a:ln>
+            <a:noFill/>
+          </a:ln>
+        </p:spPr>
+        <p:txBody>
+          <a:bodyPr wrap="square" rtlCol="0">
+            <a:spAutoFit/>
+          </a:bodyPr>
+          <a:lstStyle/>
+          <a:p>
+            <a:r>
+              <a:rPr kumimoji="1" lang="ja-JP" altLang="en-US" sz="2400" dirty="0">
+                <a:solidFill>
+                  <a:schemeClr val="bg1"/>
+                </a:solidFill>
+              </a:rPr>
+              <a:t>各</a:t>
+            </a:r>
+            <a:r>
+              <a:rPr kumimoji="1" lang="en-US" altLang="ja-JP" sz="2400" dirty="0">
+                <a:solidFill>
+                  <a:schemeClr val="bg1"/>
+                </a:solidFill>
+              </a:rPr>
+              <a:t>API</a:t>
+            </a:r>
+            <a:r>
+              <a:rPr kumimoji="1" lang="ja-JP" altLang="en-US" sz="2400" dirty="0">
+                <a:solidFill>
+                  <a:schemeClr val="bg1"/>
+                </a:solidFill>
+              </a:rPr>
+              <a:t>、</a:t>
+            </a:r>
+            <a:r>
+              <a:rPr kumimoji="1" lang="en-US" altLang="ja-JP" sz="2400" dirty="0">
+                <a:solidFill>
+                  <a:schemeClr val="bg1"/>
+                </a:solidFill>
+              </a:rPr>
+              <a:t>OS</a:t>
+            </a:r>
+            <a:r>
+              <a:rPr kumimoji="1" lang="ja-JP" altLang="en-US" sz="2400" dirty="0">
+                <a:solidFill>
+                  <a:schemeClr val="bg1"/>
+                </a:solidFill>
+              </a:rPr>
+              <a:t>ごとの差異を吸収するために自作数学・文字列ライブラリを作成</a:t>
+            </a:r>
+            <a:endParaRPr kumimoji="1" lang="en-US" altLang="ja-JP" sz="2400" dirty="0">
+              <a:solidFill>
+                <a:schemeClr val="bg1"/>
+              </a:solidFill>
+            </a:endParaRPr>
+          </a:p>
+          <a:p>
+            <a:r>
+              <a:rPr kumimoji="1" lang="ja-JP" altLang="en-US" sz="2400" dirty="0">
+                <a:solidFill>
+                  <a:schemeClr val="bg1"/>
+                </a:solidFill>
+              </a:rPr>
+              <a:t>数学ライブラリは計算処理のみ、プラットフォームに最適なものを使用</a:t>
+            </a:r>
+            <a:endParaRPr kumimoji="1" lang="en-US" altLang="ja-JP" sz="2400" dirty="0">
+              <a:solidFill>
+                <a:schemeClr val="bg1"/>
+              </a:solidFill>
+            </a:endParaRPr>
+          </a:p>
+          <a:p>
+            <a:r>
+              <a:rPr kumimoji="1" lang="ja-JP" altLang="en-US" sz="2400" dirty="0">
+                <a:solidFill>
+                  <a:schemeClr val="bg1"/>
+                </a:solidFill>
+              </a:rPr>
+              <a:t>文字列ライブラリはエンコードを</a:t>
+            </a:r>
+            <a:r>
+              <a:rPr kumimoji="1" lang="en-US" altLang="ja-JP" sz="2400" dirty="0">
+                <a:solidFill>
+                  <a:schemeClr val="bg1"/>
+                </a:solidFill>
+              </a:rPr>
+              <a:t>UTF-8</a:t>
+            </a:r>
+            <a:r>
+              <a:rPr kumimoji="1" lang="ja-JP" altLang="en-US" sz="2400" dirty="0">
+                <a:solidFill>
+                  <a:schemeClr val="bg1"/>
+                </a:solidFill>
+              </a:rPr>
+              <a:t>に統一して、差異を吸収しています。</a:t>
+            </a:r>
+            <a:endParaRPr kumimoji="1" lang="en-US" altLang="ja-JP" sz="2400" dirty="0">
+              <a:solidFill>
+                <a:schemeClr val="bg1"/>
+              </a:solidFill>
+            </a:endParaRPr>
+          </a:p>
+        </p:txBody>
+      </p:sp>
+    </p:spTree>
+    <p:extLst>
+      <p:ext uri="{BB962C8B-B14F-4D97-AF65-F5344CB8AC3E}">
+        <p14:creationId xmlns:p14="http://schemas.microsoft.com/office/powerpoint/2010/main" val="1809922075"/>
+      </p:ext>
+    </p:extLst>
+  </p:cSld>
+  <p:clrMapOvr>
+    <a:masterClrMapping/>
+  </p:clrMapOvr>
+</p:sld>
+</file>
+
+<file path=ppt/slides/slide7.xml><?xml version="1.0" encoding="utf-8"?>
+<p:sld xmlns:a="http://schemas.openxmlformats.org/drawingml/2006/main" xmlns:r="http://schemas.openxmlformats.org/officeDocument/2006/relationships" xmlns:p="http://schemas.openxmlformats.org/presentationml/2006/main">
+  <p:cSld>
+    <p:spTree>
+      <p:nvGrpSpPr>
+        <p:cNvPr id="1" name="">
+          <a:extLst>
+            <a:ext uri="{FF2B5EF4-FFF2-40B4-BE49-F238E27FC236}">
+              <a16:creationId xmlns:a16="http://schemas.microsoft.com/office/drawing/2014/main" id="{D272469C-9544-3EE0-2E53-A6F33783F7EE}"/>
+            </a:ext>
+          </a:extLst>
+        </p:cNvPr>
+        <p:cNvGrpSpPr/>
+        <p:nvPr/>
+      </p:nvGrpSpPr>
+      <p:grpSpPr>
+        <a:xfrm>
+          <a:off x="0" y="0"/>
+          <a:ext cx="0" cy="0"/>
+          <a:chOff x="0" y="0"/>
+          <a:chExt cx="0" cy="0"/>
+        </a:xfrm>
+      </p:grpSpPr>
+      <p:sp>
+        <p:nvSpPr>
+          <p:cNvPr id="2" name="タイトル 1">
+            <a:extLst>
+              <a:ext uri="{FF2B5EF4-FFF2-40B4-BE49-F238E27FC236}">
+                <a16:creationId xmlns:a16="http://schemas.microsoft.com/office/drawing/2014/main" id="{10C8A78A-FF1F-9D2E-2968-2EF9DD7DA8B2}"/>
+              </a:ext>
+            </a:extLst>
+          </p:cNvPr>
+          <p:cNvSpPr>
+            <a:spLocks noGrp="1"/>
+          </p:cNvSpPr>
+          <p:nvPr>
+            <p:ph type="title"/>
+          </p:nvPr>
+        </p:nvSpPr>
+        <p:spPr>
+          <a:xfrm>
+            <a:off x="371168" y="390833"/>
+            <a:ext cx="7706032" cy="923330"/>
+          </a:xfrm>
+        </p:spPr>
+        <p:txBody>
+          <a:bodyPr/>
+          <a:lstStyle/>
+          <a:p>
+            <a:r>
+              <a:rPr kumimoji="1" lang="ja-JP" altLang="en-US" sz="6000" dirty="0"/>
+              <a:t>コンセプト実現に向けて</a:t>
+            </a:r>
+          </a:p>
+        </p:txBody>
+      </p:sp>
+      <p:sp>
+        <p:nvSpPr>
+          <p:cNvPr id="7" name="テキスト ボックス 6">
+            <a:extLst>
+              <a:ext uri="{FF2B5EF4-FFF2-40B4-BE49-F238E27FC236}">
+                <a16:creationId xmlns:a16="http://schemas.microsoft.com/office/drawing/2014/main" id="{1AE956C6-E1AE-1739-4416-F70FE41DE4BB}"/>
+              </a:ext>
+            </a:extLst>
+          </p:cNvPr>
+          <p:cNvSpPr txBox="1"/>
+          <p:nvPr/>
+        </p:nvSpPr>
+        <p:spPr>
+          <a:xfrm>
+            <a:off x="371168" y="1670339"/>
+            <a:ext cx="5191432" cy="584775"/>
+          </a:xfrm>
+          <a:prstGeom prst="rect">
+            <a:avLst/>
+          </a:prstGeom>
+          <a:noFill/>
+          <a:ln w="19050">
+            <a:solidFill>
+              <a:schemeClr val="bg1"/>
+            </a:solidFill>
+          </a:ln>
+        </p:spPr>
+        <p:txBody>
+          <a:bodyPr wrap="square" rtlCol="0">
+            <a:spAutoFit/>
+          </a:bodyPr>
+          <a:lstStyle/>
+          <a:p>
+            <a:pPr algn="l"/>
+            <a:r>
+              <a:rPr kumimoji="1" lang="ja-JP" altLang="en-US" sz="3200" dirty="0">
+                <a:solidFill>
+                  <a:schemeClr val="bg1"/>
+                </a:solidFill>
+              </a:rPr>
+              <a:t>リソース管理マネージャー</a:t>
+            </a:r>
+          </a:p>
+        </p:txBody>
+      </p:sp>
+      <p:sp>
+        <p:nvSpPr>
+          <p:cNvPr id="9" name="テキスト ボックス 8">
+            <a:extLst>
+              <a:ext uri="{FF2B5EF4-FFF2-40B4-BE49-F238E27FC236}">
+                <a16:creationId xmlns:a16="http://schemas.microsoft.com/office/drawing/2014/main" id="{F320E06A-4618-5650-EE18-BFD8D7B7EDE2}"/>
+              </a:ext>
+            </a:extLst>
+          </p:cNvPr>
+          <p:cNvSpPr txBox="1"/>
+          <p:nvPr/>
+        </p:nvSpPr>
+        <p:spPr>
+          <a:xfrm>
+            <a:off x="371168" y="2255114"/>
+            <a:ext cx="10754032" cy="461665"/>
+          </a:xfrm>
+          <a:prstGeom prst="rect">
+            <a:avLst/>
+          </a:prstGeom>
+          <a:noFill/>
+          <a:ln>
+            <a:noFill/>
+          </a:ln>
+        </p:spPr>
+        <p:txBody>
+          <a:bodyPr wrap="square" rtlCol="0">
+            <a:spAutoFit/>
+          </a:bodyPr>
+          <a:lstStyle/>
+          <a:p>
+            <a:r>
+              <a:rPr kumimoji="1" lang="ja-JP" altLang="en-US" sz="2400" dirty="0">
+                <a:solidFill>
+                  <a:schemeClr val="bg1"/>
+                </a:solidFill>
+              </a:rPr>
+              <a:t>リソース管理を名前で</a:t>
+            </a:r>
+            <a:endParaRPr kumimoji="1" lang="en-US" altLang="ja-JP" sz="2400" dirty="0">
+              <a:solidFill>
+                <a:schemeClr val="bg1"/>
+              </a:solidFill>
+            </a:endParaRPr>
+          </a:p>
+        </p:txBody>
+      </p:sp>
+    </p:spTree>
+    <p:extLst>
+      <p:ext uri="{BB962C8B-B14F-4D97-AF65-F5344CB8AC3E}">
+        <p14:creationId xmlns:p14="http://schemas.microsoft.com/office/powerpoint/2010/main" val="534583892"/>
+      </p:ext>
+    </p:extLst>
+  </p:cSld>
+  <p:clrMapOvr>
+    <a:masterClrMapping/>
+  </p:clrMapOvr>
+</p:sld>
+</file>
+
+<file path=ppt/slides/slide8.xml><?xml version="1.0" encoding="utf-8"?>
+<p:sld xmlns:a="http://schemas.openxmlformats.org/drawingml/2006/main" xmlns:r="http://schemas.openxmlformats.org/officeDocument/2006/relationships" xmlns:p="http://schemas.openxmlformats.org/presentationml/2006/main">
+  <p:cSld>
+    <p:spTree>
+      <p:nvGrpSpPr>
+        <p:cNvPr id="1" name="">
+          <a:extLst>
+            <a:ext uri="{FF2B5EF4-FFF2-40B4-BE49-F238E27FC236}">
+              <a16:creationId xmlns:a16="http://schemas.microsoft.com/office/drawing/2014/main" id="{E7213354-E36F-E724-C48D-5EED188468BC}"/>
+            </a:ext>
+          </a:extLst>
+        </p:cNvPr>
+        <p:cNvGrpSpPr/>
+        <p:nvPr/>
+      </p:nvGrpSpPr>
+      <p:grpSpPr>
+        <a:xfrm>
+          <a:off x="0" y="0"/>
+          <a:ext cx="0" cy="0"/>
+          <a:chOff x="0" y="0"/>
+          <a:chExt cx="0" cy="0"/>
+        </a:xfrm>
+      </p:grpSpPr>
+      <p:sp>
+        <p:nvSpPr>
+          <p:cNvPr id="2" name="タイトル 1">
+            <a:extLst>
+              <a:ext uri="{FF2B5EF4-FFF2-40B4-BE49-F238E27FC236}">
+                <a16:creationId xmlns:a16="http://schemas.microsoft.com/office/drawing/2014/main" id="{60D19693-CCAD-0B27-1639-5BAAF0CFB45E}"/>
+              </a:ext>
+            </a:extLst>
+          </p:cNvPr>
+          <p:cNvSpPr>
+            <a:spLocks noGrp="1"/>
+          </p:cNvSpPr>
+          <p:nvPr>
+            <p:ph type="title"/>
+          </p:nvPr>
+        </p:nvSpPr>
+        <p:spPr>
+          <a:xfrm>
+            <a:off x="371168" y="390833"/>
+            <a:ext cx="7706032" cy="923330"/>
+          </a:xfrm>
+        </p:spPr>
+        <p:txBody>
+          <a:bodyPr/>
+          <a:lstStyle/>
+          <a:p>
+            <a:r>
+              <a:rPr kumimoji="1" lang="ja-JP" altLang="en-US" sz="6000" dirty="0"/>
+              <a:t>コンセプト実現に向けて</a:t>
+            </a:r>
+          </a:p>
+        </p:txBody>
+      </p:sp>
+      <p:sp>
+        <p:nvSpPr>
+          <p:cNvPr id="7" name="テキスト ボックス 6">
+            <a:extLst>
+              <a:ext uri="{FF2B5EF4-FFF2-40B4-BE49-F238E27FC236}">
+                <a16:creationId xmlns:a16="http://schemas.microsoft.com/office/drawing/2014/main" id="{7C5D7B65-5692-58A3-B036-8AEFD280E6EB}"/>
+              </a:ext>
+            </a:extLst>
+          </p:cNvPr>
+          <p:cNvSpPr txBox="1"/>
+          <p:nvPr/>
+        </p:nvSpPr>
+        <p:spPr>
+          <a:xfrm>
+            <a:off x="371168" y="1670339"/>
+            <a:ext cx="5191432" cy="584775"/>
+          </a:xfrm>
+          <a:prstGeom prst="rect">
+            <a:avLst/>
+          </a:prstGeom>
+          <a:noFill/>
+          <a:ln w="19050">
+            <a:solidFill>
+              <a:schemeClr val="bg1"/>
+            </a:solidFill>
+          </a:ln>
+        </p:spPr>
+        <p:txBody>
+          <a:bodyPr wrap="square" rtlCol="0">
+            <a:spAutoFit/>
+          </a:bodyPr>
+          <a:lstStyle/>
+          <a:p>
+            <a:pPr algn="l"/>
+            <a:r>
+              <a:rPr kumimoji="1" lang="ja-JP" altLang="en-US" sz="3200" dirty="0">
+                <a:solidFill>
+                  <a:schemeClr val="bg1"/>
+                </a:solidFill>
+              </a:rPr>
+              <a:t>リソース管理マネージャー</a:t>
+            </a:r>
+          </a:p>
+        </p:txBody>
+      </p:sp>
+      <p:sp>
+        <p:nvSpPr>
+          <p:cNvPr id="9" name="テキスト ボックス 8">
+            <a:extLst>
+              <a:ext uri="{FF2B5EF4-FFF2-40B4-BE49-F238E27FC236}">
+                <a16:creationId xmlns:a16="http://schemas.microsoft.com/office/drawing/2014/main" id="{6A6FD40F-B08A-A2B1-99A9-BA626410D035}"/>
+              </a:ext>
+            </a:extLst>
+          </p:cNvPr>
+          <p:cNvSpPr txBox="1"/>
+          <p:nvPr/>
+        </p:nvSpPr>
+        <p:spPr>
+          <a:xfrm>
+            <a:off x="371168" y="2255114"/>
+            <a:ext cx="10754032" cy="461665"/>
+          </a:xfrm>
+          <a:prstGeom prst="rect">
+            <a:avLst/>
+          </a:prstGeom>
+          <a:noFill/>
+          <a:ln>
+            <a:noFill/>
+          </a:ln>
+        </p:spPr>
+        <p:txBody>
+          <a:bodyPr wrap="square" rtlCol="0">
+            <a:spAutoFit/>
+          </a:bodyPr>
+          <a:lstStyle/>
+          <a:p>
+            <a:r>
+              <a:rPr kumimoji="1" lang="ja-JP" altLang="en-US" sz="2400" dirty="0">
+                <a:solidFill>
+                  <a:schemeClr val="bg1"/>
+                </a:solidFill>
+              </a:rPr>
+              <a:t>リソース管理</a:t>
+            </a:r>
+            <a:endParaRPr kumimoji="1" lang="en-US" altLang="ja-JP" sz="2400" dirty="0">
+              <a:solidFill>
+                <a:schemeClr val="bg1"/>
+              </a:solidFill>
+            </a:endParaRPr>
+          </a:p>
+        </p:txBody>
+      </p:sp>
+    </p:spTree>
+    <p:extLst>
+      <p:ext uri="{BB962C8B-B14F-4D97-AF65-F5344CB8AC3E}">
+        <p14:creationId xmlns:p14="http://schemas.microsoft.com/office/powerpoint/2010/main" val="2155919554"/>
+      </p:ext>
+    </p:extLst>
+  </p:cSld>
+  <p:clrMapOvr>
+    <a:masterClrMapping/>
+  </p:clrMapOvr>
+</p:sld>
+</file>
+
+<file path=ppt/slides/slide9.xml><?xml version="1.0" encoding="utf-8"?>
+<p:sld xmlns:a="http://schemas.openxmlformats.org/drawingml/2006/main" xmlns:r="http://schemas.openxmlformats.org/officeDocument/2006/relationships" xmlns:p="http://schemas.openxmlformats.org/presentationml/2006/main">
+  <p:cSld>
+    <p:spTree>
+      <p:nvGrpSpPr>
+        <p:cNvPr id="1" name="">
+          <a:extLst>
+            <a:ext uri="{FF2B5EF4-FFF2-40B4-BE49-F238E27FC236}">
+              <a16:creationId xmlns:a16="http://schemas.microsoft.com/office/drawing/2014/main" id="{BC9329DF-10D4-BFA7-2DC7-28F641D539BC}"/>
+            </a:ext>
+          </a:extLst>
+        </p:cNvPr>
+        <p:cNvGrpSpPr/>
+        <p:nvPr/>
+      </p:nvGrpSpPr>
+      <p:grpSpPr>
+        <a:xfrm>
+          <a:off x="0" y="0"/>
+          <a:ext cx="0" cy="0"/>
+          <a:chOff x="0" y="0"/>
+          <a:chExt cx="0" cy="0"/>
+        </a:xfrm>
+      </p:grpSpPr>
+      <p:sp>
+        <p:nvSpPr>
+          <p:cNvPr id="2" name="タイトル 1">
+            <a:extLst>
+              <a:ext uri="{FF2B5EF4-FFF2-40B4-BE49-F238E27FC236}">
+                <a16:creationId xmlns:a16="http://schemas.microsoft.com/office/drawing/2014/main" id="{F43445E2-CC42-ECD3-FCF6-7EDD5DC95597}"/>
+              </a:ext>
+            </a:extLst>
+          </p:cNvPr>
+          <p:cNvSpPr>
+            <a:spLocks noGrp="1"/>
+          </p:cNvSpPr>
+          <p:nvPr>
+            <p:ph type="title"/>
+          </p:nvPr>
+        </p:nvSpPr>
+        <p:spPr>
+          <a:xfrm>
+            <a:off x="371168" y="390833"/>
+            <a:ext cx="7706032" cy="923330"/>
+          </a:xfrm>
+        </p:spPr>
+        <p:txBody>
+          <a:bodyPr/>
+          <a:lstStyle/>
+          <a:p>
+            <a:r>
+              <a:rPr kumimoji="1" lang="ja-JP" altLang="en-US" sz="6000" dirty="0"/>
+              <a:t>コンセプト実現に向けて</a:t>
+            </a:r>
+          </a:p>
+        </p:txBody>
+      </p:sp>
+      <p:sp>
+        <p:nvSpPr>
+          <p:cNvPr id="7" name="テキスト ボックス 6">
+            <a:extLst>
+              <a:ext uri="{FF2B5EF4-FFF2-40B4-BE49-F238E27FC236}">
+                <a16:creationId xmlns:a16="http://schemas.microsoft.com/office/drawing/2014/main" id="{8D34D5E0-6B66-028D-0DCD-1D888E2DD470}"/>
+              </a:ext>
+            </a:extLst>
+          </p:cNvPr>
+          <p:cNvSpPr txBox="1"/>
+          <p:nvPr/>
+        </p:nvSpPr>
+        <p:spPr>
+          <a:xfrm>
+            <a:off x="371168" y="1670339"/>
+            <a:ext cx="5191432" cy="584775"/>
+          </a:xfrm>
+          <a:prstGeom prst="rect">
+            <a:avLst/>
+          </a:prstGeom>
+          <a:noFill/>
+          <a:ln w="19050">
+            <a:solidFill>
+              <a:schemeClr val="bg1"/>
+            </a:solidFill>
+          </a:ln>
+        </p:spPr>
+        <p:txBody>
+          <a:bodyPr wrap="square" rtlCol="0">
+            <a:spAutoFit/>
+          </a:bodyPr>
+          <a:lstStyle/>
+          <a:p>
+            <a:pPr algn="l"/>
+            <a:r>
+              <a:rPr kumimoji="1" lang="ja-JP" altLang="en-US" sz="3200" dirty="0">
+                <a:solidFill>
+                  <a:schemeClr val="bg1"/>
+                </a:solidFill>
+              </a:rPr>
+              <a:t>デバッグ時</a:t>
+            </a:r>
+          </a:p>
+        </p:txBody>
+      </p:sp>
+      <p:sp>
+        <p:nvSpPr>
+          <p:cNvPr id="9" name="テキスト ボックス 8">
+            <a:extLst>
+              <a:ext uri="{FF2B5EF4-FFF2-40B4-BE49-F238E27FC236}">
+                <a16:creationId xmlns:a16="http://schemas.microsoft.com/office/drawing/2014/main" id="{E7C9A0F4-CB67-EF81-EDCA-8E9D4C6724DE}"/>
+              </a:ext>
+            </a:extLst>
+          </p:cNvPr>
+          <p:cNvSpPr txBox="1"/>
+          <p:nvPr/>
+        </p:nvSpPr>
+        <p:spPr>
+          <a:xfrm>
+            <a:off x="371168" y="2255114"/>
+            <a:ext cx="10754032" cy="461665"/>
+          </a:xfrm>
+          <a:prstGeom prst="rect">
+            <a:avLst/>
+          </a:prstGeom>
+          <a:noFill/>
+          <a:ln>
+            <a:noFill/>
+          </a:ln>
+        </p:spPr>
+        <p:txBody>
+          <a:bodyPr wrap="square" rtlCol="0">
+            <a:spAutoFit/>
+          </a:bodyPr>
+          <a:lstStyle/>
+          <a:p>
+            <a:r>
+              <a:rPr kumimoji="1" lang="ja-JP" altLang="en-US" sz="2400" dirty="0">
+                <a:solidFill>
+                  <a:schemeClr val="bg1"/>
+                </a:solidFill>
+              </a:rPr>
+              <a:t>リソース管理</a:t>
+            </a:r>
+            <a:endParaRPr kumimoji="1" lang="en-US" altLang="ja-JP" sz="2400" dirty="0">
+              <a:solidFill>
+                <a:schemeClr val="bg1"/>
+              </a:solidFill>
+            </a:endParaRPr>
+          </a:p>
+        </p:txBody>
+      </p:sp>
+    </p:spTree>
+    <p:extLst>
+      <p:ext uri="{BB962C8B-B14F-4D97-AF65-F5344CB8AC3E}">
+        <p14:creationId xmlns:p14="http://schemas.microsoft.com/office/powerpoint/2010/main" val="1589482950"/>
+      </p:ext>
+    </p:extLst>
   </p:cSld>
   <p:clrMapOvr>
     <a:masterClrMapping/>
